--- a/examples/repositories/ppt-design-skill/deck.pptx
+++ b/examples/repositories/ppt-design-skill/deck.pptx
@@ -3878,9 +3878,9 @@
                 <a:solidFill>
                   <a:srgbClr val="8B6B5E"/>
                 </a:solidFill>
-                <a:latin typeface="Noto Sans JP"/>
-                <a:ea typeface="Noto Sans JP"/>
-                <a:cs typeface="Noto Sans JP"/>
+                <a:latin typeface="BIZ UDPGothic"/>
+                <a:ea typeface="BIZ UDPGothic"/>
+                <a:cs typeface="BIZ UDPGothic"/>
               </a:rPr>
               <a:t>ASANAGI CAFÉ  /  朝営業の試行計画</a:t>
             </a:r>
@@ -3915,9 +3915,9 @@
                 <a:solidFill>
                   <a:srgbClr val="3D2B1F"/>
                 </a:solidFill>
-                <a:latin typeface="Noto Serif JP"/>
-                <a:ea typeface="Noto Serif JP"/>
-                <a:cs typeface="Noto Sans JP"/>
+                <a:latin typeface="Shippori Mincho"/>
+                <a:ea typeface="Shippori Mincho"/>
+                <a:cs typeface="BIZ UDPGothic"/>
               </a:rPr>
               <a:t>朝の2時間を、2週間だけ試す</a:t>
             </a:r>
@@ -3977,13 +3977,13 @@
           <a:p>
             <a:pPr algn="l"/>
             <a:r>
-              <a:rPr sz="900" b="0" lang="ja-JP">
+              <a:rPr sz="1300" b="0" lang="ja-JP">
                 <a:solidFill>
                   <a:srgbClr val="8B6B5E"/>
                 </a:solidFill>
-                <a:latin typeface="Noto Sans JP"/>
-                <a:ea typeface="Noto Sans JP"/>
-                <a:cs typeface="Noto Sans JP"/>
+                <a:latin typeface="BIZ UDPGothic"/>
+                <a:ea typeface="BIZ UDPGothic"/>
+                <a:cs typeface="BIZ UDPGothic"/>
               </a:rPr>
               <a:t>架空の企画案  •  提案値・仮定値  •  実績未収集</a:t>
             </a:r>
@@ -4018,9 +4018,9 @@
                 <a:solidFill>
                   <a:srgbClr val="8B6B5E"/>
                 </a:solidFill>
-                <a:latin typeface="Noto Sans JP"/>
-                <a:ea typeface="Noto Sans JP"/>
-                <a:cs typeface="Noto Sans JP"/>
+                <a:latin typeface="BIZ UDPGothic"/>
+                <a:ea typeface="BIZ UDPGothic"/>
+                <a:cs typeface="BIZ UDPGothic"/>
               </a:rPr>
               <a:t>1 / 5</a:t>
             </a:r>
@@ -4055,11 +4055,11 @@
                 <a:solidFill>
                   <a:srgbClr val="3D2B1F"/>
                 </a:solidFill>
-                <a:latin typeface="Noto Serif JP"/>
-                <a:ea typeface="Noto Serif JP"/>
-                <a:cs typeface="Noto Sans JP"/>
-              </a:rPr>
-              <a:t>通勤前に、ひと息つける場所を。</a:t>
+                <a:latin typeface="Shippori Mincho"/>
+                <a:ea typeface="Shippori Mincho"/>
+                <a:cs typeface="BIZ UDPGothic"/>
+              </a:rPr>
+              <a:t>朝営業の需要と、現場の負担を確かめる</a:t>
             </a:r>
           </a:p>
         </p:txBody>
@@ -4092,12 +4092,12 @@
                 <a:solidFill>
                   <a:srgbClr val="3D2B1F"/>
                 </a:solidFill>
-                <a:latin typeface="Noto Sans JP"/>
-                <a:ea typeface="Noto Sans JP"/>
-                <a:cs typeface="Noto Sans JP"/>
-              </a:rPr>
-              <a:t>通常10時開店の前に、
-朝の来店需要と現場の負担を確かめる。</a:t>
+                <a:latin typeface="BIZ UDPGothic"/>
+                <a:ea typeface="BIZ UDPGothic"/>
+                <a:cs typeface="BIZ UDPGothic"/>
+              </a:rPr>
+              <a:t>通常10時開店の前に試す企画案。
+通常営業と両立できるか、10日間で確認する。</a:t>
             </a:r>
           </a:p>
         </p:txBody>
@@ -4111,7 +4111,7 @@
         <p:spPr>
           <a:xfrm>
             <a:off x="777240" y="4709160"/>
-            <a:ext cx="2103120" cy="594360"/>
+            <a:ext cx="3291840" cy="594360"/>
           </a:xfrm>
           <a:prstGeom prst="rect">
             <a:avLst/>
@@ -4130,9 +4130,9 @@
                 <a:solidFill>
                   <a:srgbClr val="3D2B1F"/>
                 </a:solidFill>
-                <a:latin typeface="Noto Sans JP"/>
-                <a:ea typeface="Noto Sans JP"/>
-                <a:cs typeface="Noto Sans JP"/>
+                <a:latin typeface="BIZ UDPGothic"/>
+                <a:ea typeface="BIZ UDPGothic"/>
+                <a:cs typeface="BIZ UDPGothic"/>
               </a:rPr>
               <a:t>8:00–10:00</a:t>
             </a:r>
@@ -4148,7 +4148,7 @@
         <p:spPr>
           <a:xfrm>
             <a:off x="777240" y="5349240"/>
-            <a:ext cx="2103120" cy="457200"/>
+            <a:ext cx="3291840" cy="457200"/>
           </a:xfrm>
           <a:prstGeom prst="rect">
             <a:avLst/>
@@ -4167,9 +4167,9 @@
                 <a:solidFill>
                   <a:srgbClr val="8B6B5E"/>
                 </a:solidFill>
-                <a:latin typeface="Noto Sans JP"/>
-                <a:ea typeface="Noto Sans JP"/>
-                <a:cs typeface="Noto Sans JP"/>
+                <a:latin typeface="BIZ UDPGothic"/>
+                <a:ea typeface="BIZ UDPGothic"/>
+                <a:cs typeface="BIZ UDPGothic"/>
               </a:rPr>
               <a:t>朝の営業時間</a:t>
             </a:r>
@@ -4184,8 +4184,8 @@
         </p:nvSpPr>
         <p:spPr>
           <a:xfrm>
-            <a:off x="2971800" y="4709160"/>
-            <a:ext cx="2103120" cy="594360"/>
+            <a:off x="4023360" y="4709160"/>
+            <a:ext cx="1920240" cy="594360"/>
           </a:xfrm>
           <a:prstGeom prst="rect">
             <a:avLst/>
@@ -4204,9 +4204,9 @@
                 <a:solidFill>
                   <a:srgbClr val="3D2B1F"/>
                 </a:solidFill>
-                <a:latin typeface="Noto Sans JP"/>
-                <a:ea typeface="Noto Sans JP"/>
-                <a:cs typeface="Noto Sans JP"/>
+                <a:latin typeface="BIZ UDPGothic"/>
+                <a:ea typeface="BIZ UDPGothic"/>
+                <a:cs typeface="BIZ UDPGothic"/>
               </a:rPr>
               <a:t>10日間</a:t>
             </a:r>
@@ -4221,8 +4221,8 @@
         </p:nvSpPr>
         <p:spPr>
           <a:xfrm>
-            <a:off x="2971800" y="5349240"/>
-            <a:ext cx="2103120" cy="457200"/>
+            <a:off x="4023360" y="5349240"/>
+            <a:ext cx="1920240" cy="457200"/>
           </a:xfrm>
           <a:prstGeom prst="rect">
             <a:avLst/>
@@ -4241,9 +4241,9 @@
                 <a:solidFill>
                   <a:srgbClr val="8B6B5E"/>
                 </a:solidFill>
-                <a:latin typeface="Noto Sans JP"/>
-                <a:ea typeface="Noto Sans JP"/>
-                <a:cs typeface="Noto Sans JP"/>
+                <a:latin typeface="BIZ UDPGothic"/>
+                <a:ea typeface="BIZ UDPGothic"/>
+                <a:cs typeface="BIZ UDPGothic"/>
               </a:rPr>
               <a:t>2週間の平日</a:t>
             </a:r>
@@ -4258,8 +4258,8 @@
         </p:nvSpPr>
         <p:spPr>
           <a:xfrm>
-            <a:off x="5166359" y="4709160"/>
-            <a:ext cx="2103120" cy="594360"/>
+            <a:off x="6583680" y="4709160"/>
+            <a:ext cx="1828800" cy="594360"/>
           </a:xfrm>
           <a:prstGeom prst="rect">
             <a:avLst/>
@@ -4278,9 +4278,9 @@
                 <a:solidFill>
                   <a:srgbClr val="3D2B1F"/>
                 </a:solidFill>
-                <a:latin typeface="Noto Sans JP"/>
-                <a:ea typeface="Noto Sans JP"/>
-                <a:cs typeface="Noto Sans JP"/>
+                <a:latin typeface="BIZ UDPGothic"/>
+                <a:ea typeface="BIZ UDPGothic"/>
+                <a:cs typeface="BIZ UDPGothic"/>
               </a:rPr>
               <a:t>650円</a:t>
             </a:r>
@@ -4295,8 +4295,8 @@
         </p:nvSpPr>
         <p:spPr>
           <a:xfrm>
-            <a:off x="5166359" y="5349240"/>
-            <a:ext cx="2103120" cy="457200"/>
+            <a:off x="6583680" y="5349240"/>
+            <a:ext cx="1828800" cy="457200"/>
           </a:xfrm>
           <a:prstGeom prst="rect">
             <a:avLst/>
@@ -4315,9 +4315,9 @@
                 <a:solidFill>
                   <a:srgbClr val="8B6B5E"/>
                 </a:solidFill>
-                <a:latin typeface="Noto Sans JP"/>
-                <a:ea typeface="Noto Sans JP"/>
-                <a:cs typeface="Noto Sans JP"/>
+                <a:latin typeface="BIZ UDPGothic"/>
+                <a:ea typeface="BIZ UDPGothic"/>
+                <a:cs typeface="BIZ UDPGothic"/>
               </a:rPr>
               <a:t>セットの仮価格</a:t>
             </a:r>
@@ -4450,8 +4450,8 @@
         </p:nvSpPr>
         <p:spPr>
           <a:xfrm>
-            <a:off x="8092440" y="5349240"/>
-            <a:ext cx="2926080" cy="411480"/>
+            <a:off x="8549640" y="4590288"/>
+            <a:ext cx="2377440" cy="411480"/>
           </a:xfrm>
           <a:prstGeom prst="rect">
             <a:avLst/>
@@ -4470,9 +4470,9 @@
                 <a:solidFill>
                   <a:srgbClr val="3D2B1F"/>
                 </a:solidFill>
-                <a:latin typeface="Noto Serif JP"/>
-                <a:ea typeface="Noto Serif JP"/>
-                <a:cs typeface="Noto Sans JP"/>
+                <a:latin typeface="Shippori Mincho"/>
+                <a:ea typeface="Shippori Mincho"/>
+                <a:cs typeface="BIZ UDPGothic"/>
               </a:rPr>
               <a:t>朝凪カフェ</a:t>
             </a:r>
@@ -4583,9 +4583,9 @@
                 <a:solidFill>
                   <a:srgbClr val="8B6B5E"/>
                 </a:solidFill>
-                <a:latin typeface="Noto Sans JP"/>
-                <a:ea typeface="Noto Sans JP"/>
-                <a:cs typeface="Noto Sans JP"/>
+                <a:latin typeface="BIZ UDPGothic"/>
+                <a:ea typeface="BIZ UDPGothic"/>
+                <a:cs typeface="BIZ UDPGothic"/>
               </a:rPr>
               <a:t>ASANAGI CAFÉ  /  朝営業の試行計画</a:t>
             </a:r>
@@ -4620,9 +4620,9 @@
                 <a:solidFill>
                   <a:srgbClr val="3D2B1F"/>
                 </a:solidFill>
-                <a:latin typeface="Noto Serif JP"/>
-                <a:ea typeface="Noto Serif JP"/>
-                <a:cs typeface="Noto Sans JP"/>
+                <a:latin typeface="Shippori Mincho"/>
+                <a:ea typeface="Shippori Mincho"/>
+                <a:cs typeface="BIZ UDPGothic"/>
               </a:rPr>
               <a:t>メニューと役割を、小さく始める</a:t>
             </a:r>
@@ -4682,13 +4682,13 @@
           <a:p>
             <a:pPr algn="l"/>
             <a:r>
-              <a:rPr sz="900" b="0" lang="ja-JP">
+              <a:rPr sz="1300" b="0" lang="ja-JP">
                 <a:solidFill>
                   <a:srgbClr val="8B6B5E"/>
                 </a:solidFill>
-                <a:latin typeface="Noto Sans JP"/>
-                <a:ea typeface="Noto Sans JP"/>
-                <a:cs typeface="Noto Sans JP"/>
+                <a:latin typeface="BIZ UDPGothic"/>
+                <a:ea typeface="BIZ UDPGothic"/>
+                <a:cs typeface="BIZ UDPGothic"/>
               </a:rPr>
               <a:t>架空の企画案  •  提案値・仮定値  •  実績未収集</a:t>
             </a:r>
@@ -4723,9 +4723,9 @@
                 <a:solidFill>
                   <a:srgbClr val="8B6B5E"/>
                 </a:solidFill>
-                <a:latin typeface="Noto Sans JP"/>
-                <a:ea typeface="Noto Sans JP"/>
-                <a:cs typeface="Noto Sans JP"/>
+                <a:latin typeface="BIZ UDPGothic"/>
+                <a:ea typeface="BIZ UDPGothic"/>
+                <a:cs typeface="BIZ UDPGothic"/>
               </a:rPr>
               <a:t>2 / 5</a:t>
             </a:r>
@@ -4740,14 +4740,14 @@
         </p:nvSpPr>
         <p:spPr>
           <a:xfrm>
-            <a:off x="777240" y="2377440"/>
-            <a:ext cx="3337560" cy="54864"/>
+            <a:off x="777240" y="2395728"/>
+            <a:ext cx="3154680" cy="2971800"/>
           </a:xfrm>
           <a:prstGeom prst="rect">
             <a:avLst/>
           </a:prstGeom>
           <a:solidFill>
-            <a:srgbClr val="C4704B"/>
+            <a:srgbClr val="F0E0D5"/>
           </a:solidFill>
           <a:ln>
             <a:noFill/>
@@ -4769,107 +4769,106 @@
         </p:nvSpPr>
         <p:spPr>
           <a:xfrm>
-            <a:off x="777240" y="2697480"/>
-            <a:ext cx="3200400" cy="502920"/>
-          </a:xfrm>
-          <a:prstGeom prst="rect">
-            <a:avLst/>
-          </a:prstGeom>
-          <a:noFill/>
-        </p:spPr>
-        <p:txBody>
-          <a:bodyPr wrap="square">
-            <a:spAutoFit/>
-          </a:bodyPr>
-          <a:lstStyle/>
-          <a:p>
-            <a:pPr algn="l"/>
-            <a:r>
-              <a:rPr sz="2500" b="1" lang="ja-JP">
+            <a:off x="978408" y="2633472"/>
+            <a:ext cx="2788920" cy="548640"/>
+          </a:xfrm>
+          <a:prstGeom prst="rect">
+            <a:avLst/>
+          </a:prstGeom>
+          <a:noFill/>
+        </p:spPr>
+        <p:txBody>
+          <a:bodyPr wrap="square">
+            <a:spAutoFit/>
+          </a:bodyPr>
+          <a:lstStyle/>
+          <a:p>
+            <a:pPr algn="l"/>
+            <a:r>
+              <a:rPr sz="2200" b="0" lang="ja-JP">
+                <a:solidFill>
+                  <a:srgbClr val="3D2B1F"/>
+                </a:solidFill>
+                <a:latin typeface="Shippori Mincho"/>
+                <a:ea typeface="Shippori Mincho"/>
+                <a:cs typeface="BIZ UDPGothic"/>
+              </a:rPr>
+              <a:t>商品は1種類</a:t>
+            </a:r>
+          </a:p>
+        </p:txBody>
+      </p:sp>
+      <p:sp>
+        <p:nvSpPr>
+          <p:cNvPr id="11" name="TextBox 10"/>
+          <p:cNvSpPr txBox="1"/>
+          <p:nvPr/>
+        </p:nvSpPr>
+        <p:spPr>
+          <a:xfrm>
+            <a:off x="978408" y="3337560"/>
+            <a:ext cx="2788920" cy="1097280"/>
+          </a:xfrm>
+          <a:prstGeom prst="rect">
+            <a:avLst/>
+          </a:prstGeom>
+          <a:noFill/>
+        </p:spPr>
+        <p:txBody>
+          <a:bodyPr wrap="square">
+            <a:spAutoFit/>
+          </a:bodyPr>
+          <a:lstStyle/>
+          <a:p>
+            <a:pPr algn="l"/>
+            <a:r>
+              <a:rPr sz="2000" b="0" lang="ja-JP">
+                <a:solidFill>
+                  <a:srgbClr val="3D2B1F"/>
+                </a:solidFill>
+                <a:latin typeface="BIZ UDPGothic"/>
+                <a:ea typeface="BIZ UDPGothic"/>
+                <a:cs typeface="BIZ UDPGothic"/>
+              </a:rPr>
+              <a:t>コーヒー＋トースト
+1セット 650円（仮）</a:t>
+            </a:r>
+          </a:p>
+        </p:txBody>
+      </p:sp>
+      <p:sp>
+        <p:nvSpPr>
+          <p:cNvPr id="12" name="TextBox 11"/>
+          <p:cNvSpPr txBox="1"/>
+          <p:nvPr/>
+        </p:nvSpPr>
+        <p:spPr>
+          <a:xfrm>
+            <a:off x="978408" y="4681728"/>
+            <a:ext cx="2788920" cy="457200"/>
+          </a:xfrm>
+          <a:prstGeom prst="rect">
+            <a:avLst/>
+          </a:prstGeom>
+          <a:noFill/>
+        </p:spPr>
+        <p:txBody>
+          <a:bodyPr wrap="square">
+            <a:spAutoFit/>
+          </a:bodyPr>
+          <a:lstStyle/>
+          <a:p>
+            <a:pPr algn="l"/>
+            <a:r>
+              <a:rPr sz="1500" b="0" lang="ja-JP">
                 <a:solidFill>
                   <a:srgbClr val="8B6B5E"/>
                 </a:solidFill>
-                <a:latin typeface="Noto Sans JP"/>
-                <a:ea typeface="Noto Sans JP"/>
-                <a:cs typeface="Noto Sans JP"/>
-              </a:rPr>
-              <a:t>01</a:t>
-            </a:r>
-          </a:p>
-        </p:txBody>
-      </p:sp>
-      <p:sp>
-        <p:nvSpPr>
-          <p:cNvPr id="11" name="TextBox 10"/>
-          <p:cNvSpPr txBox="1"/>
-          <p:nvPr/>
-        </p:nvSpPr>
-        <p:spPr>
-          <a:xfrm>
-            <a:off x="777240" y="3429000"/>
-            <a:ext cx="3200400" cy="594360"/>
-          </a:xfrm>
-          <a:prstGeom prst="rect">
-            <a:avLst/>
-          </a:prstGeom>
-          <a:noFill/>
-        </p:spPr>
-        <p:txBody>
-          <a:bodyPr wrap="square">
-            <a:spAutoFit/>
-          </a:bodyPr>
-          <a:lstStyle/>
-          <a:p>
-            <a:pPr algn="l"/>
-            <a:r>
-              <a:rPr sz="2300" b="0" lang="ja-JP">
-                <a:solidFill>
-                  <a:srgbClr val="3D2B1F"/>
-                </a:solidFill>
-                <a:latin typeface="Noto Serif JP"/>
-                <a:ea typeface="Noto Serif JP"/>
-                <a:cs typeface="Noto Sans JP"/>
-              </a:rPr>
-              <a:t>商品を絞る</a:t>
-            </a:r>
-          </a:p>
-        </p:txBody>
-      </p:sp>
-      <p:sp>
-        <p:nvSpPr>
-          <p:cNvPr id="12" name="TextBox 11"/>
-          <p:cNvSpPr txBox="1"/>
-          <p:nvPr/>
-        </p:nvSpPr>
-        <p:spPr>
-          <a:xfrm>
-            <a:off x="777240" y="4251960"/>
-            <a:ext cx="3337560" cy="1371600"/>
-          </a:xfrm>
-          <a:prstGeom prst="rect">
-            <a:avLst/>
-          </a:prstGeom>
-          <a:noFill/>
-        </p:spPr>
-        <p:txBody>
-          <a:bodyPr wrap="square">
-            <a:spAutoFit/>
-          </a:bodyPr>
-          <a:lstStyle/>
-          <a:p>
-            <a:pPr algn="l"/>
-            <a:r>
-              <a:rPr sz="1700" b="0" lang="ja-JP">
-                <a:solidFill>
-                  <a:srgbClr val="3D2B1F"/>
-                </a:solidFill>
-                <a:latin typeface="Noto Sans JP"/>
-                <a:ea typeface="Noto Sans JP"/>
-                <a:cs typeface="Noto Sans JP"/>
-              </a:rPr>
-              <a:t>コーヒー＋トースト
-1セット 650円（仮）
-追加メニューは設けない</a:t>
+                <a:latin typeface="BIZ UDPGothic"/>
+                <a:ea typeface="BIZ UDPGothic"/>
+                <a:cs typeface="BIZ UDPGothic"/>
+              </a:rPr>
+              <a:t>追加メニューは設けない</a:t>
             </a:r>
           </a:p>
         </p:txBody>
@@ -4882,14 +4881,14 @@
         </p:nvSpPr>
         <p:spPr>
           <a:xfrm>
-            <a:off x="4434840" y="2377440"/>
-            <a:ext cx="3337560" cy="54864"/>
+            <a:off x="4434840" y="2651760"/>
+            <a:ext cx="1965960" cy="658368"/>
           </a:xfrm>
           <a:prstGeom prst="rect">
             <a:avLst/>
           </a:prstGeom>
           <a:solidFill>
-            <a:srgbClr val="C4704B"/>
+            <a:srgbClr val="F0E0D5"/>
           </a:solidFill>
           <a:ln>
             <a:noFill/>
@@ -4911,107 +4910,105 @@
         </p:nvSpPr>
         <p:spPr>
           <a:xfrm>
-            <a:off x="4434840" y="2697480"/>
-            <a:ext cx="3200400" cy="502920"/>
-          </a:xfrm>
-          <a:prstGeom prst="rect">
-            <a:avLst/>
-          </a:prstGeom>
-          <a:noFill/>
-        </p:spPr>
-        <p:txBody>
-          <a:bodyPr wrap="square">
-            <a:spAutoFit/>
-          </a:bodyPr>
-          <a:lstStyle/>
-          <a:p>
-            <a:pPr algn="l"/>
-            <a:r>
-              <a:rPr sz="2500" b="1" lang="ja-JP">
+            <a:off x="4544568" y="2761488"/>
+            <a:ext cx="1737360" cy="411480"/>
+          </a:xfrm>
+          <a:prstGeom prst="rect">
+            <a:avLst/>
+          </a:prstGeom>
+          <a:noFill/>
+        </p:spPr>
+        <p:txBody>
+          <a:bodyPr wrap="square">
+            <a:spAutoFit/>
+          </a:bodyPr>
+          <a:lstStyle/>
+          <a:p>
+            <a:pPr algn="l"/>
+            <a:r>
+              <a:rPr sz="2100" b="0" lang="ja-JP">
+                <a:solidFill>
+                  <a:srgbClr val="3D2B1F"/>
+                </a:solidFill>
+                <a:latin typeface="Shippori Mincho"/>
+                <a:ea typeface="Shippori Mincho"/>
+                <a:cs typeface="BIZ UDPGothic"/>
+              </a:rPr>
+              <a:t>会計</a:t>
+            </a:r>
+          </a:p>
+        </p:txBody>
+      </p:sp>
+      <p:sp>
+        <p:nvSpPr>
+          <p:cNvPr id="15" name="TextBox 14"/>
+          <p:cNvSpPr txBox="1"/>
+          <p:nvPr/>
+        </p:nvSpPr>
+        <p:spPr>
+          <a:xfrm>
+            <a:off x="4434840" y="3566160"/>
+            <a:ext cx="2011680" cy="640080"/>
+          </a:xfrm>
+          <a:prstGeom prst="rect">
+            <a:avLst/>
+          </a:prstGeom>
+          <a:noFill/>
+        </p:spPr>
+        <p:txBody>
+          <a:bodyPr wrap="square">
+            <a:spAutoFit/>
+          </a:bodyPr>
+          <a:lstStyle/>
+          <a:p>
+            <a:pPr algn="l"/>
+            <a:r>
+              <a:rPr sz="1600" b="0" lang="ja-JP">
+                <a:solidFill>
+                  <a:srgbClr val="3D2B1F"/>
+                </a:solidFill>
+                <a:latin typeface="BIZ UDPGothic"/>
+                <a:ea typeface="BIZ UDPGothic"/>
+                <a:cs typeface="BIZ UDPGothic"/>
+              </a:rPr>
+              <a:t>注文・会計</a:t>
+            </a:r>
+          </a:p>
+        </p:txBody>
+      </p:sp>
+      <p:sp>
+        <p:nvSpPr>
+          <p:cNvPr id="16" name="TextBox 15"/>
+          <p:cNvSpPr txBox="1"/>
+          <p:nvPr/>
+        </p:nvSpPr>
+        <p:spPr>
+          <a:xfrm>
+            <a:off x="6373368" y="2743200"/>
+            <a:ext cx="365760" cy="365760"/>
+          </a:xfrm>
+          <a:prstGeom prst="rect">
+            <a:avLst/>
+          </a:prstGeom>
+          <a:noFill/>
+        </p:spPr>
+        <p:txBody>
+          <a:bodyPr wrap="square">
+            <a:spAutoFit/>
+          </a:bodyPr>
+          <a:lstStyle/>
+          <a:p>
+            <a:pPr algn="l"/>
+            <a:r>
+              <a:rPr sz="1900" b="1" lang="ja-JP">
                 <a:solidFill>
                   <a:srgbClr val="8B6B5E"/>
                 </a:solidFill>
-                <a:latin typeface="Noto Sans JP"/>
-                <a:ea typeface="Noto Sans JP"/>
-                <a:cs typeface="Noto Sans JP"/>
-              </a:rPr>
-              <a:t>02</a:t>
-            </a:r>
-          </a:p>
-        </p:txBody>
-      </p:sp>
-      <p:sp>
-        <p:nvSpPr>
-          <p:cNvPr id="15" name="TextBox 14"/>
-          <p:cNvSpPr txBox="1"/>
-          <p:nvPr/>
-        </p:nvSpPr>
-        <p:spPr>
-          <a:xfrm>
-            <a:off x="4434840" y="3429000"/>
-            <a:ext cx="3200400" cy="594360"/>
-          </a:xfrm>
-          <a:prstGeom prst="rect">
-            <a:avLst/>
-          </a:prstGeom>
-          <a:noFill/>
-        </p:spPr>
-        <p:txBody>
-          <a:bodyPr wrap="square">
-            <a:spAutoFit/>
-          </a:bodyPr>
-          <a:lstStyle/>
-          <a:p>
-            <a:pPr algn="l"/>
-            <a:r>
-              <a:rPr sz="2300" b="0" lang="ja-JP">
-                <a:solidFill>
-                  <a:srgbClr val="3D2B1F"/>
-                </a:solidFill>
-                <a:latin typeface="Noto Serif JP"/>
-                <a:ea typeface="Noto Serif JP"/>
-                <a:cs typeface="Noto Sans JP"/>
-              </a:rPr>
-              <a:t>役割を分ける</a:t>
-            </a:r>
-          </a:p>
-        </p:txBody>
-      </p:sp>
-      <p:sp>
-        <p:nvSpPr>
-          <p:cNvPr id="16" name="TextBox 15"/>
-          <p:cNvSpPr txBox="1"/>
-          <p:nvPr/>
-        </p:nvSpPr>
-        <p:spPr>
-          <a:xfrm>
-            <a:off x="4434840" y="4251960"/>
-            <a:ext cx="3337560" cy="1371600"/>
-          </a:xfrm>
-          <a:prstGeom prst="rect">
-            <a:avLst/>
-          </a:prstGeom>
-          <a:noFill/>
-        </p:spPr>
-        <p:txBody>
-          <a:bodyPr wrap="square">
-            <a:spAutoFit/>
-          </a:bodyPr>
-          <a:lstStyle/>
-          <a:p>
-            <a:pPr algn="l"/>
-            <a:r>
-              <a:rPr sz="1700" b="0" lang="ja-JP">
-                <a:solidFill>
-                  <a:srgbClr val="3D2B1F"/>
-                </a:solidFill>
-                <a:latin typeface="Noto Sans JP"/>
-                <a:ea typeface="Noto Sans JP"/>
-                <a:cs typeface="Noto Sans JP"/>
-              </a:rPr>
-              <a:t>調理担当：セットを準備
-会計担当：注文と提供
-開始前に担当者を決める</a:t>
+                <a:latin typeface="BIZ UDPGothic"/>
+                <a:ea typeface="BIZ UDPGothic"/>
+                <a:cs typeface="BIZ UDPGothic"/>
+              </a:rPr>
+              <a:t>→</a:t>
             </a:r>
           </a:p>
         </p:txBody>
@@ -5024,14 +5021,14 @@
         </p:nvSpPr>
         <p:spPr>
           <a:xfrm>
-            <a:off x="8092440" y="2377440"/>
-            <a:ext cx="3337560" cy="54864"/>
+            <a:off x="6720840" y="2651760"/>
+            <a:ext cx="1965960" cy="658368"/>
           </a:xfrm>
           <a:prstGeom prst="rect">
             <a:avLst/>
           </a:prstGeom>
           <a:solidFill>
-            <a:srgbClr val="C4704B"/>
+            <a:srgbClr val="F0E0D5"/>
           </a:solidFill>
           <a:ln>
             <a:noFill/>
@@ -5053,82 +5050,222 @@
         </p:nvSpPr>
         <p:spPr>
           <a:xfrm>
-            <a:off x="8092440" y="2697480"/>
-            <a:ext cx="3200400" cy="502920"/>
-          </a:xfrm>
-          <a:prstGeom prst="rect">
-            <a:avLst/>
-          </a:prstGeom>
-          <a:noFill/>
-        </p:spPr>
-        <p:txBody>
-          <a:bodyPr wrap="square">
-            <a:spAutoFit/>
-          </a:bodyPr>
-          <a:lstStyle/>
-          <a:p>
-            <a:pPr algn="l"/>
-            <a:r>
-              <a:rPr sz="2500" b="1" lang="ja-JP">
+            <a:off x="6830568" y="2761488"/>
+            <a:ext cx="1737360" cy="411480"/>
+          </a:xfrm>
+          <a:prstGeom prst="rect">
+            <a:avLst/>
+          </a:prstGeom>
+          <a:noFill/>
+        </p:spPr>
+        <p:txBody>
+          <a:bodyPr wrap="square">
+            <a:spAutoFit/>
+          </a:bodyPr>
+          <a:lstStyle/>
+          <a:p>
+            <a:pPr algn="l"/>
+            <a:r>
+              <a:rPr sz="2100" b="0" lang="ja-JP">
+                <a:solidFill>
+                  <a:srgbClr val="3D2B1F"/>
+                </a:solidFill>
+                <a:latin typeface="Shippori Mincho"/>
+                <a:ea typeface="Shippori Mincho"/>
+                <a:cs typeface="BIZ UDPGothic"/>
+              </a:rPr>
+              <a:t>調理</a:t>
+            </a:r>
+          </a:p>
+        </p:txBody>
+      </p:sp>
+      <p:sp>
+        <p:nvSpPr>
+          <p:cNvPr id="19" name="TextBox 18"/>
+          <p:cNvSpPr txBox="1"/>
+          <p:nvPr/>
+        </p:nvSpPr>
+        <p:spPr>
+          <a:xfrm>
+            <a:off x="6720840" y="3566160"/>
+            <a:ext cx="2011680" cy="640080"/>
+          </a:xfrm>
+          <a:prstGeom prst="rect">
+            <a:avLst/>
+          </a:prstGeom>
+          <a:noFill/>
+        </p:spPr>
+        <p:txBody>
+          <a:bodyPr wrap="square">
+            <a:spAutoFit/>
+          </a:bodyPr>
+          <a:lstStyle/>
+          <a:p>
+            <a:pPr algn="l"/>
+            <a:r>
+              <a:rPr sz="1600" b="0" lang="ja-JP">
+                <a:solidFill>
+                  <a:srgbClr val="3D2B1F"/>
+                </a:solidFill>
+                <a:latin typeface="BIZ UDPGothic"/>
+                <a:ea typeface="BIZ UDPGothic"/>
+                <a:cs typeface="BIZ UDPGothic"/>
+              </a:rPr>
+              <a:t>セットを準備</a:t>
+            </a:r>
+          </a:p>
+        </p:txBody>
+      </p:sp>
+      <p:sp>
+        <p:nvSpPr>
+          <p:cNvPr id="20" name="TextBox 19"/>
+          <p:cNvSpPr txBox="1"/>
+          <p:nvPr/>
+        </p:nvSpPr>
+        <p:spPr>
+          <a:xfrm>
+            <a:off x="8659367" y="2743200"/>
+            <a:ext cx="365760" cy="365760"/>
+          </a:xfrm>
+          <a:prstGeom prst="rect">
+            <a:avLst/>
+          </a:prstGeom>
+          <a:noFill/>
+        </p:spPr>
+        <p:txBody>
+          <a:bodyPr wrap="square">
+            <a:spAutoFit/>
+          </a:bodyPr>
+          <a:lstStyle/>
+          <a:p>
+            <a:pPr algn="l"/>
+            <a:r>
+              <a:rPr sz="1900" b="1" lang="ja-JP">
                 <a:solidFill>
                   <a:srgbClr val="8B6B5E"/>
                 </a:solidFill>
-                <a:latin typeface="Noto Sans JP"/>
-                <a:ea typeface="Noto Sans JP"/>
-                <a:cs typeface="Noto Sans JP"/>
-              </a:rPr>
-              <a:t>03</a:t>
-            </a:r>
-          </a:p>
-        </p:txBody>
-      </p:sp>
-      <p:sp>
-        <p:nvSpPr>
-          <p:cNvPr id="19" name="TextBox 18"/>
-          <p:cNvSpPr txBox="1"/>
-          <p:nvPr/>
-        </p:nvSpPr>
-        <p:spPr>
-          <a:xfrm>
-            <a:off x="8092440" y="3429000"/>
-            <a:ext cx="3200400" cy="594360"/>
-          </a:xfrm>
-          <a:prstGeom prst="rect">
-            <a:avLst/>
-          </a:prstGeom>
-          <a:noFill/>
-        </p:spPr>
-        <p:txBody>
-          <a:bodyPr wrap="square">
-            <a:spAutoFit/>
-          </a:bodyPr>
-          <a:lstStyle/>
-          <a:p>
-            <a:pPr algn="l"/>
-            <a:r>
-              <a:rPr sz="2300" b="0" lang="ja-JP">
+                <a:latin typeface="BIZ UDPGothic"/>
+                <a:ea typeface="BIZ UDPGothic"/>
+                <a:cs typeface="BIZ UDPGothic"/>
+              </a:rPr>
+              <a:t>→</a:t>
+            </a:r>
+          </a:p>
+        </p:txBody>
+      </p:sp>
+      <p:sp>
+        <p:nvSpPr>
+          <p:cNvPr id="21" name="Rectangle 20"/>
+          <p:cNvSpPr/>
+          <p:nvPr/>
+        </p:nvSpPr>
+        <p:spPr>
+          <a:xfrm>
+            <a:off x="9006840" y="2651760"/>
+            <a:ext cx="1965960" cy="658368"/>
+          </a:xfrm>
+          <a:prstGeom prst="rect">
+            <a:avLst/>
+          </a:prstGeom>
+          <a:solidFill>
+            <a:srgbClr val="F0E0D5"/>
+          </a:solidFill>
+          <a:ln>
+            <a:noFill/>
+          </a:ln>
+        </p:spPr>
+        <p:txBody>
+          <a:bodyPr rtlCol="0" anchor="ctr"/>
+          <a:lstStyle/>
+          <a:p>
+            <a:pPr algn="ctr"/>
+          </a:p>
+        </p:txBody>
+      </p:sp>
+      <p:sp>
+        <p:nvSpPr>
+          <p:cNvPr id="22" name="TextBox 21"/>
+          <p:cNvSpPr txBox="1"/>
+          <p:nvPr/>
+        </p:nvSpPr>
+        <p:spPr>
+          <a:xfrm>
+            <a:off x="9116567" y="2761488"/>
+            <a:ext cx="1737360" cy="411480"/>
+          </a:xfrm>
+          <a:prstGeom prst="rect">
+            <a:avLst/>
+          </a:prstGeom>
+          <a:noFill/>
+        </p:spPr>
+        <p:txBody>
+          <a:bodyPr wrap="square">
+            <a:spAutoFit/>
+          </a:bodyPr>
+          <a:lstStyle/>
+          <a:p>
+            <a:pPr algn="l"/>
+            <a:r>
+              <a:rPr sz="2100" b="0" lang="ja-JP">
                 <a:solidFill>
                   <a:srgbClr val="3D2B1F"/>
                 </a:solidFill>
-                <a:latin typeface="Noto Serif JP"/>
-                <a:ea typeface="Noto Serif JP"/>
-                <a:cs typeface="Noto Sans JP"/>
-              </a:rPr>
-              <a:t>通常営業につなぐ</a:t>
-            </a:r>
-          </a:p>
-        </p:txBody>
-      </p:sp>
-      <p:sp>
-        <p:nvSpPr>
-          <p:cNvPr id="20" name="TextBox 19"/>
-          <p:cNvSpPr txBox="1"/>
-          <p:nvPr/>
-        </p:nvSpPr>
-        <p:spPr>
-          <a:xfrm>
-            <a:off x="8092440" y="4251960"/>
-            <a:ext cx="3337560" cy="1371600"/>
+                <a:latin typeface="Shippori Mincho"/>
+                <a:ea typeface="Shippori Mincho"/>
+                <a:cs typeface="BIZ UDPGothic"/>
+              </a:rPr>
+              <a:t>提供</a:t>
+            </a:r>
+          </a:p>
+        </p:txBody>
+      </p:sp>
+      <p:sp>
+        <p:nvSpPr>
+          <p:cNvPr id="23" name="TextBox 22"/>
+          <p:cNvSpPr txBox="1"/>
+          <p:nvPr/>
+        </p:nvSpPr>
+        <p:spPr>
+          <a:xfrm>
+            <a:off x="9006840" y="3566160"/>
+            <a:ext cx="2011680" cy="640080"/>
+          </a:xfrm>
+          <a:prstGeom prst="rect">
+            <a:avLst/>
+          </a:prstGeom>
+          <a:noFill/>
+        </p:spPr>
+        <p:txBody>
+          <a:bodyPr wrap="square">
+            <a:spAutoFit/>
+          </a:bodyPr>
+          <a:lstStyle/>
+          <a:p>
+            <a:pPr algn="l"/>
+            <a:r>
+              <a:rPr sz="1600" b="0" lang="ja-JP">
+                <a:solidFill>
+                  <a:srgbClr val="3D2B1F"/>
+                </a:solidFill>
+                <a:latin typeface="BIZ UDPGothic"/>
+                <a:ea typeface="BIZ UDPGothic"/>
+                <a:cs typeface="BIZ UDPGothic"/>
+              </a:rPr>
+              <a:t>会計担当が提供</a:t>
+            </a:r>
+          </a:p>
+        </p:txBody>
+      </p:sp>
+      <p:sp>
+        <p:nvSpPr>
+          <p:cNvPr id="24" name="TextBox 23"/>
+          <p:cNvSpPr txBox="1"/>
+          <p:nvPr/>
+        </p:nvSpPr>
+        <p:spPr>
+          <a:xfrm>
+            <a:off x="4434840" y="4389120"/>
+            <a:ext cx="6949440" cy="457200"/>
           </a:xfrm>
           <a:prstGeom prst="rect">
             <a:avLst/>
@@ -5147,13 +5284,48 @@
                 <a:solidFill>
                   <a:srgbClr val="3D2B1F"/>
                 </a:solidFill>
-                <a:latin typeface="Noto Sans JP"/>
-                <a:ea typeface="Noto Sans JP"/>
-                <a:cs typeface="Noto Sans JP"/>
-              </a:rPr>
-              <a:t>9:45に追加仕込みを判断
-10:00に通常営業へ切替
-片づけ時間も記録する</a:t>
+                <a:latin typeface="BIZ UDPGothic"/>
+                <a:ea typeface="BIZ UDPGothic"/>
+                <a:cs typeface="BIZ UDPGothic"/>
+              </a:rPr>
+              <a:t>開始前に担当者を決める。役割は兼務も含めて確認。</a:t>
+            </a:r>
+          </a:p>
+        </p:txBody>
+      </p:sp>
+      <p:sp>
+        <p:nvSpPr>
+          <p:cNvPr id="25" name="TextBox 24"/>
+          <p:cNvSpPr txBox="1"/>
+          <p:nvPr/>
+        </p:nvSpPr>
+        <p:spPr>
+          <a:xfrm>
+            <a:off x="4434840" y="5074920"/>
+            <a:ext cx="6949440" cy="640080"/>
+          </a:xfrm>
+          <a:prstGeom prst="rect">
+            <a:avLst/>
+          </a:prstGeom>
+          <a:noFill/>
+        </p:spPr>
+        <p:txBody>
+          <a:bodyPr wrap="square">
+            <a:spAutoFit/>
+          </a:bodyPr>
+          <a:lstStyle/>
+          <a:p>
+            <a:pPr algn="l"/>
+            <a:r>
+              <a:rPr sz="1600" b="1" lang="ja-JP">
+                <a:solidFill>
+                  <a:srgbClr val="8B6B5E"/>
+                </a:solidFill>
+                <a:latin typeface="BIZ UDPGothic"/>
+                <a:ea typeface="BIZ UDPGothic"/>
+                <a:cs typeface="BIZ UDPGothic"/>
+              </a:rPr>
+              <a:t>9:45 追加仕込みを判断 → 10:00 通常営業へ切替</a:t>
             </a:r>
           </a:p>
         </p:txBody>
@@ -5262,9 +5434,9 @@
                 <a:solidFill>
                   <a:srgbClr val="8B6B5E"/>
                 </a:solidFill>
-                <a:latin typeface="Noto Sans JP"/>
-                <a:ea typeface="Noto Sans JP"/>
-                <a:cs typeface="Noto Sans JP"/>
+                <a:latin typeface="BIZ UDPGothic"/>
+                <a:ea typeface="BIZ UDPGothic"/>
+                <a:cs typeface="BIZ UDPGothic"/>
               </a:rPr>
               <a:t>ASANAGI CAFÉ  /  朝営業の試行計画</a:t>
             </a:r>
@@ -5299,9 +5471,9 @@
                 <a:solidFill>
                   <a:srgbClr val="3D2B1F"/>
                 </a:solidFill>
-                <a:latin typeface="Noto Serif JP"/>
-                <a:ea typeface="Noto Serif JP"/>
-                <a:cs typeface="Noto Sans JP"/>
+                <a:latin typeface="Shippori Mincho"/>
+                <a:ea typeface="Shippori Mincho"/>
+                <a:cs typeface="BIZ UDPGothic"/>
               </a:rPr>
               <a:t>売上は仮定を変えて比べる</a:t>
             </a:r>
@@ -5361,13 +5533,13 @@
           <a:p>
             <a:pPr algn="l"/>
             <a:r>
-              <a:rPr sz="900" b="0" lang="ja-JP">
+              <a:rPr sz="1300" b="0" lang="ja-JP">
                 <a:solidFill>
                   <a:srgbClr val="8B6B5E"/>
                 </a:solidFill>
-                <a:latin typeface="Noto Sans JP"/>
-                <a:ea typeface="Noto Sans JP"/>
-                <a:cs typeface="Noto Sans JP"/>
+                <a:latin typeface="BIZ UDPGothic"/>
+                <a:ea typeface="BIZ UDPGothic"/>
+                <a:cs typeface="BIZ UDPGothic"/>
               </a:rPr>
               <a:t>架空の企画案  •  提案値・仮定値  •  実績未収集</a:t>
             </a:r>
@@ -5402,9 +5574,9 @@
                 <a:solidFill>
                   <a:srgbClr val="8B6B5E"/>
                 </a:solidFill>
-                <a:latin typeface="Noto Sans JP"/>
-                <a:ea typeface="Noto Sans JP"/>
-                <a:cs typeface="Noto Sans JP"/>
+                <a:latin typeface="BIZ UDPGothic"/>
+                <a:ea typeface="BIZ UDPGothic"/>
+                <a:cs typeface="BIZ UDPGothic"/>
               </a:rPr>
               <a:t>3 / 5</a:t>
             </a:r>
@@ -5439,9 +5611,9 @@
                 <a:solidFill>
                   <a:srgbClr val="8B6B5E"/>
                 </a:solidFill>
-                <a:latin typeface="Noto Sans JP"/>
-                <a:ea typeface="Noto Sans JP"/>
-                <a:cs typeface="Noto Sans JP"/>
+                <a:latin typeface="BIZ UDPGothic"/>
+                <a:ea typeface="BIZ UDPGothic"/>
+                <a:cs typeface="BIZ UDPGothic"/>
               </a:rPr>
               <a:t>セット価格 650円 × 1日の販売数（仮定）</a:t>
             </a:r>
@@ -5548,9 +5720,9 @@
                   <a:solidFill>
                     <a:srgbClr val="3D2B1F"/>
                   </a:solidFill>
-                  <a:latin typeface="Noto Sans JP"/>
-                  <a:ea typeface="Noto Sans JP"/>
-                  <a:cs typeface="Noto Sans JP"/>
+                  <a:latin typeface="BIZ UDPGothic"/>
+                  <a:ea typeface="BIZ UDPGothic"/>
+                  <a:cs typeface="BIZ UDPGothic"/>
                 </a:rPr>
                 <a:t/>
               </a:r>
@@ -5584,9 +5756,9 @@
                   <a:solidFill>
                     <a:srgbClr val="3D2B1F"/>
                   </a:solidFill>
-                  <a:latin typeface="Noto Sans JP"/>
-                  <a:ea typeface="Noto Sans JP"/>
-                  <a:cs typeface="Noto Sans JP"/>
+                  <a:latin typeface="BIZ UDPGothic"/>
+                  <a:ea typeface="BIZ UDPGothic"/>
+                  <a:cs typeface="BIZ UDPGothic"/>
                 </a:rPr>
                 <a:t/>
               </a:r>
@@ -5622,9 +5794,9 @@
                 <a:solidFill>
                   <a:srgbClr val="3D2B1F"/>
                 </a:solidFill>
-                <a:latin typeface="Noto Sans JP"/>
-                <a:ea typeface="Noto Sans JP"/>
-                <a:cs typeface="Noto Sans JP"/>
+                <a:latin typeface="BIZ UDPGothic"/>
+                <a:ea typeface="BIZ UDPGothic"/>
+                <a:cs typeface="BIZ UDPGothic"/>
               </a:rPr>
               <a:t>15セット / 日</a:t>
             </a:r>
@@ -5659,9 +5831,9 @@
                 <a:solidFill>
                   <a:srgbClr val="3D2B1F"/>
                 </a:solidFill>
-                <a:latin typeface="Noto Sans JP"/>
-                <a:ea typeface="Noto Sans JP"/>
-                <a:cs typeface="Noto Sans JP"/>
+                <a:latin typeface="BIZ UDPGothic"/>
+                <a:ea typeface="BIZ UDPGothic"/>
+                <a:cs typeface="BIZ UDPGothic"/>
               </a:rPr>
               <a:t>9,750円</a:t>
             </a:r>
@@ -5768,9 +5940,9 @@
                   <a:solidFill>
                     <a:srgbClr val="3D2B1F"/>
                   </a:solidFill>
-                  <a:latin typeface="Noto Sans JP"/>
-                  <a:ea typeface="Noto Sans JP"/>
-                  <a:cs typeface="Noto Sans JP"/>
+                  <a:latin typeface="BIZ UDPGothic"/>
+                  <a:ea typeface="BIZ UDPGothic"/>
+                  <a:cs typeface="BIZ UDPGothic"/>
                 </a:rPr>
                 <a:t/>
               </a:r>
@@ -5804,9 +5976,9 @@
                   <a:solidFill>
                     <a:srgbClr val="3D2B1F"/>
                   </a:solidFill>
-                  <a:latin typeface="Noto Sans JP"/>
-                  <a:ea typeface="Noto Sans JP"/>
-                  <a:cs typeface="Noto Sans JP"/>
+                  <a:latin typeface="BIZ UDPGothic"/>
+                  <a:ea typeface="BIZ UDPGothic"/>
+                  <a:cs typeface="BIZ UDPGothic"/>
                 </a:rPr>
                 <a:t/>
               </a:r>
@@ -5842,9 +6014,9 @@
                 <a:solidFill>
                   <a:srgbClr val="3D2B1F"/>
                 </a:solidFill>
-                <a:latin typeface="Noto Sans JP"/>
-                <a:ea typeface="Noto Sans JP"/>
-                <a:cs typeface="Noto Sans JP"/>
+                <a:latin typeface="BIZ UDPGothic"/>
+                <a:ea typeface="BIZ UDPGothic"/>
+                <a:cs typeface="BIZ UDPGothic"/>
               </a:rPr>
               <a:t>25セット / 日</a:t>
             </a:r>
@@ -5879,9 +6051,9 @@
                 <a:solidFill>
                   <a:srgbClr val="3D2B1F"/>
                 </a:solidFill>
-                <a:latin typeface="Noto Sans JP"/>
-                <a:ea typeface="Noto Sans JP"/>
-                <a:cs typeface="Noto Sans JP"/>
+                <a:latin typeface="BIZ UDPGothic"/>
+                <a:ea typeface="BIZ UDPGothic"/>
+                <a:cs typeface="BIZ UDPGothic"/>
               </a:rPr>
               <a:t>16,250円</a:t>
             </a:r>
@@ -5988,9 +6160,9 @@
                   <a:solidFill>
                     <a:srgbClr val="3D2B1F"/>
                   </a:solidFill>
-                  <a:latin typeface="Noto Sans JP"/>
-                  <a:ea typeface="Noto Sans JP"/>
-                  <a:cs typeface="Noto Sans JP"/>
+                  <a:latin typeface="BIZ UDPGothic"/>
+                  <a:ea typeface="BIZ UDPGothic"/>
+                  <a:cs typeface="BIZ UDPGothic"/>
                 </a:rPr>
                 <a:t/>
               </a:r>
@@ -6024,9 +6196,9 @@
                   <a:solidFill>
                     <a:srgbClr val="3D2B1F"/>
                   </a:solidFill>
-                  <a:latin typeface="Noto Sans JP"/>
-                  <a:ea typeface="Noto Sans JP"/>
-                  <a:cs typeface="Noto Sans JP"/>
+                  <a:latin typeface="BIZ UDPGothic"/>
+                  <a:ea typeface="BIZ UDPGothic"/>
+                  <a:cs typeface="BIZ UDPGothic"/>
                 </a:rPr>
                 <a:t/>
               </a:r>
@@ -6062,9 +6234,9 @@
                 <a:solidFill>
                   <a:srgbClr val="3D2B1F"/>
                 </a:solidFill>
-                <a:latin typeface="Noto Sans JP"/>
-                <a:ea typeface="Noto Sans JP"/>
-                <a:cs typeface="Noto Sans JP"/>
+                <a:latin typeface="BIZ UDPGothic"/>
+                <a:ea typeface="BIZ UDPGothic"/>
+                <a:cs typeface="BIZ UDPGothic"/>
               </a:rPr>
               <a:t>35セット / 日</a:t>
             </a:r>
@@ -6099,9 +6271,9 @@
                 <a:solidFill>
                   <a:srgbClr val="3D2B1F"/>
                 </a:solidFill>
-                <a:latin typeface="Noto Sans JP"/>
-                <a:ea typeface="Noto Sans JP"/>
-                <a:cs typeface="Noto Sans JP"/>
+                <a:latin typeface="BIZ UDPGothic"/>
+                <a:ea typeface="BIZ UDPGothic"/>
+                <a:cs typeface="BIZ UDPGothic"/>
               </a:rPr>
               <a:t>22,750円</a:t>
             </a:r>
@@ -6136,9 +6308,9 @@
                 <a:solidFill>
                   <a:srgbClr val="8B6B5E"/>
                 </a:solidFill>
-                <a:latin typeface="Noto Sans JP"/>
-                <a:ea typeface="Noto Sans JP"/>
-                <a:cs typeface="Noto Sans JP"/>
+                <a:latin typeface="BIZ UDPGothic"/>
+                <a:ea typeface="BIZ UDPGothic"/>
+                <a:cs typeface="BIZ UDPGothic"/>
               </a:rPr>
               <a:t>売上の試算です。原価・追加人件費などの費用は含まず、利益を示していません。</a:t>
             </a:r>
@@ -6249,9 +6421,9 @@
                 <a:solidFill>
                   <a:srgbClr val="8B6B5E"/>
                 </a:solidFill>
-                <a:latin typeface="Noto Sans JP"/>
-                <a:ea typeface="Noto Sans JP"/>
-                <a:cs typeface="Noto Sans JP"/>
+                <a:latin typeface="BIZ UDPGothic"/>
+                <a:ea typeface="BIZ UDPGothic"/>
+                <a:cs typeface="BIZ UDPGothic"/>
               </a:rPr>
               <a:t>ASANAGI CAFÉ  /  朝営業の試行計画</a:t>
             </a:r>
@@ -6286,9 +6458,9 @@
                 <a:solidFill>
                   <a:srgbClr val="3D2B1F"/>
                 </a:solidFill>
-                <a:latin typeface="Noto Serif JP"/>
-                <a:ea typeface="Noto Serif JP"/>
-                <a:cs typeface="Noto Sans JP"/>
+                <a:latin typeface="Shippori Mincho"/>
+                <a:ea typeface="Shippori Mincho"/>
+                <a:cs typeface="BIZ UDPGothic"/>
               </a:rPr>
               <a:t>毎日、需要と負担を同じ表で残す</a:t>
             </a:r>
@@ -6348,13 +6520,13 @@
           <a:p>
             <a:pPr algn="l"/>
             <a:r>
-              <a:rPr sz="900" b="0" lang="ja-JP">
+              <a:rPr sz="1300" b="0" lang="ja-JP">
                 <a:solidFill>
                   <a:srgbClr val="8B6B5E"/>
                 </a:solidFill>
-                <a:latin typeface="Noto Sans JP"/>
-                <a:ea typeface="Noto Sans JP"/>
-                <a:cs typeface="Noto Sans JP"/>
+                <a:latin typeface="BIZ UDPGothic"/>
+                <a:ea typeface="BIZ UDPGothic"/>
+                <a:cs typeface="BIZ UDPGothic"/>
               </a:rPr>
               <a:t>架空の企画案  •  提案値・仮定値  •  実績未収集</a:t>
             </a:r>
@@ -6389,9 +6561,9 @@
                 <a:solidFill>
                   <a:srgbClr val="8B6B5E"/>
                 </a:solidFill>
-                <a:latin typeface="Noto Sans JP"/>
-                <a:ea typeface="Noto Sans JP"/>
-                <a:cs typeface="Noto Sans JP"/>
+                <a:latin typeface="BIZ UDPGothic"/>
+                <a:ea typeface="BIZ UDPGothic"/>
+                <a:cs typeface="BIZ UDPGothic"/>
               </a:rPr>
               <a:t>4 / 5</a:t>
             </a:r>
@@ -6426,25 +6598,62 @@
                 <a:solidFill>
                   <a:srgbClr val="3D2B1F"/>
                 </a:solidFill>
-                <a:latin typeface="Noto Sans JP"/>
-                <a:ea typeface="Noto Sans JP"/>
-                <a:cs typeface="Noto Sans JP"/>
-              </a:rPr>
-              <a:t>記録項目を先に決め、営業のたびに同じ形式で残す。</a:t>
-            </a:r>
-          </a:p>
-        </p:txBody>
-      </p:sp>
-      <p:sp>
-        <p:nvSpPr>
-          <p:cNvPr id="10" name="Rectangle 9"/>
+                <a:latin typeface="BIZ UDPGothic"/>
+                <a:ea typeface="BIZ UDPGothic"/>
+                <a:cs typeface="BIZ UDPGothic"/>
+              </a:rPr>
+              <a:t>10日間、来店・販売・待ち時間・廃棄を同じ単位で記録する。</a:t>
+            </a:r>
+          </a:p>
+        </p:txBody>
+      </p:sp>
+      <p:sp>
+        <p:nvSpPr>
+          <p:cNvPr id="10" name="TextBox 9"/>
+          <p:cNvSpPr txBox="1"/>
+          <p:nvPr/>
+        </p:nvSpPr>
+        <p:spPr>
+          <a:xfrm>
+            <a:off x="777240" y="2697480"/>
+            <a:ext cx="5120640" cy="411480"/>
+          </a:xfrm>
+          <a:prstGeom prst="rect">
+            <a:avLst/>
+          </a:prstGeom>
+          <a:noFill/>
+        </p:spPr>
+        <p:txBody>
+          <a:bodyPr wrap="square">
+            <a:spAutoFit/>
+          </a:bodyPr>
+          <a:lstStyle/>
+          <a:p>
+            <a:pPr algn="l"/>
+            <a:r>
+              <a:rPr sz="1800" b="0" lang="ja-JP">
+                <a:solidFill>
+                  <a:srgbClr val="3D2B1F"/>
+                </a:solidFill>
+                <a:latin typeface="Shippori Mincho"/>
+                <a:ea typeface="Shippori Mincho"/>
+                <a:cs typeface="BIZ UDPGothic"/>
+              </a:rPr>
+              <a:t>第1週：第1〜5日</a:t>
+            </a:r>
+          </a:p>
+        </p:txBody>
+      </p:sp>
+      <p:sp>
+        <p:nvSpPr>
+          <p:cNvPr id="11" name="Rectangle 10"/>
           <p:cNvSpPr/>
           <p:nvPr/>
         </p:nvSpPr>
         <p:spPr>
           <a:xfrm>
-            <a:off x="777240" y="2880360"/>
-            <a:ext cx="1645920" cy="594360"/>
+            <a:off x="777240" y="3200400"/>
+            <a:ext cx="1005840" cy="411480"/>
           </a:xfrm>
           <a:prstGeom prst="rect">
             <a:avLst/>
@@ -6466,35 +6675,35 @@
       </p:sp>
       <p:sp>
         <p:nvSpPr>
-          <p:cNvPr id="11" name="TextBox 10"/>
-          <p:cNvSpPr txBox="1"/>
-          <p:nvPr/>
-        </p:nvSpPr>
-        <p:spPr>
-          <a:xfrm>
-            <a:off x="886968" y="3008376"/>
-            <a:ext cx="1426464" cy="365760"/>
-          </a:xfrm>
-          <a:prstGeom prst="rect">
-            <a:avLst/>
-          </a:prstGeom>
-          <a:noFill/>
-        </p:spPr>
-        <p:txBody>
-          <a:bodyPr wrap="square">
-            <a:spAutoFit/>
-          </a:bodyPr>
-          <a:lstStyle/>
-          <a:p>
-            <a:pPr algn="l"/>
-            <a:r>
-              <a:rPr sz="1700" b="0" lang="ja-JP">
+          <p:cNvPr id="12" name="TextBox 11"/>
+          <p:cNvSpPr txBox="1"/>
+          <p:nvPr/>
+        </p:nvSpPr>
+        <p:spPr>
+          <a:xfrm>
+            <a:off x="822960" y="3273552"/>
+            <a:ext cx="914400" cy="274320"/>
+          </a:xfrm>
+          <a:prstGeom prst="rect">
+            <a:avLst/>
+          </a:prstGeom>
+          <a:noFill/>
+        </p:spPr>
+        <p:txBody>
+          <a:bodyPr wrap="square">
+            <a:spAutoFit/>
+          </a:bodyPr>
+          <a:lstStyle/>
+          <a:p>
+            <a:pPr algn="l"/>
+            <a:r>
+              <a:rPr sz="1400" b="0" lang="ja-JP">
                 <a:solidFill>
                   <a:srgbClr val="3D2B1F"/>
                 </a:solidFill>
-                <a:latin typeface="Noto Sans JP"/>
-                <a:ea typeface="Noto Sans JP"/>
-                <a:cs typeface="Noto Sans JP"/>
+                <a:latin typeface="BIZ UDPGothic"/>
+                <a:ea typeface="BIZ UDPGothic"/>
+                <a:cs typeface="BIZ UDPGothic"/>
               </a:rPr>
               <a:t>日付</a:t>
             </a:r>
@@ -6503,14 +6712,14 @@
       </p:sp>
       <p:sp>
         <p:nvSpPr>
-          <p:cNvPr id="12" name="Rectangle 11"/>
+          <p:cNvPr id="13" name="Rectangle 12"/>
           <p:cNvSpPr/>
           <p:nvPr/>
         </p:nvSpPr>
         <p:spPr>
           <a:xfrm>
-            <a:off x="2423160" y="2880360"/>
-            <a:ext cx="2103120" cy="594360"/>
+            <a:off x="1783080" y="3200400"/>
+            <a:ext cx="1005840" cy="411480"/>
           </a:xfrm>
           <a:prstGeom prst="rect">
             <a:avLst/>
@@ -6532,35 +6741,35 @@
       </p:sp>
       <p:sp>
         <p:nvSpPr>
-          <p:cNvPr id="13" name="TextBox 12"/>
-          <p:cNvSpPr txBox="1"/>
-          <p:nvPr/>
-        </p:nvSpPr>
-        <p:spPr>
-          <a:xfrm>
-            <a:off x="2532888" y="3008376"/>
-            <a:ext cx="1883663" cy="365760"/>
-          </a:xfrm>
-          <a:prstGeom prst="rect">
-            <a:avLst/>
-          </a:prstGeom>
-          <a:noFill/>
-        </p:spPr>
-        <p:txBody>
-          <a:bodyPr wrap="square">
-            <a:spAutoFit/>
-          </a:bodyPr>
-          <a:lstStyle/>
-          <a:p>
-            <a:pPr algn="l"/>
-            <a:r>
-              <a:rPr sz="1700" b="0" lang="ja-JP">
+          <p:cNvPr id="14" name="TextBox 13"/>
+          <p:cNvSpPr txBox="1"/>
+          <p:nvPr/>
+        </p:nvSpPr>
+        <p:spPr>
+          <a:xfrm>
+            <a:off x="1828800" y="3273552"/>
+            <a:ext cx="914400" cy="274320"/>
+          </a:xfrm>
+          <a:prstGeom prst="rect">
+            <a:avLst/>
+          </a:prstGeom>
+          <a:noFill/>
+        </p:spPr>
+        <p:txBody>
+          <a:bodyPr wrap="square">
+            <a:spAutoFit/>
+          </a:bodyPr>
+          <a:lstStyle/>
+          <a:p>
+            <a:pPr algn="l"/>
+            <a:r>
+              <a:rPr sz="1400" b="0" lang="ja-JP">
                 <a:solidFill>
                   <a:srgbClr val="3D2B1F"/>
                 </a:solidFill>
-                <a:latin typeface="Noto Sans JP"/>
-                <a:ea typeface="Noto Sans JP"/>
-                <a:cs typeface="Noto Sans JP"/>
+                <a:latin typeface="BIZ UDPGothic"/>
+                <a:ea typeface="BIZ UDPGothic"/>
+                <a:cs typeface="BIZ UDPGothic"/>
               </a:rPr>
               <a:t>来店数</a:t>
             </a:r>
@@ -6569,14 +6778,14 @@
       </p:sp>
       <p:sp>
         <p:nvSpPr>
-          <p:cNvPr id="14" name="Rectangle 13"/>
+          <p:cNvPr id="15" name="Rectangle 14"/>
           <p:cNvSpPr/>
           <p:nvPr/>
         </p:nvSpPr>
         <p:spPr>
           <a:xfrm>
-            <a:off x="4526279" y="2880360"/>
-            <a:ext cx="2103120" cy="594360"/>
+            <a:off x="2788920" y="3200400"/>
+            <a:ext cx="1005840" cy="411480"/>
           </a:xfrm>
           <a:prstGeom prst="rect">
             <a:avLst/>
@@ -6598,35 +6807,35 @@
       </p:sp>
       <p:sp>
         <p:nvSpPr>
-          <p:cNvPr id="15" name="TextBox 14"/>
-          <p:cNvSpPr txBox="1"/>
-          <p:nvPr/>
-        </p:nvSpPr>
-        <p:spPr>
-          <a:xfrm>
-            <a:off x="4636007" y="3008376"/>
-            <a:ext cx="1883663" cy="365760"/>
-          </a:xfrm>
-          <a:prstGeom prst="rect">
-            <a:avLst/>
-          </a:prstGeom>
-          <a:noFill/>
-        </p:spPr>
-        <p:txBody>
-          <a:bodyPr wrap="square">
-            <a:spAutoFit/>
-          </a:bodyPr>
-          <a:lstStyle/>
-          <a:p>
-            <a:pPr algn="l"/>
-            <a:r>
-              <a:rPr sz="1700" b="0" lang="ja-JP">
+          <p:cNvPr id="16" name="TextBox 15"/>
+          <p:cNvSpPr txBox="1"/>
+          <p:nvPr/>
+        </p:nvSpPr>
+        <p:spPr>
+          <a:xfrm>
+            <a:off x="2834640" y="3273552"/>
+            <a:ext cx="914400" cy="274320"/>
+          </a:xfrm>
+          <a:prstGeom prst="rect">
+            <a:avLst/>
+          </a:prstGeom>
+          <a:noFill/>
+        </p:spPr>
+        <p:txBody>
+          <a:bodyPr wrap="square">
+            <a:spAutoFit/>
+          </a:bodyPr>
+          <a:lstStyle/>
+          <a:p>
+            <a:pPr algn="l"/>
+            <a:r>
+              <a:rPr sz="1400" b="0" lang="ja-JP">
                 <a:solidFill>
                   <a:srgbClr val="3D2B1F"/>
                 </a:solidFill>
-                <a:latin typeface="Noto Sans JP"/>
-                <a:ea typeface="Noto Sans JP"/>
-                <a:cs typeface="Noto Sans JP"/>
+                <a:latin typeface="BIZ UDPGothic"/>
+                <a:ea typeface="BIZ UDPGothic"/>
+                <a:cs typeface="BIZ UDPGothic"/>
               </a:rPr>
               <a:t>販売数</a:t>
             </a:r>
@@ -6635,14 +6844,14 @@
       </p:sp>
       <p:sp>
         <p:nvSpPr>
-          <p:cNvPr id="16" name="Rectangle 15"/>
+          <p:cNvPr id="17" name="Rectangle 16"/>
           <p:cNvSpPr/>
           <p:nvPr/>
         </p:nvSpPr>
         <p:spPr>
           <a:xfrm>
-            <a:off x="6629399" y="2880360"/>
-            <a:ext cx="2560320" cy="594360"/>
+            <a:off x="3794760" y="3200400"/>
+            <a:ext cx="1097280" cy="411480"/>
           </a:xfrm>
           <a:prstGeom prst="rect">
             <a:avLst/>
@@ -6664,35 +6873,35 @@
       </p:sp>
       <p:sp>
         <p:nvSpPr>
-          <p:cNvPr id="17" name="TextBox 16"/>
-          <p:cNvSpPr txBox="1"/>
-          <p:nvPr/>
-        </p:nvSpPr>
-        <p:spPr>
-          <a:xfrm>
-            <a:off x="6739127" y="3008376"/>
-            <a:ext cx="2340863" cy="365760"/>
-          </a:xfrm>
-          <a:prstGeom prst="rect">
-            <a:avLst/>
-          </a:prstGeom>
-          <a:noFill/>
-        </p:spPr>
-        <p:txBody>
-          <a:bodyPr wrap="square">
-            <a:spAutoFit/>
-          </a:bodyPr>
-          <a:lstStyle/>
-          <a:p>
-            <a:pPr algn="l"/>
-            <a:r>
-              <a:rPr sz="1700" b="0" lang="ja-JP">
+          <p:cNvPr id="18" name="TextBox 17"/>
+          <p:cNvSpPr txBox="1"/>
+          <p:nvPr/>
+        </p:nvSpPr>
+        <p:spPr>
+          <a:xfrm>
+            <a:off x="3840480" y="3273552"/>
+            <a:ext cx="1005839" cy="274320"/>
+          </a:xfrm>
+          <a:prstGeom prst="rect">
+            <a:avLst/>
+          </a:prstGeom>
+          <a:noFill/>
+        </p:spPr>
+        <p:txBody>
+          <a:bodyPr wrap="square">
+            <a:spAutoFit/>
+          </a:bodyPr>
+          <a:lstStyle/>
+          <a:p>
+            <a:pPr algn="l"/>
+            <a:r>
+              <a:rPr sz="1400" b="0" lang="ja-JP">
                 <a:solidFill>
                   <a:srgbClr val="3D2B1F"/>
                 </a:solidFill>
-                <a:latin typeface="Noto Sans JP"/>
-                <a:ea typeface="Noto Sans JP"/>
-                <a:cs typeface="Noto Sans JP"/>
+                <a:latin typeface="BIZ UDPGothic"/>
+                <a:ea typeface="BIZ UDPGothic"/>
+                <a:cs typeface="BIZ UDPGothic"/>
               </a:rPr>
               <a:t>待ち時間</a:t>
             </a:r>
@@ -6701,14 +6910,14 @@
       </p:sp>
       <p:sp>
         <p:nvSpPr>
-          <p:cNvPr id="18" name="Rectangle 17"/>
+          <p:cNvPr id="19" name="Rectangle 18"/>
           <p:cNvSpPr/>
           <p:nvPr/>
         </p:nvSpPr>
         <p:spPr>
           <a:xfrm>
-            <a:off x="9189719" y="2880360"/>
-            <a:ext cx="2103120" cy="594360"/>
+            <a:off x="4892040" y="3200400"/>
+            <a:ext cx="1005840" cy="411480"/>
           </a:xfrm>
           <a:prstGeom prst="rect">
             <a:avLst/>
@@ -6730,35 +6939,35 @@
       </p:sp>
       <p:sp>
         <p:nvSpPr>
-          <p:cNvPr id="19" name="TextBox 18"/>
-          <p:cNvSpPr txBox="1"/>
-          <p:nvPr/>
-        </p:nvSpPr>
-        <p:spPr>
-          <a:xfrm>
-            <a:off x="9299447" y="3008376"/>
-            <a:ext cx="1883663" cy="365760"/>
-          </a:xfrm>
-          <a:prstGeom prst="rect">
-            <a:avLst/>
-          </a:prstGeom>
-          <a:noFill/>
-        </p:spPr>
-        <p:txBody>
-          <a:bodyPr wrap="square">
-            <a:spAutoFit/>
-          </a:bodyPr>
-          <a:lstStyle/>
-          <a:p>
-            <a:pPr algn="l"/>
-            <a:r>
-              <a:rPr sz="1700" b="0" lang="ja-JP">
+          <p:cNvPr id="20" name="TextBox 19"/>
+          <p:cNvSpPr txBox="1"/>
+          <p:nvPr/>
+        </p:nvSpPr>
+        <p:spPr>
+          <a:xfrm>
+            <a:off x="4937760" y="3273552"/>
+            <a:ext cx="914400" cy="274320"/>
+          </a:xfrm>
+          <a:prstGeom prst="rect">
+            <a:avLst/>
+          </a:prstGeom>
+          <a:noFill/>
+        </p:spPr>
+        <p:txBody>
+          <a:bodyPr wrap="square">
+            <a:spAutoFit/>
+          </a:bodyPr>
+          <a:lstStyle/>
+          <a:p>
+            <a:pPr algn="l"/>
+            <a:r>
+              <a:rPr sz="1400" b="0" lang="ja-JP">
                 <a:solidFill>
                   <a:srgbClr val="3D2B1F"/>
                 </a:solidFill>
-                <a:latin typeface="Noto Sans JP"/>
-                <a:ea typeface="Noto Sans JP"/>
-                <a:cs typeface="Noto Sans JP"/>
+                <a:latin typeface="BIZ UDPGothic"/>
+                <a:ea typeface="BIZ UDPGothic"/>
+                <a:cs typeface="BIZ UDPGothic"/>
               </a:rPr>
               <a:t>廃棄数</a:t>
             </a:r>
@@ -6767,14 +6976,14 @@
       </p:sp>
       <p:sp>
         <p:nvSpPr>
-          <p:cNvPr id="20" name="Rectangle 19"/>
+          <p:cNvPr id="21" name="Rectangle 20"/>
           <p:cNvSpPr/>
           <p:nvPr/>
         </p:nvSpPr>
         <p:spPr>
           <a:xfrm>
-            <a:off x="777240" y="3520440"/>
-            <a:ext cx="1645920" cy="749808"/>
+            <a:off x="777240" y="3639312"/>
+            <a:ext cx="1005840" cy="365760"/>
           </a:xfrm>
           <a:prstGeom prst="rect">
             <a:avLst/>
@@ -6798,35 +7007,35 @@
       </p:sp>
       <p:sp>
         <p:nvSpPr>
-          <p:cNvPr id="21" name="TextBox 20"/>
-          <p:cNvSpPr txBox="1"/>
-          <p:nvPr/>
-        </p:nvSpPr>
-        <p:spPr>
-          <a:xfrm>
-            <a:off x="886968" y="3685032"/>
-            <a:ext cx="1426464" cy="411480"/>
-          </a:xfrm>
-          <a:prstGeom prst="rect">
-            <a:avLst/>
-          </a:prstGeom>
-          <a:noFill/>
-        </p:spPr>
-        <p:txBody>
-          <a:bodyPr wrap="square">
-            <a:spAutoFit/>
-          </a:bodyPr>
-          <a:lstStyle/>
-          <a:p>
-            <a:pPr algn="l"/>
-            <a:r>
-              <a:rPr sz="1600" b="0" lang="ja-JP">
+          <p:cNvPr id="22" name="TextBox 21"/>
+          <p:cNvSpPr txBox="1"/>
+          <p:nvPr/>
+        </p:nvSpPr>
+        <p:spPr>
+          <a:xfrm>
+            <a:off x="822960" y="3675887"/>
+            <a:ext cx="914400" cy="292608"/>
+          </a:xfrm>
+          <a:prstGeom prst="rect">
+            <a:avLst/>
+          </a:prstGeom>
+          <a:noFill/>
+        </p:spPr>
+        <p:txBody>
+          <a:bodyPr wrap="square">
+            <a:spAutoFit/>
+          </a:bodyPr>
+          <a:lstStyle/>
+          <a:p>
+            <a:pPr algn="l"/>
+            <a:r>
+              <a:rPr sz="1500" b="0" lang="ja-JP">
                 <a:solidFill>
                   <a:srgbClr val="8B6B5E"/>
                 </a:solidFill>
-                <a:latin typeface="Noto Sans JP"/>
-                <a:ea typeface="Noto Sans JP"/>
-                <a:cs typeface="Noto Sans JP"/>
+                <a:latin typeface="BIZ UDPGothic"/>
+                <a:ea typeface="BIZ UDPGothic"/>
+                <a:cs typeface="BIZ UDPGothic"/>
               </a:rPr>
               <a:t>第1日</a:t>
             </a:r>
@@ -6835,14 +7044,14 @@
       </p:sp>
       <p:sp>
         <p:nvSpPr>
-          <p:cNvPr id="22" name="Rectangle 21"/>
+          <p:cNvPr id="23" name="Rectangle 22"/>
           <p:cNvSpPr/>
           <p:nvPr/>
         </p:nvSpPr>
         <p:spPr>
           <a:xfrm>
-            <a:off x="2423160" y="3520440"/>
-            <a:ext cx="2103120" cy="749808"/>
+            <a:off x="1783080" y="3639312"/>
+            <a:ext cx="1005840" cy="365760"/>
           </a:xfrm>
           <a:prstGeom prst="rect">
             <a:avLst/>
@@ -6866,51 +7075,51 @@
       </p:sp>
       <p:sp>
         <p:nvSpPr>
-          <p:cNvPr id="23" name="TextBox 22"/>
-          <p:cNvSpPr txBox="1"/>
-          <p:nvPr/>
-        </p:nvSpPr>
-        <p:spPr>
-          <a:xfrm>
-            <a:off x="2532888" y="3685032"/>
-            <a:ext cx="1883663" cy="411480"/>
-          </a:xfrm>
-          <a:prstGeom prst="rect">
-            <a:avLst/>
-          </a:prstGeom>
-          <a:noFill/>
-        </p:spPr>
-        <p:txBody>
-          <a:bodyPr wrap="square">
-            <a:spAutoFit/>
-          </a:bodyPr>
-          <a:lstStyle/>
-          <a:p>
-            <a:pPr algn="l"/>
-            <a:r>
-              <a:rPr sz="1600" b="0" lang="ja-JP">
+          <p:cNvPr id="24" name="TextBox 23"/>
+          <p:cNvSpPr txBox="1"/>
+          <p:nvPr/>
+        </p:nvSpPr>
+        <p:spPr>
+          <a:xfrm>
+            <a:off x="1828800" y="3675887"/>
+            <a:ext cx="914400" cy="292608"/>
+          </a:xfrm>
+          <a:prstGeom prst="rect">
+            <a:avLst/>
+          </a:prstGeom>
+          <a:noFill/>
+        </p:spPr>
+        <p:txBody>
+          <a:bodyPr wrap="square">
+            <a:spAutoFit/>
+          </a:bodyPr>
+          <a:lstStyle/>
+          <a:p>
+            <a:pPr algn="l"/>
+            <a:r>
+              <a:rPr sz="1500" b="0" lang="ja-JP">
                 <a:solidFill>
                   <a:srgbClr val="8B6B5E"/>
                 </a:solidFill>
-                <a:latin typeface="Noto Sans JP"/>
-                <a:ea typeface="Noto Sans JP"/>
-                <a:cs typeface="Noto Sans JP"/>
-              </a:rPr>
-              <a:t>未収集</a:t>
-            </a:r>
-          </a:p>
-        </p:txBody>
-      </p:sp>
-      <p:sp>
-        <p:nvSpPr>
-          <p:cNvPr id="24" name="Rectangle 23"/>
+                <a:latin typeface="BIZ UDPGothic"/>
+                <a:ea typeface="BIZ UDPGothic"/>
+                <a:cs typeface="BIZ UDPGothic"/>
+              </a:rPr>
+              <a:t>—</a:t>
+            </a:r>
+          </a:p>
+        </p:txBody>
+      </p:sp>
+      <p:sp>
+        <p:nvSpPr>
+          <p:cNvPr id="25" name="Rectangle 24"/>
           <p:cNvSpPr/>
           <p:nvPr/>
         </p:nvSpPr>
         <p:spPr>
           <a:xfrm>
-            <a:off x="4526279" y="3520440"/>
-            <a:ext cx="2103120" cy="749808"/>
+            <a:off x="2788920" y="3639312"/>
+            <a:ext cx="1005840" cy="365760"/>
           </a:xfrm>
           <a:prstGeom prst="rect">
             <a:avLst/>
@@ -6934,51 +7143,51 @@
       </p:sp>
       <p:sp>
         <p:nvSpPr>
-          <p:cNvPr id="25" name="TextBox 24"/>
-          <p:cNvSpPr txBox="1"/>
-          <p:nvPr/>
-        </p:nvSpPr>
-        <p:spPr>
-          <a:xfrm>
-            <a:off x="4636007" y="3685032"/>
-            <a:ext cx="1883663" cy="411480"/>
-          </a:xfrm>
-          <a:prstGeom prst="rect">
-            <a:avLst/>
-          </a:prstGeom>
-          <a:noFill/>
-        </p:spPr>
-        <p:txBody>
-          <a:bodyPr wrap="square">
-            <a:spAutoFit/>
-          </a:bodyPr>
-          <a:lstStyle/>
-          <a:p>
-            <a:pPr algn="l"/>
-            <a:r>
-              <a:rPr sz="1600" b="0" lang="ja-JP">
+          <p:cNvPr id="26" name="TextBox 25"/>
+          <p:cNvSpPr txBox="1"/>
+          <p:nvPr/>
+        </p:nvSpPr>
+        <p:spPr>
+          <a:xfrm>
+            <a:off x="2834640" y="3675887"/>
+            <a:ext cx="914400" cy="292608"/>
+          </a:xfrm>
+          <a:prstGeom prst="rect">
+            <a:avLst/>
+          </a:prstGeom>
+          <a:noFill/>
+        </p:spPr>
+        <p:txBody>
+          <a:bodyPr wrap="square">
+            <a:spAutoFit/>
+          </a:bodyPr>
+          <a:lstStyle/>
+          <a:p>
+            <a:pPr algn="l"/>
+            <a:r>
+              <a:rPr sz="1500" b="0" lang="ja-JP">
                 <a:solidFill>
                   <a:srgbClr val="8B6B5E"/>
                 </a:solidFill>
-                <a:latin typeface="Noto Sans JP"/>
-                <a:ea typeface="Noto Sans JP"/>
-                <a:cs typeface="Noto Sans JP"/>
-              </a:rPr>
-              <a:t>未収集</a:t>
-            </a:r>
-          </a:p>
-        </p:txBody>
-      </p:sp>
-      <p:sp>
-        <p:nvSpPr>
-          <p:cNvPr id="26" name="Rectangle 25"/>
+                <a:latin typeface="BIZ UDPGothic"/>
+                <a:ea typeface="BIZ UDPGothic"/>
+                <a:cs typeface="BIZ UDPGothic"/>
+              </a:rPr>
+              <a:t>—</a:t>
+            </a:r>
+          </a:p>
+        </p:txBody>
+      </p:sp>
+      <p:sp>
+        <p:nvSpPr>
+          <p:cNvPr id="27" name="Rectangle 26"/>
           <p:cNvSpPr/>
           <p:nvPr/>
         </p:nvSpPr>
         <p:spPr>
           <a:xfrm>
-            <a:off x="6629399" y="3520440"/>
-            <a:ext cx="2560320" cy="749808"/>
+            <a:off x="3794760" y="3639312"/>
+            <a:ext cx="1097280" cy="365760"/>
           </a:xfrm>
           <a:prstGeom prst="rect">
             <a:avLst/>
@@ -7002,51 +7211,51 @@
       </p:sp>
       <p:sp>
         <p:nvSpPr>
-          <p:cNvPr id="27" name="TextBox 26"/>
-          <p:cNvSpPr txBox="1"/>
-          <p:nvPr/>
-        </p:nvSpPr>
-        <p:spPr>
-          <a:xfrm>
-            <a:off x="6739127" y="3685032"/>
-            <a:ext cx="2340863" cy="411480"/>
-          </a:xfrm>
-          <a:prstGeom prst="rect">
-            <a:avLst/>
-          </a:prstGeom>
-          <a:noFill/>
-        </p:spPr>
-        <p:txBody>
-          <a:bodyPr wrap="square">
-            <a:spAutoFit/>
-          </a:bodyPr>
-          <a:lstStyle/>
-          <a:p>
-            <a:pPr algn="l"/>
-            <a:r>
-              <a:rPr sz="1600" b="0" lang="ja-JP">
+          <p:cNvPr id="28" name="TextBox 27"/>
+          <p:cNvSpPr txBox="1"/>
+          <p:nvPr/>
+        </p:nvSpPr>
+        <p:spPr>
+          <a:xfrm>
+            <a:off x="3840480" y="3675887"/>
+            <a:ext cx="1005839" cy="292608"/>
+          </a:xfrm>
+          <a:prstGeom prst="rect">
+            <a:avLst/>
+          </a:prstGeom>
+          <a:noFill/>
+        </p:spPr>
+        <p:txBody>
+          <a:bodyPr wrap="square">
+            <a:spAutoFit/>
+          </a:bodyPr>
+          <a:lstStyle/>
+          <a:p>
+            <a:pPr algn="l"/>
+            <a:r>
+              <a:rPr sz="1500" b="0" lang="ja-JP">
                 <a:solidFill>
                   <a:srgbClr val="8B6B5E"/>
                 </a:solidFill>
-                <a:latin typeface="Noto Sans JP"/>
-                <a:ea typeface="Noto Sans JP"/>
-                <a:cs typeface="Noto Sans JP"/>
-              </a:rPr>
-              <a:t>未収集</a:t>
-            </a:r>
-          </a:p>
-        </p:txBody>
-      </p:sp>
-      <p:sp>
-        <p:nvSpPr>
-          <p:cNvPr id="28" name="Rectangle 27"/>
+                <a:latin typeface="BIZ UDPGothic"/>
+                <a:ea typeface="BIZ UDPGothic"/>
+                <a:cs typeface="BIZ UDPGothic"/>
+              </a:rPr>
+              <a:t>—</a:t>
+            </a:r>
+          </a:p>
+        </p:txBody>
+      </p:sp>
+      <p:sp>
+        <p:nvSpPr>
+          <p:cNvPr id="29" name="Rectangle 28"/>
           <p:cNvSpPr/>
           <p:nvPr/>
         </p:nvSpPr>
         <p:spPr>
           <a:xfrm>
-            <a:off x="9189719" y="3520440"/>
-            <a:ext cx="2103120" cy="749808"/>
+            <a:off x="4892040" y="3639312"/>
+            <a:ext cx="1005840" cy="365760"/>
           </a:xfrm>
           <a:prstGeom prst="rect">
             <a:avLst/>
@@ -7070,51 +7279,51 @@
       </p:sp>
       <p:sp>
         <p:nvSpPr>
-          <p:cNvPr id="29" name="TextBox 28"/>
-          <p:cNvSpPr txBox="1"/>
-          <p:nvPr/>
-        </p:nvSpPr>
-        <p:spPr>
-          <a:xfrm>
-            <a:off x="9299447" y="3685032"/>
-            <a:ext cx="1883663" cy="411480"/>
-          </a:xfrm>
-          <a:prstGeom prst="rect">
-            <a:avLst/>
-          </a:prstGeom>
-          <a:noFill/>
-        </p:spPr>
-        <p:txBody>
-          <a:bodyPr wrap="square">
-            <a:spAutoFit/>
-          </a:bodyPr>
-          <a:lstStyle/>
-          <a:p>
-            <a:pPr algn="l"/>
-            <a:r>
-              <a:rPr sz="1600" b="0" lang="ja-JP">
+          <p:cNvPr id="30" name="TextBox 29"/>
+          <p:cNvSpPr txBox="1"/>
+          <p:nvPr/>
+        </p:nvSpPr>
+        <p:spPr>
+          <a:xfrm>
+            <a:off x="4937760" y="3675887"/>
+            <a:ext cx="914400" cy="292608"/>
+          </a:xfrm>
+          <a:prstGeom prst="rect">
+            <a:avLst/>
+          </a:prstGeom>
+          <a:noFill/>
+        </p:spPr>
+        <p:txBody>
+          <a:bodyPr wrap="square">
+            <a:spAutoFit/>
+          </a:bodyPr>
+          <a:lstStyle/>
+          <a:p>
+            <a:pPr algn="l"/>
+            <a:r>
+              <a:rPr sz="1500" b="0" lang="ja-JP">
                 <a:solidFill>
                   <a:srgbClr val="8B6B5E"/>
                 </a:solidFill>
-                <a:latin typeface="Noto Sans JP"/>
-                <a:ea typeface="Noto Sans JP"/>
-                <a:cs typeface="Noto Sans JP"/>
-              </a:rPr>
-              <a:t>未収集</a:t>
-            </a:r>
-          </a:p>
-        </p:txBody>
-      </p:sp>
-      <p:sp>
-        <p:nvSpPr>
-          <p:cNvPr id="30" name="Rectangle 29"/>
+                <a:latin typeface="BIZ UDPGothic"/>
+                <a:ea typeface="BIZ UDPGothic"/>
+                <a:cs typeface="BIZ UDPGothic"/>
+              </a:rPr>
+              <a:t>—</a:t>
+            </a:r>
+          </a:p>
+        </p:txBody>
+      </p:sp>
+      <p:sp>
+        <p:nvSpPr>
+          <p:cNvPr id="31" name="Rectangle 30"/>
           <p:cNvSpPr/>
           <p:nvPr/>
         </p:nvSpPr>
         <p:spPr>
           <a:xfrm>
-            <a:off x="777240" y="4343400"/>
-            <a:ext cx="1645920" cy="749808"/>
+            <a:off x="777240" y="4023360"/>
+            <a:ext cx="1005840" cy="365760"/>
           </a:xfrm>
           <a:prstGeom prst="rect">
             <a:avLst/>
@@ -7138,35 +7347,35 @@
       </p:sp>
       <p:sp>
         <p:nvSpPr>
-          <p:cNvPr id="31" name="TextBox 30"/>
-          <p:cNvSpPr txBox="1"/>
-          <p:nvPr/>
-        </p:nvSpPr>
-        <p:spPr>
-          <a:xfrm>
-            <a:off x="886968" y="4507992"/>
-            <a:ext cx="1426464" cy="411480"/>
-          </a:xfrm>
-          <a:prstGeom prst="rect">
-            <a:avLst/>
-          </a:prstGeom>
-          <a:noFill/>
-        </p:spPr>
-        <p:txBody>
-          <a:bodyPr wrap="square">
-            <a:spAutoFit/>
-          </a:bodyPr>
-          <a:lstStyle/>
-          <a:p>
-            <a:pPr algn="l"/>
-            <a:r>
-              <a:rPr sz="1600" b="0" lang="ja-JP">
+          <p:cNvPr id="32" name="TextBox 31"/>
+          <p:cNvSpPr txBox="1"/>
+          <p:nvPr/>
+        </p:nvSpPr>
+        <p:spPr>
+          <a:xfrm>
+            <a:off x="822960" y="4059936"/>
+            <a:ext cx="914400" cy="292608"/>
+          </a:xfrm>
+          <a:prstGeom prst="rect">
+            <a:avLst/>
+          </a:prstGeom>
+          <a:noFill/>
+        </p:spPr>
+        <p:txBody>
+          <a:bodyPr wrap="square">
+            <a:spAutoFit/>
+          </a:bodyPr>
+          <a:lstStyle/>
+          <a:p>
+            <a:pPr algn="l"/>
+            <a:r>
+              <a:rPr sz="1500" b="0" lang="ja-JP">
                 <a:solidFill>
                   <a:srgbClr val="8B6B5E"/>
                 </a:solidFill>
-                <a:latin typeface="Noto Sans JP"/>
-                <a:ea typeface="Noto Sans JP"/>
-                <a:cs typeface="Noto Sans JP"/>
+                <a:latin typeface="BIZ UDPGothic"/>
+                <a:ea typeface="BIZ UDPGothic"/>
+                <a:cs typeface="BIZ UDPGothic"/>
               </a:rPr>
               <a:t>第2日</a:t>
             </a:r>
@@ -7175,14 +7384,14 @@
       </p:sp>
       <p:sp>
         <p:nvSpPr>
-          <p:cNvPr id="32" name="Rectangle 31"/>
+          <p:cNvPr id="33" name="Rectangle 32"/>
           <p:cNvSpPr/>
           <p:nvPr/>
         </p:nvSpPr>
         <p:spPr>
           <a:xfrm>
-            <a:off x="2423160" y="4343400"/>
-            <a:ext cx="2103120" cy="749808"/>
+            <a:off x="1783080" y="4023360"/>
+            <a:ext cx="1005840" cy="365760"/>
           </a:xfrm>
           <a:prstGeom prst="rect">
             <a:avLst/>
@@ -7206,51 +7415,51 @@
       </p:sp>
       <p:sp>
         <p:nvSpPr>
-          <p:cNvPr id="33" name="TextBox 32"/>
-          <p:cNvSpPr txBox="1"/>
-          <p:nvPr/>
-        </p:nvSpPr>
-        <p:spPr>
-          <a:xfrm>
-            <a:off x="2532888" y="4507992"/>
-            <a:ext cx="1883663" cy="411480"/>
-          </a:xfrm>
-          <a:prstGeom prst="rect">
-            <a:avLst/>
-          </a:prstGeom>
-          <a:noFill/>
-        </p:spPr>
-        <p:txBody>
-          <a:bodyPr wrap="square">
-            <a:spAutoFit/>
-          </a:bodyPr>
-          <a:lstStyle/>
-          <a:p>
-            <a:pPr algn="l"/>
-            <a:r>
-              <a:rPr sz="1600" b="0" lang="ja-JP">
+          <p:cNvPr id="34" name="TextBox 33"/>
+          <p:cNvSpPr txBox="1"/>
+          <p:nvPr/>
+        </p:nvSpPr>
+        <p:spPr>
+          <a:xfrm>
+            <a:off x="1828800" y="4059936"/>
+            <a:ext cx="914400" cy="292608"/>
+          </a:xfrm>
+          <a:prstGeom prst="rect">
+            <a:avLst/>
+          </a:prstGeom>
+          <a:noFill/>
+        </p:spPr>
+        <p:txBody>
+          <a:bodyPr wrap="square">
+            <a:spAutoFit/>
+          </a:bodyPr>
+          <a:lstStyle/>
+          <a:p>
+            <a:pPr algn="l"/>
+            <a:r>
+              <a:rPr sz="1500" b="0" lang="ja-JP">
                 <a:solidFill>
                   <a:srgbClr val="8B6B5E"/>
                 </a:solidFill>
-                <a:latin typeface="Noto Sans JP"/>
-                <a:ea typeface="Noto Sans JP"/>
-                <a:cs typeface="Noto Sans JP"/>
-              </a:rPr>
-              <a:t>未収集</a:t>
-            </a:r>
-          </a:p>
-        </p:txBody>
-      </p:sp>
-      <p:sp>
-        <p:nvSpPr>
-          <p:cNvPr id="34" name="Rectangle 33"/>
+                <a:latin typeface="BIZ UDPGothic"/>
+                <a:ea typeface="BIZ UDPGothic"/>
+                <a:cs typeface="BIZ UDPGothic"/>
+              </a:rPr>
+              <a:t>—</a:t>
+            </a:r>
+          </a:p>
+        </p:txBody>
+      </p:sp>
+      <p:sp>
+        <p:nvSpPr>
+          <p:cNvPr id="35" name="Rectangle 34"/>
           <p:cNvSpPr/>
           <p:nvPr/>
         </p:nvSpPr>
         <p:spPr>
           <a:xfrm>
-            <a:off x="4526279" y="4343400"/>
-            <a:ext cx="2103120" cy="749808"/>
+            <a:off x="2788920" y="4023360"/>
+            <a:ext cx="1005840" cy="365760"/>
           </a:xfrm>
           <a:prstGeom prst="rect">
             <a:avLst/>
@@ -7274,51 +7483,51 @@
       </p:sp>
       <p:sp>
         <p:nvSpPr>
-          <p:cNvPr id="35" name="TextBox 34"/>
-          <p:cNvSpPr txBox="1"/>
-          <p:nvPr/>
-        </p:nvSpPr>
-        <p:spPr>
-          <a:xfrm>
-            <a:off x="4636007" y="4507992"/>
-            <a:ext cx="1883663" cy="411480"/>
-          </a:xfrm>
-          <a:prstGeom prst="rect">
-            <a:avLst/>
-          </a:prstGeom>
-          <a:noFill/>
-        </p:spPr>
-        <p:txBody>
-          <a:bodyPr wrap="square">
-            <a:spAutoFit/>
-          </a:bodyPr>
-          <a:lstStyle/>
-          <a:p>
-            <a:pPr algn="l"/>
-            <a:r>
-              <a:rPr sz="1600" b="0" lang="ja-JP">
+          <p:cNvPr id="36" name="TextBox 35"/>
+          <p:cNvSpPr txBox="1"/>
+          <p:nvPr/>
+        </p:nvSpPr>
+        <p:spPr>
+          <a:xfrm>
+            <a:off x="2834640" y="4059936"/>
+            <a:ext cx="914400" cy="292608"/>
+          </a:xfrm>
+          <a:prstGeom prst="rect">
+            <a:avLst/>
+          </a:prstGeom>
+          <a:noFill/>
+        </p:spPr>
+        <p:txBody>
+          <a:bodyPr wrap="square">
+            <a:spAutoFit/>
+          </a:bodyPr>
+          <a:lstStyle/>
+          <a:p>
+            <a:pPr algn="l"/>
+            <a:r>
+              <a:rPr sz="1500" b="0" lang="ja-JP">
                 <a:solidFill>
                   <a:srgbClr val="8B6B5E"/>
                 </a:solidFill>
-                <a:latin typeface="Noto Sans JP"/>
-                <a:ea typeface="Noto Sans JP"/>
-                <a:cs typeface="Noto Sans JP"/>
-              </a:rPr>
-              <a:t>未収集</a:t>
-            </a:r>
-          </a:p>
-        </p:txBody>
-      </p:sp>
-      <p:sp>
-        <p:nvSpPr>
-          <p:cNvPr id="36" name="Rectangle 35"/>
+                <a:latin typeface="BIZ UDPGothic"/>
+                <a:ea typeface="BIZ UDPGothic"/>
+                <a:cs typeface="BIZ UDPGothic"/>
+              </a:rPr>
+              <a:t>—</a:t>
+            </a:r>
+          </a:p>
+        </p:txBody>
+      </p:sp>
+      <p:sp>
+        <p:nvSpPr>
+          <p:cNvPr id="37" name="Rectangle 36"/>
           <p:cNvSpPr/>
           <p:nvPr/>
         </p:nvSpPr>
         <p:spPr>
           <a:xfrm>
-            <a:off x="6629399" y="4343400"/>
-            <a:ext cx="2560320" cy="749808"/>
+            <a:off x="3794760" y="4023360"/>
+            <a:ext cx="1097280" cy="365760"/>
           </a:xfrm>
           <a:prstGeom prst="rect">
             <a:avLst/>
@@ -7342,51 +7551,51 @@
       </p:sp>
       <p:sp>
         <p:nvSpPr>
-          <p:cNvPr id="37" name="TextBox 36"/>
-          <p:cNvSpPr txBox="1"/>
-          <p:nvPr/>
-        </p:nvSpPr>
-        <p:spPr>
-          <a:xfrm>
-            <a:off x="6739127" y="4507992"/>
-            <a:ext cx="2340863" cy="411480"/>
-          </a:xfrm>
-          <a:prstGeom prst="rect">
-            <a:avLst/>
-          </a:prstGeom>
-          <a:noFill/>
-        </p:spPr>
-        <p:txBody>
-          <a:bodyPr wrap="square">
-            <a:spAutoFit/>
-          </a:bodyPr>
-          <a:lstStyle/>
-          <a:p>
-            <a:pPr algn="l"/>
-            <a:r>
-              <a:rPr sz="1600" b="0" lang="ja-JP">
+          <p:cNvPr id="38" name="TextBox 37"/>
+          <p:cNvSpPr txBox="1"/>
+          <p:nvPr/>
+        </p:nvSpPr>
+        <p:spPr>
+          <a:xfrm>
+            <a:off x="3840480" y="4059936"/>
+            <a:ext cx="1005839" cy="292608"/>
+          </a:xfrm>
+          <a:prstGeom prst="rect">
+            <a:avLst/>
+          </a:prstGeom>
+          <a:noFill/>
+        </p:spPr>
+        <p:txBody>
+          <a:bodyPr wrap="square">
+            <a:spAutoFit/>
+          </a:bodyPr>
+          <a:lstStyle/>
+          <a:p>
+            <a:pPr algn="l"/>
+            <a:r>
+              <a:rPr sz="1500" b="0" lang="ja-JP">
                 <a:solidFill>
                   <a:srgbClr val="8B6B5E"/>
                 </a:solidFill>
-                <a:latin typeface="Noto Sans JP"/>
-                <a:ea typeface="Noto Sans JP"/>
-                <a:cs typeface="Noto Sans JP"/>
-              </a:rPr>
-              <a:t>未収集</a:t>
-            </a:r>
-          </a:p>
-        </p:txBody>
-      </p:sp>
-      <p:sp>
-        <p:nvSpPr>
-          <p:cNvPr id="38" name="Rectangle 37"/>
+                <a:latin typeface="BIZ UDPGothic"/>
+                <a:ea typeface="BIZ UDPGothic"/>
+                <a:cs typeface="BIZ UDPGothic"/>
+              </a:rPr>
+              <a:t>—</a:t>
+            </a:r>
+          </a:p>
+        </p:txBody>
+      </p:sp>
+      <p:sp>
+        <p:nvSpPr>
+          <p:cNvPr id="39" name="Rectangle 38"/>
           <p:cNvSpPr/>
           <p:nvPr/>
         </p:nvSpPr>
         <p:spPr>
           <a:xfrm>
-            <a:off x="9189719" y="4343400"/>
-            <a:ext cx="2103120" cy="749808"/>
+            <a:off x="4892040" y="4023360"/>
+            <a:ext cx="1005840" cy="365760"/>
           </a:xfrm>
           <a:prstGeom prst="rect">
             <a:avLst/>
@@ -7410,51 +7619,1137 @@
       </p:sp>
       <p:sp>
         <p:nvSpPr>
-          <p:cNvPr id="39" name="TextBox 38"/>
-          <p:cNvSpPr txBox="1"/>
-          <p:nvPr/>
-        </p:nvSpPr>
-        <p:spPr>
-          <a:xfrm>
-            <a:off x="9299447" y="4507992"/>
-            <a:ext cx="1883663" cy="411480"/>
-          </a:xfrm>
-          <a:prstGeom prst="rect">
-            <a:avLst/>
-          </a:prstGeom>
-          <a:noFill/>
-        </p:spPr>
-        <p:txBody>
-          <a:bodyPr wrap="square">
-            <a:spAutoFit/>
-          </a:bodyPr>
-          <a:lstStyle/>
-          <a:p>
-            <a:pPr algn="l"/>
-            <a:r>
-              <a:rPr sz="1600" b="0" lang="ja-JP">
+          <p:cNvPr id="40" name="TextBox 39"/>
+          <p:cNvSpPr txBox="1"/>
+          <p:nvPr/>
+        </p:nvSpPr>
+        <p:spPr>
+          <a:xfrm>
+            <a:off x="4937760" y="4059936"/>
+            <a:ext cx="914400" cy="292608"/>
+          </a:xfrm>
+          <a:prstGeom prst="rect">
+            <a:avLst/>
+          </a:prstGeom>
+          <a:noFill/>
+        </p:spPr>
+        <p:txBody>
+          <a:bodyPr wrap="square">
+            <a:spAutoFit/>
+          </a:bodyPr>
+          <a:lstStyle/>
+          <a:p>
+            <a:pPr algn="l"/>
+            <a:r>
+              <a:rPr sz="1500" b="0" lang="ja-JP">
                 <a:solidFill>
                   <a:srgbClr val="8B6B5E"/>
                 </a:solidFill>
-                <a:latin typeface="Noto Sans JP"/>
-                <a:ea typeface="Noto Sans JP"/>
-                <a:cs typeface="Noto Sans JP"/>
-              </a:rPr>
-              <a:t>未収集</a:t>
-            </a:r>
-          </a:p>
-        </p:txBody>
-      </p:sp>
-      <p:sp>
-        <p:nvSpPr>
-          <p:cNvPr id="40" name="TextBox 39"/>
-          <p:cNvSpPr txBox="1"/>
-          <p:nvPr/>
-        </p:nvSpPr>
-        <p:spPr>
-          <a:xfrm>
-            <a:off x="777240" y="5504688"/>
-            <a:ext cx="10515600" cy="502920"/>
+                <a:latin typeface="BIZ UDPGothic"/>
+                <a:ea typeface="BIZ UDPGothic"/>
+                <a:cs typeface="BIZ UDPGothic"/>
+              </a:rPr>
+              <a:t>—</a:t>
+            </a:r>
+          </a:p>
+        </p:txBody>
+      </p:sp>
+      <p:sp>
+        <p:nvSpPr>
+          <p:cNvPr id="41" name="Rectangle 40"/>
+          <p:cNvSpPr/>
+          <p:nvPr/>
+        </p:nvSpPr>
+        <p:spPr>
+          <a:xfrm>
+            <a:off x="777240" y="4407408"/>
+            <a:ext cx="1005840" cy="365760"/>
+          </a:xfrm>
+          <a:prstGeom prst="rect">
+            <a:avLst/>
+          </a:prstGeom>
+          <a:solidFill>
+            <a:srgbClr val="FBF5F0"/>
+          </a:solidFill>
+          <a:ln w="12700">
+            <a:solidFill>
+              <a:srgbClr val="DDD0C5"/>
+            </a:solidFill>
+          </a:ln>
+        </p:spPr>
+        <p:txBody>
+          <a:bodyPr rtlCol="0" anchor="ctr"/>
+          <a:lstStyle/>
+          <a:p>
+            <a:pPr algn="ctr"/>
+          </a:p>
+        </p:txBody>
+      </p:sp>
+      <p:sp>
+        <p:nvSpPr>
+          <p:cNvPr id="42" name="TextBox 41"/>
+          <p:cNvSpPr txBox="1"/>
+          <p:nvPr/>
+        </p:nvSpPr>
+        <p:spPr>
+          <a:xfrm>
+            <a:off x="822960" y="4443984"/>
+            <a:ext cx="914400" cy="292608"/>
+          </a:xfrm>
+          <a:prstGeom prst="rect">
+            <a:avLst/>
+          </a:prstGeom>
+          <a:noFill/>
+        </p:spPr>
+        <p:txBody>
+          <a:bodyPr wrap="square">
+            <a:spAutoFit/>
+          </a:bodyPr>
+          <a:lstStyle/>
+          <a:p>
+            <a:pPr algn="l"/>
+            <a:r>
+              <a:rPr sz="1500" b="0" lang="ja-JP">
+                <a:solidFill>
+                  <a:srgbClr val="8B6B5E"/>
+                </a:solidFill>
+                <a:latin typeface="BIZ UDPGothic"/>
+                <a:ea typeface="BIZ UDPGothic"/>
+                <a:cs typeface="BIZ UDPGothic"/>
+              </a:rPr>
+              <a:t>第3日</a:t>
+            </a:r>
+          </a:p>
+        </p:txBody>
+      </p:sp>
+      <p:sp>
+        <p:nvSpPr>
+          <p:cNvPr id="43" name="Rectangle 42"/>
+          <p:cNvSpPr/>
+          <p:nvPr/>
+        </p:nvSpPr>
+        <p:spPr>
+          <a:xfrm>
+            <a:off x="1783080" y="4407408"/>
+            <a:ext cx="1005840" cy="365760"/>
+          </a:xfrm>
+          <a:prstGeom prst="rect">
+            <a:avLst/>
+          </a:prstGeom>
+          <a:solidFill>
+            <a:srgbClr val="FBF5F0"/>
+          </a:solidFill>
+          <a:ln w="12700">
+            <a:solidFill>
+              <a:srgbClr val="DDD0C5"/>
+            </a:solidFill>
+          </a:ln>
+        </p:spPr>
+        <p:txBody>
+          <a:bodyPr rtlCol="0" anchor="ctr"/>
+          <a:lstStyle/>
+          <a:p>
+            <a:pPr algn="ctr"/>
+          </a:p>
+        </p:txBody>
+      </p:sp>
+      <p:sp>
+        <p:nvSpPr>
+          <p:cNvPr id="44" name="TextBox 43"/>
+          <p:cNvSpPr txBox="1"/>
+          <p:nvPr/>
+        </p:nvSpPr>
+        <p:spPr>
+          <a:xfrm>
+            <a:off x="1828800" y="4443984"/>
+            <a:ext cx="914400" cy="292608"/>
+          </a:xfrm>
+          <a:prstGeom prst="rect">
+            <a:avLst/>
+          </a:prstGeom>
+          <a:noFill/>
+        </p:spPr>
+        <p:txBody>
+          <a:bodyPr wrap="square">
+            <a:spAutoFit/>
+          </a:bodyPr>
+          <a:lstStyle/>
+          <a:p>
+            <a:pPr algn="l"/>
+            <a:r>
+              <a:rPr sz="1500" b="0" lang="ja-JP">
+                <a:solidFill>
+                  <a:srgbClr val="8B6B5E"/>
+                </a:solidFill>
+                <a:latin typeface="BIZ UDPGothic"/>
+                <a:ea typeface="BIZ UDPGothic"/>
+                <a:cs typeface="BIZ UDPGothic"/>
+              </a:rPr>
+              <a:t>—</a:t>
+            </a:r>
+          </a:p>
+        </p:txBody>
+      </p:sp>
+      <p:sp>
+        <p:nvSpPr>
+          <p:cNvPr id="45" name="Rectangle 44"/>
+          <p:cNvSpPr/>
+          <p:nvPr/>
+        </p:nvSpPr>
+        <p:spPr>
+          <a:xfrm>
+            <a:off x="2788920" y="4407408"/>
+            <a:ext cx="1005840" cy="365760"/>
+          </a:xfrm>
+          <a:prstGeom prst="rect">
+            <a:avLst/>
+          </a:prstGeom>
+          <a:solidFill>
+            <a:srgbClr val="FBF5F0"/>
+          </a:solidFill>
+          <a:ln w="12700">
+            <a:solidFill>
+              <a:srgbClr val="DDD0C5"/>
+            </a:solidFill>
+          </a:ln>
+        </p:spPr>
+        <p:txBody>
+          <a:bodyPr rtlCol="0" anchor="ctr"/>
+          <a:lstStyle/>
+          <a:p>
+            <a:pPr algn="ctr"/>
+          </a:p>
+        </p:txBody>
+      </p:sp>
+      <p:sp>
+        <p:nvSpPr>
+          <p:cNvPr id="46" name="TextBox 45"/>
+          <p:cNvSpPr txBox="1"/>
+          <p:nvPr/>
+        </p:nvSpPr>
+        <p:spPr>
+          <a:xfrm>
+            <a:off x="2834640" y="4443984"/>
+            <a:ext cx="914400" cy="292608"/>
+          </a:xfrm>
+          <a:prstGeom prst="rect">
+            <a:avLst/>
+          </a:prstGeom>
+          <a:noFill/>
+        </p:spPr>
+        <p:txBody>
+          <a:bodyPr wrap="square">
+            <a:spAutoFit/>
+          </a:bodyPr>
+          <a:lstStyle/>
+          <a:p>
+            <a:pPr algn="l"/>
+            <a:r>
+              <a:rPr sz="1500" b="0" lang="ja-JP">
+                <a:solidFill>
+                  <a:srgbClr val="8B6B5E"/>
+                </a:solidFill>
+                <a:latin typeface="BIZ UDPGothic"/>
+                <a:ea typeface="BIZ UDPGothic"/>
+                <a:cs typeface="BIZ UDPGothic"/>
+              </a:rPr>
+              <a:t>—</a:t>
+            </a:r>
+          </a:p>
+        </p:txBody>
+      </p:sp>
+      <p:sp>
+        <p:nvSpPr>
+          <p:cNvPr id="47" name="Rectangle 46"/>
+          <p:cNvSpPr/>
+          <p:nvPr/>
+        </p:nvSpPr>
+        <p:spPr>
+          <a:xfrm>
+            <a:off x="3794760" y="4407408"/>
+            <a:ext cx="1097280" cy="365760"/>
+          </a:xfrm>
+          <a:prstGeom prst="rect">
+            <a:avLst/>
+          </a:prstGeom>
+          <a:solidFill>
+            <a:srgbClr val="FBF5F0"/>
+          </a:solidFill>
+          <a:ln w="12700">
+            <a:solidFill>
+              <a:srgbClr val="DDD0C5"/>
+            </a:solidFill>
+          </a:ln>
+        </p:spPr>
+        <p:txBody>
+          <a:bodyPr rtlCol="0" anchor="ctr"/>
+          <a:lstStyle/>
+          <a:p>
+            <a:pPr algn="ctr"/>
+          </a:p>
+        </p:txBody>
+      </p:sp>
+      <p:sp>
+        <p:nvSpPr>
+          <p:cNvPr id="48" name="TextBox 47"/>
+          <p:cNvSpPr txBox="1"/>
+          <p:nvPr/>
+        </p:nvSpPr>
+        <p:spPr>
+          <a:xfrm>
+            <a:off x="3840480" y="4443984"/>
+            <a:ext cx="1005839" cy="292608"/>
+          </a:xfrm>
+          <a:prstGeom prst="rect">
+            <a:avLst/>
+          </a:prstGeom>
+          <a:noFill/>
+        </p:spPr>
+        <p:txBody>
+          <a:bodyPr wrap="square">
+            <a:spAutoFit/>
+          </a:bodyPr>
+          <a:lstStyle/>
+          <a:p>
+            <a:pPr algn="l"/>
+            <a:r>
+              <a:rPr sz="1500" b="0" lang="ja-JP">
+                <a:solidFill>
+                  <a:srgbClr val="8B6B5E"/>
+                </a:solidFill>
+                <a:latin typeface="BIZ UDPGothic"/>
+                <a:ea typeface="BIZ UDPGothic"/>
+                <a:cs typeface="BIZ UDPGothic"/>
+              </a:rPr>
+              <a:t>—</a:t>
+            </a:r>
+          </a:p>
+        </p:txBody>
+      </p:sp>
+      <p:sp>
+        <p:nvSpPr>
+          <p:cNvPr id="49" name="Rectangle 48"/>
+          <p:cNvSpPr/>
+          <p:nvPr/>
+        </p:nvSpPr>
+        <p:spPr>
+          <a:xfrm>
+            <a:off x="4892040" y="4407408"/>
+            <a:ext cx="1005840" cy="365760"/>
+          </a:xfrm>
+          <a:prstGeom prst="rect">
+            <a:avLst/>
+          </a:prstGeom>
+          <a:solidFill>
+            <a:srgbClr val="FBF5F0"/>
+          </a:solidFill>
+          <a:ln w="12700">
+            <a:solidFill>
+              <a:srgbClr val="DDD0C5"/>
+            </a:solidFill>
+          </a:ln>
+        </p:spPr>
+        <p:txBody>
+          <a:bodyPr rtlCol="0" anchor="ctr"/>
+          <a:lstStyle/>
+          <a:p>
+            <a:pPr algn="ctr"/>
+          </a:p>
+        </p:txBody>
+      </p:sp>
+      <p:sp>
+        <p:nvSpPr>
+          <p:cNvPr id="50" name="TextBox 49"/>
+          <p:cNvSpPr txBox="1"/>
+          <p:nvPr/>
+        </p:nvSpPr>
+        <p:spPr>
+          <a:xfrm>
+            <a:off x="4937760" y="4443984"/>
+            <a:ext cx="914400" cy="292608"/>
+          </a:xfrm>
+          <a:prstGeom prst="rect">
+            <a:avLst/>
+          </a:prstGeom>
+          <a:noFill/>
+        </p:spPr>
+        <p:txBody>
+          <a:bodyPr wrap="square">
+            <a:spAutoFit/>
+          </a:bodyPr>
+          <a:lstStyle/>
+          <a:p>
+            <a:pPr algn="l"/>
+            <a:r>
+              <a:rPr sz="1500" b="0" lang="ja-JP">
+                <a:solidFill>
+                  <a:srgbClr val="8B6B5E"/>
+                </a:solidFill>
+                <a:latin typeface="BIZ UDPGothic"/>
+                <a:ea typeface="BIZ UDPGothic"/>
+                <a:cs typeface="BIZ UDPGothic"/>
+              </a:rPr>
+              <a:t>—</a:t>
+            </a:r>
+          </a:p>
+        </p:txBody>
+      </p:sp>
+      <p:sp>
+        <p:nvSpPr>
+          <p:cNvPr id="51" name="Rectangle 50"/>
+          <p:cNvSpPr/>
+          <p:nvPr/>
+        </p:nvSpPr>
+        <p:spPr>
+          <a:xfrm>
+            <a:off x="777240" y="4791456"/>
+            <a:ext cx="1005840" cy="365760"/>
+          </a:xfrm>
+          <a:prstGeom prst="rect">
+            <a:avLst/>
+          </a:prstGeom>
+          <a:solidFill>
+            <a:srgbClr val="FBF5F0"/>
+          </a:solidFill>
+          <a:ln w="12700">
+            <a:solidFill>
+              <a:srgbClr val="DDD0C5"/>
+            </a:solidFill>
+          </a:ln>
+        </p:spPr>
+        <p:txBody>
+          <a:bodyPr rtlCol="0" anchor="ctr"/>
+          <a:lstStyle/>
+          <a:p>
+            <a:pPr algn="ctr"/>
+          </a:p>
+        </p:txBody>
+      </p:sp>
+      <p:sp>
+        <p:nvSpPr>
+          <p:cNvPr id="52" name="TextBox 51"/>
+          <p:cNvSpPr txBox="1"/>
+          <p:nvPr/>
+        </p:nvSpPr>
+        <p:spPr>
+          <a:xfrm>
+            <a:off x="822960" y="4828032"/>
+            <a:ext cx="914400" cy="292608"/>
+          </a:xfrm>
+          <a:prstGeom prst="rect">
+            <a:avLst/>
+          </a:prstGeom>
+          <a:noFill/>
+        </p:spPr>
+        <p:txBody>
+          <a:bodyPr wrap="square">
+            <a:spAutoFit/>
+          </a:bodyPr>
+          <a:lstStyle/>
+          <a:p>
+            <a:pPr algn="l"/>
+            <a:r>
+              <a:rPr sz="1500" b="0" lang="ja-JP">
+                <a:solidFill>
+                  <a:srgbClr val="8B6B5E"/>
+                </a:solidFill>
+                <a:latin typeface="BIZ UDPGothic"/>
+                <a:ea typeface="BIZ UDPGothic"/>
+                <a:cs typeface="BIZ UDPGothic"/>
+              </a:rPr>
+              <a:t>第4日</a:t>
+            </a:r>
+          </a:p>
+        </p:txBody>
+      </p:sp>
+      <p:sp>
+        <p:nvSpPr>
+          <p:cNvPr id="53" name="Rectangle 52"/>
+          <p:cNvSpPr/>
+          <p:nvPr/>
+        </p:nvSpPr>
+        <p:spPr>
+          <a:xfrm>
+            <a:off x="1783080" y="4791456"/>
+            <a:ext cx="1005840" cy="365760"/>
+          </a:xfrm>
+          <a:prstGeom prst="rect">
+            <a:avLst/>
+          </a:prstGeom>
+          <a:solidFill>
+            <a:srgbClr val="FBF5F0"/>
+          </a:solidFill>
+          <a:ln w="12700">
+            <a:solidFill>
+              <a:srgbClr val="DDD0C5"/>
+            </a:solidFill>
+          </a:ln>
+        </p:spPr>
+        <p:txBody>
+          <a:bodyPr rtlCol="0" anchor="ctr"/>
+          <a:lstStyle/>
+          <a:p>
+            <a:pPr algn="ctr"/>
+          </a:p>
+        </p:txBody>
+      </p:sp>
+      <p:sp>
+        <p:nvSpPr>
+          <p:cNvPr id="54" name="TextBox 53"/>
+          <p:cNvSpPr txBox="1"/>
+          <p:nvPr/>
+        </p:nvSpPr>
+        <p:spPr>
+          <a:xfrm>
+            <a:off x="1828800" y="4828032"/>
+            <a:ext cx="914400" cy="292608"/>
+          </a:xfrm>
+          <a:prstGeom prst="rect">
+            <a:avLst/>
+          </a:prstGeom>
+          <a:noFill/>
+        </p:spPr>
+        <p:txBody>
+          <a:bodyPr wrap="square">
+            <a:spAutoFit/>
+          </a:bodyPr>
+          <a:lstStyle/>
+          <a:p>
+            <a:pPr algn="l"/>
+            <a:r>
+              <a:rPr sz="1500" b="0" lang="ja-JP">
+                <a:solidFill>
+                  <a:srgbClr val="8B6B5E"/>
+                </a:solidFill>
+                <a:latin typeface="BIZ UDPGothic"/>
+                <a:ea typeface="BIZ UDPGothic"/>
+                <a:cs typeface="BIZ UDPGothic"/>
+              </a:rPr>
+              <a:t>—</a:t>
+            </a:r>
+          </a:p>
+        </p:txBody>
+      </p:sp>
+      <p:sp>
+        <p:nvSpPr>
+          <p:cNvPr id="55" name="Rectangle 54"/>
+          <p:cNvSpPr/>
+          <p:nvPr/>
+        </p:nvSpPr>
+        <p:spPr>
+          <a:xfrm>
+            <a:off x="2788920" y="4791456"/>
+            <a:ext cx="1005840" cy="365760"/>
+          </a:xfrm>
+          <a:prstGeom prst="rect">
+            <a:avLst/>
+          </a:prstGeom>
+          <a:solidFill>
+            <a:srgbClr val="FBF5F0"/>
+          </a:solidFill>
+          <a:ln w="12700">
+            <a:solidFill>
+              <a:srgbClr val="DDD0C5"/>
+            </a:solidFill>
+          </a:ln>
+        </p:spPr>
+        <p:txBody>
+          <a:bodyPr rtlCol="0" anchor="ctr"/>
+          <a:lstStyle/>
+          <a:p>
+            <a:pPr algn="ctr"/>
+          </a:p>
+        </p:txBody>
+      </p:sp>
+      <p:sp>
+        <p:nvSpPr>
+          <p:cNvPr id="56" name="TextBox 55"/>
+          <p:cNvSpPr txBox="1"/>
+          <p:nvPr/>
+        </p:nvSpPr>
+        <p:spPr>
+          <a:xfrm>
+            <a:off x="2834640" y="4828032"/>
+            <a:ext cx="914400" cy="292608"/>
+          </a:xfrm>
+          <a:prstGeom prst="rect">
+            <a:avLst/>
+          </a:prstGeom>
+          <a:noFill/>
+        </p:spPr>
+        <p:txBody>
+          <a:bodyPr wrap="square">
+            <a:spAutoFit/>
+          </a:bodyPr>
+          <a:lstStyle/>
+          <a:p>
+            <a:pPr algn="l"/>
+            <a:r>
+              <a:rPr sz="1500" b="0" lang="ja-JP">
+                <a:solidFill>
+                  <a:srgbClr val="8B6B5E"/>
+                </a:solidFill>
+                <a:latin typeface="BIZ UDPGothic"/>
+                <a:ea typeface="BIZ UDPGothic"/>
+                <a:cs typeface="BIZ UDPGothic"/>
+              </a:rPr>
+              <a:t>—</a:t>
+            </a:r>
+          </a:p>
+        </p:txBody>
+      </p:sp>
+      <p:sp>
+        <p:nvSpPr>
+          <p:cNvPr id="57" name="Rectangle 56"/>
+          <p:cNvSpPr/>
+          <p:nvPr/>
+        </p:nvSpPr>
+        <p:spPr>
+          <a:xfrm>
+            <a:off x="3794760" y="4791456"/>
+            <a:ext cx="1097280" cy="365760"/>
+          </a:xfrm>
+          <a:prstGeom prst="rect">
+            <a:avLst/>
+          </a:prstGeom>
+          <a:solidFill>
+            <a:srgbClr val="FBF5F0"/>
+          </a:solidFill>
+          <a:ln w="12700">
+            <a:solidFill>
+              <a:srgbClr val="DDD0C5"/>
+            </a:solidFill>
+          </a:ln>
+        </p:spPr>
+        <p:txBody>
+          <a:bodyPr rtlCol="0" anchor="ctr"/>
+          <a:lstStyle/>
+          <a:p>
+            <a:pPr algn="ctr"/>
+          </a:p>
+        </p:txBody>
+      </p:sp>
+      <p:sp>
+        <p:nvSpPr>
+          <p:cNvPr id="58" name="TextBox 57"/>
+          <p:cNvSpPr txBox="1"/>
+          <p:nvPr/>
+        </p:nvSpPr>
+        <p:spPr>
+          <a:xfrm>
+            <a:off x="3840480" y="4828032"/>
+            <a:ext cx="1005839" cy="292608"/>
+          </a:xfrm>
+          <a:prstGeom prst="rect">
+            <a:avLst/>
+          </a:prstGeom>
+          <a:noFill/>
+        </p:spPr>
+        <p:txBody>
+          <a:bodyPr wrap="square">
+            <a:spAutoFit/>
+          </a:bodyPr>
+          <a:lstStyle/>
+          <a:p>
+            <a:pPr algn="l"/>
+            <a:r>
+              <a:rPr sz="1500" b="0" lang="ja-JP">
+                <a:solidFill>
+                  <a:srgbClr val="8B6B5E"/>
+                </a:solidFill>
+                <a:latin typeface="BIZ UDPGothic"/>
+                <a:ea typeface="BIZ UDPGothic"/>
+                <a:cs typeface="BIZ UDPGothic"/>
+              </a:rPr>
+              <a:t>—</a:t>
+            </a:r>
+          </a:p>
+        </p:txBody>
+      </p:sp>
+      <p:sp>
+        <p:nvSpPr>
+          <p:cNvPr id="59" name="Rectangle 58"/>
+          <p:cNvSpPr/>
+          <p:nvPr/>
+        </p:nvSpPr>
+        <p:spPr>
+          <a:xfrm>
+            <a:off x="4892040" y="4791456"/>
+            <a:ext cx="1005840" cy="365760"/>
+          </a:xfrm>
+          <a:prstGeom prst="rect">
+            <a:avLst/>
+          </a:prstGeom>
+          <a:solidFill>
+            <a:srgbClr val="FBF5F0"/>
+          </a:solidFill>
+          <a:ln w="12700">
+            <a:solidFill>
+              <a:srgbClr val="DDD0C5"/>
+            </a:solidFill>
+          </a:ln>
+        </p:spPr>
+        <p:txBody>
+          <a:bodyPr rtlCol="0" anchor="ctr"/>
+          <a:lstStyle/>
+          <a:p>
+            <a:pPr algn="ctr"/>
+          </a:p>
+        </p:txBody>
+      </p:sp>
+      <p:sp>
+        <p:nvSpPr>
+          <p:cNvPr id="60" name="TextBox 59"/>
+          <p:cNvSpPr txBox="1"/>
+          <p:nvPr/>
+        </p:nvSpPr>
+        <p:spPr>
+          <a:xfrm>
+            <a:off x="4937760" y="4828032"/>
+            <a:ext cx="914400" cy="292608"/>
+          </a:xfrm>
+          <a:prstGeom prst="rect">
+            <a:avLst/>
+          </a:prstGeom>
+          <a:noFill/>
+        </p:spPr>
+        <p:txBody>
+          <a:bodyPr wrap="square">
+            <a:spAutoFit/>
+          </a:bodyPr>
+          <a:lstStyle/>
+          <a:p>
+            <a:pPr algn="l"/>
+            <a:r>
+              <a:rPr sz="1500" b="0" lang="ja-JP">
+                <a:solidFill>
+                  <a:srgbClr val="8B6B5E"/>
+                </a:solidFill>
+                <a:latin typeface="BIZ UDPGothic"/>
+                <a:ea typeface="BIZ UDPGothic"/>
+                <a:cs typeface="BIZ UDPGothic"/>
+              </a:rPr>
+              <a:t>—</a:t>
+            </a:r>
+          </a:p>
+        </p:txBody>
+      </p:sp>
+      <p:sp>
+        <p:nvSpPr>
+          <p:cNvPr id="61" name="Rectangle 60"/>
+          <p:cNvSpPr/>
+          <p:nvPr/>
+        </p:nvSpPr>
+        <p:spPr>
+          <a:xfrm>
+            <a:off x="777240" y="5175504"/>
+            <a:ext cx="1005840" cy="365760"/>
+          </a:xfrm>
+          <a:prstGeom prst="rect">
+            <a:avLst/>
+          </a:prstGeom>
+          <a:solidFill>
+            <a:srgbClr val="FBF5F0"/>
+          </a:solidFill>
+          <a:ln w="12700">
+            <a:solidFill>
+              <a:srgbClr val="DDD0C5"/>
+            </a:solidFill>
+          </a:ln>
+        </p:spPr>
+        <p:txBody>
+          <a:bodyPr rtlCol="0" anchor="ctr"/>
+          <a:lstStyle/>
+          <a:p>
+            <a:pPr algn="ctr"/>
+          </a:p>
+        </p:txBody>
+      </p:sp>
+      <p:sp>
+        <p:nvSpPr>
+          <p:cNvPr id="62" name="TextBox 61"/>
+          <p:cNvSpPr txBox="1"/>
+          <p:nvPr/>
+        </p:nvSpPr>
+        <p:spPr>
+          <a:xfrm>
+            <a:off x="822960" y="5212080"/>
+            <a:ext cx="914400" cy="292608"/>
+          </a:xfrm>
+          <a:prstGeom prst="rect">
+            <a:avLst/>
+          </a:prstGeom>
+          <a:noFill/>
+        </p:spPr>
+        <p:txBody>
+          <a:bodyPr wrap="square">
+            <a:spAutoFit/>
+          </a:bodyPr>
+          <a:lstStyle/>
+          <a:p>
+            <a:pPr algn="l"/>
+            <a:r>
+              <a:rPr sz="1500" b="0" lang="ja-JP">
+                <a:solidFill>
+                  <a:srgbClr val="8B6B5E"/>
+                </a:solidFill>
+                <a:latin typeface="BIZ UDPGothic"/>
+                <a:ea typeface="BIZ UDPGothic"/>
+                <a:cs typeface="BIZ UDPGothic"/>
+              </a:rPr>
+              <a:t>第5日</a:t>
+            </a:r>
+          </a:p>
+        </p:txBody>
+      </p:sp>
+      <p:sp>
+        <p:nvSpPr>
+          <p:cNvPr id="63" name="Rectangle 62"/>
+          <p:cNvSpPr/>
+          <p:nvPr/>
+        </p:nvSpPr>
+        <p:spPr>
+          <a:xfrm>
+            <a:off x="1783080" y="5175504"/>
+            <a:ext cx="1005840" cy="365760"/>
+          </a:xfrm>
+          <a:prstGeom prst="rect">
+            <a:avLst/>
+          </a:prstGeom>
+          <a:solidFill>
+            <a:srgbClr val="FBF5F0"/>
+          </a:solidFill>
+          <a:ln w="12700">
+            <a:solidFill>
+              <a:srgbClr val="DDD0C5"/>
+            </a:solidFill>
+          </a:ln>
+        </p:spPr>
+        <p:txBody>
+          <a:bodyPr rtlCol="0" anchor="ctr"/>
+          <a:lstStyle/>
+          <a:p>
+            <a:pPr algn="ctr"/>
+          </a:p>
+        </p:txBody>
+      </p:sp>
+      <p:sp>
+        <p:nvSpPr>
+          <p:cNvPr id="64" name="TextBox 63"/>
+          <p:cNvSpPr txBox="1"/>
+          <p:nvPr/>
+        </p:nvSpPr>
+        <p:spPr>
+          <a:xfrm>
+            <a:off x="1828800" y="5212080"/>
+            <a:ext cx="914400" cy="292608"/>
+          </a:xfrm>
+          <a:prstGeom prst="rect">
+            <a:avLst/>
+          </a:prstGeom>
+          <a:noFill/>
+        </p:spPr>
+        <p:txBody>
+          <a:bodyPr wrap="square">
+            <a:spAutoFit/>
+          </a:bodyPr>
+          <a:lstStyle/>
+          <a:p>
+            <a:pPr algn="l"/>
+            <a:r>
+              <a:rPr sz="1500" b="0" lang="ja-JP">
+                <a:solidFill>
+                  <a:srgbClr val="8B6B5E"/>
+                </a:solidFill>
+                <a:latin typeface="BIZ UDPGothic"/>
+                <a:ea typeface="BIZ UDPGothic"/>
+                <a:cs typeface="BIZ UDPGothic"/>
+              </a:rPr>
+              <a:t>—</a:t>
+            </a:r>
+          </a:p>
+        </p:txBody>
+      </p:sp>
+      <p:sp>
+        <p:nvSpPr>
+          <p:cNvPr id="65" name="Rectangle 64"/>
+          <p:cNvSpPr/>
+          <p:nvPr/>
+        </p:nvSpPr>
+        <p:spPr>
+          <a:xfrm>
+            <a:off x="2788920" y="5175504"/>
+            <a:ext cx="1005840" cy="365760"/>
+          </a:xfrm>
+          <a:prstGeom prst="rect">
+            <a:avLst/>
+          </a:prstGeom>
+          <a:solidFill>
+            <a:srgbClr val="FBF5F0"/>
+          </a:solidFill>
+          <a:ln w="12700">
+            <a:solidFill>
+              <a:srgbClr val="DDD0C5"/>
+            </a:solidFill>
+          </a:ln>
+        </p:spPr>
+        <p:txBody>
+          <a:bodyPr rtlCol="0" anchor="ctr"/>
+          <a:lstStyle/>
+          <a:p>
+            <a:pPr algn="ctr"/>
+          </a:p>
+        </p:txBody>
+      </p:sp>
+      <p:sp>
+        <p:nvSpPr>
+          <p:cNvPr id="66" name="TextBox 65"/>
+          <p:cNvSpPr txBox="1"/>
+          <p:nvPr/>
+        </p:nvSpPr>
+        <p:spPr>
+          <a:xfrm>
+            <a:off x="2834640" y="5212080"/>
+            <a:ext cx="914400" cy="292608"/>
+          </a:xfrm>
+          <a:prstGeom prst="rect">
+            <a:avLst/>
+          </a:prstGeom>
+          <a:noFill/>
+        </p:spPr>
+        <p:txBody>
+          <a:bodyPr wrap="square">
+            <a:spAutoFit/>
+          </a:bodyPr>
+          <a:lstStyle/>
+          <a:p>
+            <a:pPr algn="l"/>
+            <a:r>
+              <a:rPr sz="1500" b="0" lang="ja-JP">
+                <a:solidFill>
+                  <a:srgbClr val="8B6B5E"/>
+                </a:solidFill>
+                <a:latin typeface="BIZ UDPGothic"/>
+                <a:ea typeface="BIZ UDPGothic"/>
+                <a:cs typeface="BIZ UDPGothic"/>
+              </a:rPr>
+              <a:t>—</a:t>
+            </a:r>
+          </a:p>
+        </p:txBody>
+      </p:sp>
+      <p:sp>
+        <p:nvSpPr>
+          <p:cNvPr id="67" name="Rectangle 66"/>
+          <p:cNvSpPr/>
+          <p:nvPr/>
+        </p:nvSpPr>
+        <p:spPr>
+          <a:xfrm>
+            <a:off x="3794760" y="5175504"/>
+            <a:ext cx="1097280" cy="365760"/>
+          </a:xfrm>
+          <a:prstGeom prst="rect">
+            <a:avLst/>
+          </a:prstGeom>
+          <a:solidFill>
+            <a:srgbClr val="FBF5F0"/>
+          </a:solidFill>
+          <a:ln w="12700">
+            <a:solidFill>
+              <a:srgbClr val="DDD0C5"/>
+            </a:solidFill>
+          </a:ln>
+        </p:spPr>
+        <p:txBody>
+          <a:bodyPr rtlCol="0" anchor="ctr"/>
+          <a:lstStyle/>
+          <a:p>
+            <a:pPr algn="ctr"/>
+          </a:p>
+        </p:txBody>
+      </p:sp>
+      <p:sp>
+        <p:nvSpPr>
+          <p:cNvPr id="68" name="TextBox 67"/>
+          <p:cNvSpPr txBox="1"/>
+          <p:nvPr/>
+        </p:nvSpPr>
+        <p:spPr>
+          <a:xfrm>
+            <a:off x="3840480" y="5212080"/>
+            <a:ext cx="1005839" cy="292608"/>
+          </a:xfrm>
+          <a:prstGeom prst="rect">
+            <a:avLst/>
+          </a:prstGeom>
+          <a:noFill/>
+        </p:spPr>
+        <p:txBody>
+          <a:bodyPr wrap="square">
+            <a:spAutoFit/>
+          </a:bodyPr>
+          <a:lstStyle/>
+          <a:p>
+            <a:pPr algn="l"/>
+            <a:r>
+              <a:rPr sz="1500" b="0" lang="ja-JP">
+                <a:solidFill>
+                  <a:srgbClr val="8B6B5E"/>
+                </a:solidFill>
+                <a:latin typeface="BIZ UDPGothic"/>
+                <a:ea typeface="BIZ UDPGothic"/>
+                <a:cs typeface="BIZ UDPGothic"/>
+              </a:rPr>
+              <a:t>—</a:t>
+            </a:r>
+          </a:p>
+        </p:txBody>
+      </p:sp>
+      <p:sp>
+        <p:nvSpPr>
+          <p:cNvPr id="69" name="Rectangle 68"/>
+          <p:cNvSpPr/>
+          <p:nvPr/>
+        </p:nvSpPr>
+        <p:spPr>
+          <a:xfrm>
+            <a:off x="4892040" y="5175504"/>
+            <a:ext cx="1005840" cy="365760"/>
+          </a:xfrm>
+          <a:prstGeom prst="rect">
+            <a:avLst/>
+          </a:prstGeom>
+          <a:solidFill>
+            <a:srgbClr val="FBF5F0"/>
+          </a:solidFill>
+          <a:ln w="12700">
+            <a:solidFill>
+              <a:srgbClr val="DDD0C5"/>
+            </a:solidFill>
+          </a:ln>
+        </p:spPr>
+        <p:txBody>
+          <a:bodyPr rtlCol="0" anchor="ctr"/>
+          <a:lstStyle/>
+          <a:p>
+            <a:pPr algn="ctr"/>
+          </a:p>
+        </p:txBody>
+      </p:sp>
+      <p:sp>
+        <p:nvSpPr>
+          <p:cNvPr id="70" name="TextBox 69"/>
+          <p:cNvSpPr txBox="1"/>
+          <p:nvPr/>
+        </p:nvSpPr>
+        <p:spPr>
+          <a:xfrm>
+            <a:off x="4937760" y="5212080"/>
+            <a:ext cx="914400" cy="292608"/>
+          </a:xfrm>
+          <a:prstGeom prst="rect">
+            <a:avLst/>
+          </a:prstGeom>
+          <a:noFill/>
+        </p:spPr>
+        <p:txBody>
+          <a:bodyPr wrap="square">
+            <a:spAutoFit/>
+          </a:bodyPr>
+          <a:lstStyle/>
+          <a:p>
+            <a:pPr algn="l"/>
+            <a:r>
+              <a:rPr sz="1500" b="0" lang="ja-JP">
+                <a:solidFill>
+                  <a:srgbClr val="8B6B5E"/>
+                </a:solidFill>
+                <a:latin typeface="BIZ UDPGothic"/>
+                <a:ea typeface="BIZ UDPGothic"/>
+                <a:cs typeface="BIZ UDPGothic"/>
+              </a:rPr>
+              <a:t>—</a:t>
+            </a:r>
+          </a:p>
+        </p:txBody>
+      </p:sp>
+      <p:sp>
+        <p:nvSpPr>
+          <p:cNvPr id="71" name="TextBox 70"/>
+          <p:cNvSpPr txBox="1"/>
+          <p:nvPr/>
+        </p:nvSpPr>
+        <p:spPr>
+          <a:xfrm>
+            <a:off x="6263640" y="2697480"/>
+            <a:ext cx="5120640" cy="411480"/>
+          </a:xfrm>
+          <a:prstGeom prst="rect">
+            <a:avLst/>
+          </a:prstGeom>
+          <a:noFill/>
+        </p:spPr>
+        <p:txBody>
+          <a:bodyPr wrap="square">
+            <a:spAutoFit/>
+          </a:bodyPr>
+          <a:lstStyle/>
+          <a:p>
+            <a:pPr algn="l"/>
+            <a:r>
+              <a:rPr sz="1800" b="0" lang="ja-JP">
+                <a:solidFill>
+                  <a:srgbClr val="3D2B1F"/>
+                </a:solidFill>
+                <a:latin typeface="Shippori Mincho"/>
+                <a:ea typeface="Shippori Mincho"/>
+                <a:cs typeface="BIZ UDPGothic"/>
+              </a:rPr>
+              <a:t>第2週：第6〜10日</a:t>
+            </a:r>
+          </a:p>
+        </p:txBody>
+      </p:sp>
+      <p:sp>
+        <p:nvSpPr>
+          <p:cNvPr id="72" name="Rectangle 71"/>
+          <p:cNvSpPr/>
+          <p:nvPr/>
+        </p:nvSpPr>
+        <p:spPr>
+          <a:xfrm>
+            <a:off x="6263640" y="3200400"/>
+            <a:ext cx="1005840" cy="411480"/>
+          </a:xfrm>
+          <a:prstGeom prst="rect">
+            <a:avLst/>
+          </a:prstGeom>
+          <a:solidFill>
+            <a:srgbClr val="F0E0D5"/>
+          </a:solidFill>
+          <a:ln>
+            <a:noFill/>
+          </a:ln>
+        </p:spPr>
+        <p:txBody>
+          <a:bodyPr rtlCol="0" anchor="ctr"/>
+          <a:lstStyle/>
+          <a:p>
+            <a:pPr algn="ctr"/>
+          </a:p>
+        </p:txBody>
+      </p:sp>
+      <p:sp>
+        <p:nvSpPr>
+          <p:cNvPr id="73" name="TextBox 72"/>
+          <p:cNvSpPr txBox="1"/>
+          <p:nvPr/>
+        </p:nvSpPr>
+        <p:spPr>
+          <a:xfrm>
+            <a:off x="6309359" y="3273552"/>
+            <a:ext cx="914400" cy="274320"/>
           </a:xfrm>
           <a:prstGeom prst="rect">
             <a:avLst/>
@@ -7471,13 +8766,2014 @@
             <a:r>
               <a:rPr sz="1400" b="0" lang="ja-JP">
                 <a:solidFill>
+                  <a:srgbClr val="3D2B1F"/>
+                </a:solidFill>
+                <a:latin typeface="BIZ UDPGothic"/>
+                <a:ea typeface="BIZ UDPGothic"/>
+                <a:cs typeface="BIZ UDPGothic"/>
+              </a:rPr>
+              <a:t>日付</a:t>
+            </a:r>
+          </a:p>
+        </p:txBody>
+      </p:sp>
+      <p:sp>
+        <p:nvSpPr>
+          <p:cNvPr id="74" name="Rectangle 73"/>
+          <p:cNvSpPr/>
+          <p:nvPr/>
+        </p:nvSpPr>
+        <p:spPr>
+          <a:xfrm>
+            <a:off x="7269479" y="3200400"/>
+            <a:ext cx="1005840" cy="411480"/>
+          </a:xfrm>
+          <a:prstGeom prst="rect">
+            <a:avLst/>
+          </a:prstGeom>
+          <a:solidFill>
+            <a:srgbClr val="F0E0D5"/>
+          </a:solidFill>
+          <a:ln>
+            <a:noFill/>
+          </a:ln>
+        </p:spPr>
+        <p:txBody>
+          <a:bodyPr rtlCol="0" anchor="ctr"/>
+          <a:lstStyle/>
+          <a:p>
+            <a:pPr algn="ctr"/>
+          </a:p>
+        </p:txBody>
+      </p:sp>
+      <p:sp>
+        <p:nvSpPr>
+          <p:cNvPr id="75" name="TextBox 74"/>
+          <p:cNvSpPr txBox="1"/>
+          <p:nvPr/>
+        </p:nvSpPr>
+        <p:spPr>
+          <a:xfrm>
+            <a:off x="7315199" y="3273552"/>
+            <a:ext cx="914400" cy="274320"/>
+          </a:xfrm>
+          <a:prstGeom prst="rect">
+            <a:avLst/>
+          </a:prstGeom>
+          <a:noFill/>
+        </p:spPr>
+        <p:txBody>
+          <a:bodyPr wrap="square">
+            <a:spAutoFit/>
+          </a:bodyPr>
+          <a:lstStyle/>
+          <a:p>
+            <a:pPr algn="l"/>
+            <a:r>
+              <a:rPr sz="1400" b="0" lang="ja-JP">
+                <a:solidFill>
+                  <a:srgbClr val="3D2B1F"/>
+                </a:solidFill>
+                <a:latin typeface="BIZ UDPGothic"/>
+                <a:ea typeface="BIZ UDPGothic"/>
+                <a:cs typeface="BIZ UDPGothic"/>
+              </a:rPr>
+              <a:t>来店数</a:t>
+            </a:r>
+          </a:p>
+        </p:txBody>
+      </p:sp>
+      <p:sp>
+        <p:nvSpPr>
+          <p:cNvPr id="76" name="Rectangle 75"/>
+          <p:cNvSpPr/>
+          <p:nvPr/>
+        </p:nvSpPr>
+        <p:spPr>
+          <a:xfrm>
+            <a:off x="8275319" y="3200400"/>
+            <a:ext cx="1005840" cy="411480"/>
+          </a:xfrm>
+          <a:prstGeom prst="rect">
+            <a:avLst/>
+          </a:prstGeom>
+          <a:solidFill>
+            <a:srgbClr val="F0E0D5"/>
+          </a:solidFill>
+          <a:ln>
+            <a:noFill/>
+          </a:ln>
+        </p:spPr>
+        <p:txBody>
+          <a:bodyPr rtlCol="0" anchor="ctr"/>
+          <a:lstStyle/>
+          <a:p>
+            <a:pPr algn="ctr"/>
+          </a:p>
+        </p:txBody>
+      </p:sp>
+      <p:sp>
+        <p:nvSpPr>
+          <p:cNvPr id="77" name="TextBox 76"/>
+          <p:cNvSpPr txBox="1"/>
+          <p:nvPr/>
+        </p:nvSpPr>
+        <p:spPr>
+          <a:xfrm>
+            <a:off x="8321040" y="3273552"/>
+            <a:ext cx="914400" cy="274320"/>
+          </a:xfrm>
+          <a:prstGeom prst="rect">
+            <a:avLst/>
+          </a:prstGeom>
+          <a:noFill/>
+        </p:spPr>
+        <p:txBody>
+          <a:bodyPr wrap="square">
+            <a:spAutoFit/>
+          </a:bodyPr>
+          <a:lstStyle/>
+          <a:p>
+            <a:pPr algn="l"/>
+            <a:r>
+              <a:rPr sz="1400" b="0" lang="ja-JP">
+                <a:solidFill>
+                  <a:srgbClr val="3D2B1F"/>
+                </a:solidFill>
+                <a:latin typeface="BIZ UDPGothic"/>
+                <a:ea typeface="BIZ UDPGothic"/>
+                <a:cs typeface="BIZ UDPGothic"/>
+              </a:rPr>
+              <a:t>販売数</a:t>
+            </a:r>
+          </a:p>
+        </p:txBody>
+      </p:sp>
+      <p:sp>
+        <p:nvSpPr>
+          <p:cNvPr id="78" name="Rectangle 77"/>
+          <p:cNvSpPr/>
+          <p:nvPr/>
+        </p:nvSpPr>
+        <p:spPr>
+          <a:xfrm>
+            <a:off x="9281159" y="3200400"/>
+            <a:ext cx="1097280" cy="411480"/>
+          </a:xfrm>
+          <a:prstGeom prst="rect">
+            <a:avLst/>
+          </a:prstGeom>
+          <a:solidFill>
+            <a:srgbClr val="F0E0D5"/>
+          </a:solidFill>
+          <a:ln>
+            <a:noFill/>
+          </a:ln>
+        </p:spPr>
+        <p:txBody>
+          <a:bodyPr rtlCol="0" anchor="ctr"/>
+          <a:lstStyle/>
+          <a:p>
+            <a:pPr algn="ctr"/>
+          </a:p>
+        </p:txBody>
+      </p:sp>
+      <p:sp>
+        <p:nvSpPr>
+          <p:cNvPr id="79" name="TextBox 78"/>
+          <p:cNvSpPr txBox="1"/>
+          <p:nvPr/>
+        </p:nvSpPr>
+        <p:spPr>
+          <a:xfrm>
+            <a:off x="9326880" y="3273552"/>
+            <a:ext cx="1005839" cy="274320"/>
+          </a:xfrm>
+          <a:prstGeom prst="rect">
+            <a:avLst/>
+          </a:prstGeom>
+          <a:noFill/>
+        </p:spPr>
+        <p:txBody>
+          <a:bodyPr wrap="square">
+            <a:spAutoFit/>
+          </a:bodyPr>
+          <a:lstStyle/>
+          <a:p>
+            <a:pPr algn="l"/>
+            <a:r>
+              <a:rPr sz="1400" b="0" lang="ja-JP">
+                <a:solidFill>
+                  <a:srgbClr val="3D2B1F"/>
+                </a:solidFill>
+                <a:latin typeface="BIZ UDPGothic"/>
+                <a:ea typeface="BIZ UDPGothic"/>
+                <a:cs typeface="BIZ UDPGothic"/>
+              </a:rPr>
+              <a:t>待ち時間</a:t>
+            </a:r>
+          </a:p>
+        </p:txBody>
+      </p:sp>
+      <p:sp>
+        <p:nvSpPr>
+          <p:cNvPr id="80" name="Rectangle 79"/>
+          <p:cNvSpPr/>
+          <p:nvPr/>
+        </p:nvSpPr>
+        <p:spPr>
+          <a:xfrm>
+            <a:off x="10378439" y="3200400"/>
+            <a:ext cx="1005840" cy="411480"/>
+          </a:xfrm>
+          <a:prstGeom prst="rect">
+            <a:avLst/>
+          </a:prstGeom>
+          <a:solidFill>
+            <a:srgbClr val="F0E0D5"/>
+          </a:solidFill>
+          <a:ln>
+            <a:noFill/>
+          </a:ln>
+        </p:spPr>
+        <p:txBody>
+          <a:bodyPr rtlCol="0" anchor="ctr"/>
+          <a:lstStyle/>
+          <a:p>
+            <a:pPr algn="ctr"/>
+          </a:p>
+        </p:txBody>
+      </p:sp>
+      <p:sp>
+        <p:nvSpPr>
+          <p:cNvPr id="81" name="TextBox 80"/>
+          <p:cNvSpPr txBox="1"/>
+          <p:nvPr/>
+        </p:nvSpPr>
+        <p:spPr>
+          <a:xfrm>
+            <a:off x="10424159" y="3273552"/>
+            <a:ext cx="914400" cy="274320"/>
+          </a:xfrm>
+          <a:prstGeom prst="rect">
+            <a:avLst/>
+          </a:prstGeom>
+          <a:noFill/>
+        </p:spPr>
+        <p:txBody>
+          <a:bodyPr wrap="square">
+            <a:spAutoFit/>
+          </a:bodyPr>
+          <a:lstStyle/>
+          <a:p>
+            <a:pPr algn="l"/>
+            <a:r>
+              <a:rPr sz="1400" b="0" lang="ja-JP">
+                <a:solidFill>
+                  <a:srgbClr val="3D2B1F"/>
+                </a:solidFill>
+                <a:latin typeface="BIZ UDPGothic"/>
+                <a:ea typeface="BIZ UDPGothic"/>
+                <a:cs typeface="BIZ UDPGothic"/>
+              </a:rPr>
+              <a:t>廃棄数</a:t>
+            </a:r>
+          </a:p>
+        </p:txBody>
+      </p:sp>
+      <p:sp>
+        <p:nvSpPr>
+          <p:cNvPr id="82" name="Rectangle 81"/>
+          <p:cNvSpPr/>
+          <p:nvPr/>
+        </p:nvSpPr>
+        <p:spPr>
+          <a:xfrm>
+            <a:off x="6263640" y="3639312"/>
+            <a:ext cx="1005840" cy="365760"/>
+          </a:xfrm>
+          <a:prstGeom prst="rect">
+            <a:avLst/>
+          </a:prstGeom>
+          <a:solidFill>
+            <a:srgbClr val="FBF5F0"/>
+          </a:solidFill>
+          <a:ln w="12700">
+            <a:solidFill>
+              <a:srgbClr val="DDD0C5"/>
+            </a:solidFill>
+          </a:ln>
+        </p:spPr>
+        <p:txBody>
+          <a:bodyPr rtlCol="0" anchor="ctr"/>
+          <a:lstStyle/>
+          <a:p>
+            <a:pPr algn="ctr"/>
+          </a:p>
+        </p:txBody>
+      </p:sp>
+      <p:sp>
+        <p:nvSpPr>
+          <p:cNvPr id="83" name="TextBox 82"/>
+          <p:cNvSpPr txBox="1"/>
+          <p:nvPr/>
+        </p:nvSpPr>
+        <p:spPr>
+          <a:xfrm>
+            <a:off x="6309359" y="3675887"/>
+            <a:ext cx="914400" cy="292608"/>
+          </a:xfrm>
+          <a:prstGeom prst="rect">
+            <a:avLst/>
+          </a:prstGeom>
+          <a:noFill/>
+        </p:spPr>
+        <p:txBody>
+          <a:bodyPr wrap="square">
+            <a:spAutoFit/>
+          </a:bodyPr>
+          <a:lstStyle/>
+          <a:p>
+            <a:pPr algn="l"/>
+            <a:r>
+              <a:rPr sz="1500" b="0" lang="ja-JP">
+                <a:solidFill>
                   <a:srgbClr val="8B6B5E"/>
                 </a:solidFill>
-                <a:latin typeface="Noto Sans JP"/>
-                <a:ea typeface="Noto Sans JP"/>
-                <a:cs typeface="Noto Sans JP"/>
-              </a:rPr>
-              <a:t>待ち時間の測り方・集計単位は開始前に統一。空欄や未収集を「0」と扱わない。</a:t>
+                <a:latin typeface="BIZ UDPGothic"/>
+                <a:ea typeface="BIZ UDPGothic"/>
+                <a:cs typeface="BIZ UDPGothic"/>
+              </a:rPr>
+              <a:t>第6日</a:t>
+            </a:r>
+          </a:p>
+        </p:txBody>
+      </p:sp>
+      <p:sp>
+        <p:nvSpPr>
+          <p:cNvPr id="84" name="Rectangle 83"/>
+          <p:cNvSpPr/>
+          <p:nvPr/>
+        </p:nvSpPr>
+        <p:spPr>
+          <a:xfrm>
+            <a:off x="7269479" y="3639312"/>
+            <a:ext cx="1005840" cy="365760"/>
+          </a:xfrm>
+          <a:prstGeom prst="rect">
+            <a:avLst/>
+          </a:prstGeom>
+          <a:solidFill>
+            <a:srgbClr val="FBF5F0"/>
+          </a:solidFill>
+          <a:ln w="12700">
+            <a:solidFill>
+              <a:srgbClr val="DDD0C5"/>
+            </a:solidFill>
+          </a:ln>
+        </p:spPr>
+        <p:txBody>
+          <a:bodyPr rtlCol="0" anchor="ctr"/>
+          <a:lstStyle/>
+          <a:p>
+            <a:pPr algn="ctr"/>
+          </a:p>
+        </p:txBody>
+      </p:sp>
+      <p:sp>
+        <p:nvSpPr>
+          <p:cNvPr id="85" name="TextBox 84"/>
+          <p:cNvSpPr txBox="1"/>
+          <p:nvPr/>
+        </p:nvSpPr>
+        <p:spPr>
+          <a:xfrm>
+            <a:off x="7315199" y="3675887"/>
+            <a:ext cx="914400" cy="292608"/>
+          </a:xfrm>
+          <a:prstGeom prst="rect">
+            <a:avLst/>
+          </a:prstGeom>
+          <a:noFill/>
+        </p:spPr>
+        <p:txBody>
+          <a:bodyPr wrap="square">
+            <a:spAutoFit/>
+          </a:bodyPr>
+          <a:lstStyle/>
+          <a:p>
+            <a:pPr algn="l"/>
+            <a:r>
+              <a:rPr sz="1500" b="0" lang="ja-JP">
+                <a:solidFill>
+                  <a:srgbClr val="8B6B5E"/>
+                </a:solidFill>
+                <a:latin typeface="BIZ UDPGothic"/>
+                <a:ea typeface="BIZ UDPGothic"/>
+                <a:cs typeface="BIZ UDPGothic"/>
+              </a:rPr>
+              <a:t>—</a:t>
+            </a:r>
+          </a:p>
+        </p:txBody>
+      </p:sp>
+      <p:sp>
+        <p:nvSpPr>
+          <p:cNvPr id="86" name="Rectangle 85"/>
+          <p:cNvSpPr/>
+          <p:nvPr/>
+        </p:nvSpPr>
+        <p:spPr>
+          <a:xfrm>
+            <a:off x="8275319" y="3639312"/>
+            <a:ext cx="1005840" cy="365760"/>
+          </a:xfrm>
+          <a:prstGeom prst="rect">
+            <a:avLst/>
+          </a:prstGeom>
+          <a:solidFill>
+            <a:srgbClr val="FBF5F0"/>
+          </a:solidFill>
+          <a:ln w="12700">
+            <a:solidFill>
+              <a:srgbClr val="DDD0C5"/>
+            </a:solidFill>
+          </a:ln>
+        </p:spPr>
+        <p:txBody>
+          <a:bodyPr rtlCol="0" anchor="ctr"/>
+          <a:lstStyle/>
+          <a:p>
+            <a:pPr algn="ctr"/>
+          </a:p>
+        </p:txBody>
+      </p:sp>
+      <p:sp>
+        <p:nvSpPr>
+          <p:cNvPr id="87" name="TextBox 86"/>
+          <p:cNvSpPr txBox="1"/>
+          <p:nvPr/>
+        </p:nvSpPr>
+        <p:spPr>
+          <a:xfrm>
+            <a:off x="8321040" y="3675887"/>
+            <a:ext cx="914400" cy="292608"/>
+          </a:xfrm>
+          <a:prstGeom prst="rect">
+            <a:avLst/>
+          </a:prstGeom>
+          <a:noFill/>
+        </p:spPr>
+        <p:txBody>
+          <a:bodyPr wrap="square">
+            <a:spAutoFit/>
+          </a:bodyPr>
+          <a:lstStyle/>
+          <a:p>
+            <a:pPr algn="l"/>
+            <a:r>
+              <a:rPr sz="1500" b="0" lang="ja-JP">
+                <a:solidFill>
+                  <a:srgbClr val="8B6B5E"/>
+                </a:solidFill>
+                <a:latin typeface="BIZ UDPGothic"/>
+                <a:ea typeface="BIZ UDPGothic"/>
+                <a:cs typeface="BIZ UDPGothic"/>
+              </a:rPr>
+              <a:t>—</a:t>
+            </a:r>
+          </a:p>
+        </p:txBody>
+      </p:sp>
+      <p:sp>
+        <p:nvSpPr>
+          <p:cNvPr id="88" name="Rectangle 87"/>
+          <p:cNvSpPr/>
+          <p:nvPr/>
+        </p:nvSpPr>
+        <p:spPr>
+          <a:xfrm>
+            <a:off x="9281159" y="3639312"/>
+            <a:ext cx="1097280" cy="365760"/>
+          </a:xfrm>
+          <a:prstGeom prst="rect">
+            <a:avLst/>
+          </a:prstGeom>
+          <a:solidFill>
+            <a:srgbClr val="FBF5F0"/>
+          </a:solidFill>
+          <a:ln w="12700">
+            <a:solidFill>
+              <a:srgbClr val="DDD0C5"/>
+            </a:solidFill>
+          </a:ln>
+        </p:spPr>
+        <p:txBody>
+          <a:bodyPr rtlCol="0" anchor="ctr"/>
+          <a:lstStyle/>
+          <a:p>
+            <a:pPr algn="ctr"/>
+          </a:p>
+        </p:txBody>
+      </p:sp>
+      <p:sp>
+        <p:nvSpPr>
+          <p:cNvPr id="89" name="TextBox 88"/>
+          <p:cNvSpPr txBox="1"/>
+          <p:nvPr/>
+        </p:nvSpPr>
+        <p:spPr>
+          <a:xfrm>
+            <a:off x="9326880" y="3675887"/>
+            <a:ext cx="1005839" cy="292608"/>
+          </a:xfrm>
+          <a:prstGeom prst="rect">
+            <a:avLst/>
+          </a:prstGeom>
+          <a:noFill/>
+        </p:spPr>
+        <p:txBody>
+          <a:bodyPr wrap="square">
+            <a:spAutoFit/>
+          </a:bodyPr>
+          <a:lstStyle/>
+          <a:p>
+            <a:pPr algn="l"/>
+            <a:r>
+              <a:rPr sz="1500" b="0" lang="ja-JP">
+                <a:solidFill>
+                  <a:srgbClr val="8B6B5E"/>
+                </a:solidFill>
+                <a:latin typeface="BIZ UDPGothic"/>
+                <a:ea typeface="BIZ UDPGothic"/>
+                <a:cs typeface="BIZ UDPGothic"/>
+              </a:rPr>
+              <a:t>—</a:t>
+            </a:r>
+          </a:p>
+        </p:txBody>
+      </p:sp>
+      <p:sp>
+        <p:nvSpPr>
+          <p:cNvPr id="90" name="Rectangle 89"/>
+          <p:cNvSpPr/>
+          <p:nvPr/>
+        </p:nvSpPr>
+        <p:spPr>
+          <a:xfrm>
+            <a:off x="10378439" y="3639312"/>
+            <a:ext cx="1005840" cy="365760"/>
+          </a:xfrm>
+          <a:prstGeom prst="rect">
+            <a:avLst/>
+          </a:prstGeom>
+          <a:solidFill>
+            <a:srgbClr val="FBF5F0"/>
+          </a:solidFill>
+          <a:ln w="12700">
+            <a:solidFill>
+              <a:srgbClr val="DDD0C5"/>
+            </a:solidFill>
+          </a:ln>
+        </p:spPr>
+        <p:txBody>
+          <a:bodyPr rtlCol="0" anchor="ctr"/>
+          <a:lstStyle/>
+          <a:p>
+            <a:pPr algn="ctr"/>
+          </a:p>
+        </p:txBody>
+      </p:sp>
+      <p:sp>
+        <p:nvSpPr>
+          <p:cNvPr id="91" name="TextBox 90"/>
+          <p:cNvSpPr txBox="1"/>
+          <p:nvPr/>
+        </p:nvSpPr>
+        <p:spPr>
+          <a:xfrm>
+            <a:off x="10424159" y="3675887"/>
+            <a:ext cx="914400" cy="292608"/>
+          </a:xfrm>
+          <a:prstGeom prst="rect">
+            <a:avLst/>
+          </a:prstGeom>
+          <a:noFill/>
+        </p:spPr>
+        <p:txBody>
+          <a:bodyPr wrap="square">
+            <a:spAutoFit/>
+          </a:bodyPr>
+          <a:lstStyle/>
+          <a:p>
+            <a:pPr algn="l"/>
+            <a:r>
+              <a:rPr sz="1500" b="0" lang="ja-JP">
+                <a:solidFill>
+                  <a:srgbClr val="8B6B5E"/>
+                </a:solidFill>
+                <a:latin typeface="BIZ UDPGothic"/>
+                <a:ea typeface="BIZ UDPGothic"/>
+                <a:cs typeface="BIZ UDPGothic"/>
+              </a:rPr>
+              <a:t>—</a:t>
+            </a:r>
+          </a:p>
+        </p:txBody>
+      </p:sp>
+      <p:sp>
+        <p:nvSpPr>
+          <p:cNvPr id="92" name="Rectangle 91"/>
+          <p:cNvSpPr/>
+          <p:nvPr/>
+        </p:nvSpPr>
+        <p:spPr>
+          <a:xfrm>
+            <a:off x="6263640" y="4023360"/>
+            <a:ext cx="1005840" cy="365760"/>
+          </a:xfrm>
+          <a:prstGeom prst="rect">
+            <a:avLst/>
+          </a:prstGeom>
+          <a:solidFill>
+            <a:srgbClr val="FBF5F0"/>
+          </a:solidFill>
+          <a:ln w="12700">
+            <a:solidFill>
+              <a:srgbClr val="DDD0C5"/>
+            </a:solidFill>
+          </a:ln>
+        </p:spPr>
+        <p:txBody>
+          <a:bodyPr rtlCol="0" anchor="ctr"/>
+          <a:lstStyle/>
+          <a:p>
+            <a:pPr algn="ctr"/>
+          </a:p>
+        </p:txBody>
+      </p:sp>
+      <p:sp>
+        <p:nvSpPr>
+          <p:cNvPr id="93" name="TextBox 92"/>
+          <p:cNvSpPr txBox="1"/>
+          <p:nvPr/>
+        </p:nvSpPr>
+        <p:spPr>
+          <a:xfrm>
+            <a:off x="6309359" y="4059936"/>
+            <a:ext cx="914400" cy="292608"/>
+          </a:xfrm>
+          <a:prstGeom prst="rect">
+            <a:avLst/>
+          </a:prstGeom>
+          <a:noFill/>
+        </p:spPr>
+        <p:txBody>
+          <a:bodyPr wrap="square">
+            <a:spAutoFit/>
+          </a:bodyPr>
+          <a:lstStyle/>
+          <a:p>
+            <a:pPr algn="l"/>
+            <a:r>
+              <a:rPr sz="1500" b="0" lang="ja-JP">
+                <a:solidFill>
+                  <a:srgbClr val="8B6B5E"/>
+                </a:solidFill>
+                <a:latin typeface="BIZ UDPGothic"/>
+                <a:ea typeface="BIZ UDPGothic"/>
+                <a:cs typeface="BIZ UDPGothic"/>
+              </a:rPr>
+              <a:t>第7日</a:t>
+            </a:r>
+          </a:p>
+        </p:txBody>
+      </p:sp>
+      <p:sp>
+        <p:nvSpPr>
+          <p:cNvPr id="94" name="Rectangle 93"/>
+          <p:cNvSpPr/>
+          <p:nvPr/>
+        </p:nvSpPr>
+        <p:spPr>
+          <a:xfrm>
+            <a:off x="7269479" y="4023360"/>
+            <a:ext cx="1005840" cy="365760"/>
+          </a:xfrm>
+          <a:prstGeom prst="rect">
+            <a:avLst/>
+          </a:prstGeom>
+          <a:solidFill>
+            <a:srgbClr val="FBF5F0"/>
+          </a:solidFill>
+          <a:ln w="12700">
+            <a:solidFill>
+              <a:srgbClr val="DDD0C5"/>
+            </a:solidFill>
+          </a:ln>
+        </p:spPr>
+        <p:txBody>
+          <a:bodyPr rtlCol="0" anchor="ctr"/>
+          <a:lstStyle/>
+          <a:p>
+            <a:pPr algn="ctr"/>
+          </a:p>
+        </p:txBody>
+      </p:sp>
+      <p:sp>
+        <p:nvSpPr>
+          <p:cNvPr id="95" name="TextBox 94"/>
+          <p:cNvSpPr txBox="1"/>
+          <p:nvPr/>
+        </p:nvSpPr>
+        <p:spPr>
+          <a:xfrm>
+            <a:off x="7315199" y="4059936"/>
+            <a:ext cx="914400" cy="292608"/>
+          </a:xfrm>
+          <a:prstGeom prst="rect">
+            <a:avLst/>
+          </a:prstGeom>
+          <a:noFill/>
+        </p:spPr>
+        <p:txBody>
+          <a:bodyPr wrap="square">
+            <a:spAutoFit/>
+          </a:bodyPr>
+          <a:lstStyle/>
+          <a:p>
+            <a:pPr algn="l"/>
+            <a:r>
+              <a:rPr sz="1500" b="0" lang="ja-JP">
+                <a:solidFill>
+                  <a:srgbClr val="8B6B5E"/>
+                </a:solidFill>
+                <a:latin typeface="BIZ UDPGothic"/>
+                <a:ea typeface="BIZ UDPGothic"/>
+                <a:cs typeface="BIZ UDPGothic"/>
+              </a:rPr>
+              <a:t>—</a:t>
+            </a:r>
+          </a:p>
+        </p:txBody>
+      </p:sp>
+      <p:sp>
+        <p:nvSpPr>
+          <p:cNvPr id="96" name="Rectangle 95"/>
+          <p:cNvSpPr/>
+          <p:nvPr/>
+        </p:nvSpPr>
+        <p:spPr>
+          <a:xfrm>
+            <a:off x="8275319" y="4023360"/>
+            <a:ext cx="1005840" cy="365760"/>
+          </a:xfrm>
+          <a:prstGeom prst="rect">
+            <a:avLst/>
+          </a:prstGeom>
+          <a:solidFill>
+            <a:srgbClr val="FBF5F0"/>
+          </a:solidFill>
+          <a:ln w="12700">
+            <a:solidFill>
+              <a:srgbClr val="DDD0C5"/>
+            </a:solidFill>
+          </a:ln>
+        </p:spPr>
+        <p:txBody>
+          <a:bodyPr rtlCol="0" anchor="ctr"/>
+          <a:lstStyle/>
+          <a:p>
+            <a:pPr algn="ctr"/>
+          </a:p>
+        </p:txBody>
+      </p:sp>
+      <p:sp>
+        <p:nvSpPr>
+          <p:cNvPr id="97" name="TextBox 96"/>
+          <p:cNvSpPr txBox="1"/>
+          <p:nvPr/>
+        </p:nvSpPr>
+        <p:spPr>
+          <a:xfrm>
+            <a:off x="8321040" y="4059936"/>
+            <a:ext cx="914400" cy="292608"/>
+          </a:xfrm>
+          <a:prstGeom prst="rect">
+            <a:avLst/>
+          </a:prstGeom>
+          <a:noFill/>
+        </p:spPr>
+        <p:txBody>
+          <a:bodyPr wrap="square">
+            <a:spAutoFit/>
+          </a:bodyPr>
+          <a:lstStyle/>
+          <a:p>
+            <a:pPr algn="l"/>
+            <a:r>
+              <a:rPr sz="1500" b="0" lang="ja-JP">
+                <a:solidFill>
+                  <a:srgbClr val="8B6B5E"/>
+                </a:solidFill>
+                <a:latin typeface="BIZ UDPGothic"/>
+                <a:ea typeface="BIZ UDPGothic"/>
+                <a:cs typeface="BIZ UDPGothic"/>
+              </a:rPr>
+              <a:t>—</a:t>
+            </a:r>
+          </a:p>
+        </p:txBody>
+      </p:sp>
+      <p:sp>
+        <p:nvSpPr>
+          <p:cNvPr id="98" name="Rectangle 97"/>
+          <p:cNvSpPr/>
+          <p:nvPr/>
+        </p:nvSpPr>
+        <p:spPr>
+          <a:xfrm>
+            <a:off x="9281159" y="4023360"/>
+            <a:ext cx="1097280" cy="365760"/>
+          </a:xfrm>
+          <a:prstGeom prst="rect">
+            <a:avLst/>
+          </a:prstGeom>
+          <a:solidFill>
+            <a:srgbClr val="FBF5F0"/>
+          </a:solidFill>
+          <a:ln w="12700">
+            <a:solidFill>
+              <a:srgbClr val="DDD0C5"/>
+            </a:solidFill>
+          </a:ln>
+        </p:spPr>
+        <p:txBody>
+          <a:bodyPr rtlCol="0" anchor="ctr"/>
+          <a:lstStyle/>
+          <a:p>
+            <a:pPr algn="ctr"/>
+          </a:p>
+        </p:txBody>
+      </p:sp>
+      <p:sp>
+        <p:nvSpPr>
+          <p:cNvPr id="99" name="TextBox 98"/>
+          <p:cNvSpPr txBox="1"/>
+          <p:nvPr/>
+        </p:nvSpPr>
+        <p:spPr>
+          <a:xfrm>
+            <a:off x="9326880" y="4059936"/>
+            <a:ext cx="1005839" cy="292608"/>
+          </a:xfrm>
+          <a:prstGeom prst="rect">
+            <a:avLst/>
+          </a:prstGeom>
+          <a:noFill/>
+        </p:spPr>
+        <p:txBody>
+          <a:bodyPr wrap="square">
+            <a:spAutoFit/>
+          </a:bodyPr>
+          <a:lstStyle/>
+          <a:p>
+            <a:pPr algn="l"/>
+            <a:r>
+              <a:rPr sz="1500" b="0" lang="ja-JP">
+                <a:solidFill>
+                  <a:srgbClr val="8B6B5E"/>
+                </a:solidFill>
+                <a:latin typeface="BIZ UDPGothic"/>
+                <a:ea typeface="BIZ UDPGothic"/>
+                <a:cs typeface="BIZ UDPGothic"/>
+              </a:rPr>
+              <a:t>—</a:t>
+            </a:r>
+          </a:p>
+        </p:txBody>
+      </p:sp>
+      <p:sp>
+        <p:nvSpPr>
+          <p:cNvPr id="100" name="Rectangle 99"/>
+          <p:cNvSpPr/>
+          <p:nvPr/>
+        </p:nvSpPr>
+        <p:spPr>
+          <a:xfrm>
+            <a:off x="10378439" y="4023360"/>
+            <a:ext cx="1005840" cy="365760"/>
+          </a:xfrm>
+          <a:prstGeom prst="rect">
+            <a:avLst/>
+          </a:prstGeom>
+          <a:solidFill>
+            <a:srgbClr val="FBF5F0"/>
+          </a:solidFill>
+          <a:ln w="12700">
+            <a:solidFill>
+              <a:srgbClr val="DDD0C5"/>
+            </a:solidFill>
+          </a:ln>
+        </p:spPr>
+        <p:txBody>
+          <a:bodyPr rtlCol="0" anchor="ctr"/>
+          <a:lstStyle/>
+          <a:p>
+            <a:pPr algn="ctr"/>
+          </a:p>
+        </p:txBody>
+      </p:sp>
+      <p:sp>
+        <p:nvSpPr>
+          <p:cNvPr id="101" name="TextBox 100"/>
+          <p:cNvSpPr txBox="1"/>
+          <p:nvPr/>
+        </p:nvSpPr>
+        <p:spPr>
+          <a:xfrm>
+            <a:off x="10424159" y="4059936"/>
+            <a:ext cx="914400" cy="292608"/>
+          </a:xfrm>
+          <a:prstGeom prst="rect">
+            <a:avLst/>
+          </a:prstGeom>
+          <a:noFill/>
+        </p:spPr>
+        <p:txBody>
+          <a:bodyPr wrap="square">
+            <a:spAutoFit/>
+          </a:bodyPr>
+          <a:lstStyle/>
+          <a:p>
+            <a:pPr algn="l"/>
+            <a:r>
+              <a:rPr sz="1500" b="0" lang="ja-JP">
+                <a:solidFill>
+                  <a:srgbClr val="8B6B5E"/>
+                </a:solidFill>
+                <a:latin typeface="BIZ UDPGothic"/>
+                <a:ea typeface="BIZ UDPGothic"/>
+                <a:cs typeface="BIZ UDPGothic"/>
+              </a:rPr>
+              <a:t>—</a:t>
+            </a:r>
+          </a:p>
+        </p:txBody>
+      </p:sp>
+      <p:sp>
+        <p:nvSpPr>
+          <p:cNvPr id="102" name="Rectangle 101"/>
+          <p:cNvSpPr/>
+          <p:nvPr/>
+        </p:nvSpPr>
+        <p:spPr>
+          <a:xfrm>
+            <a:off x="6263640" y="4407408"/>
+            <a:ext cx="1005840" cy="365760"/>
+          </a:xfrm>
+          <a:prstGeom prst="rect">
+            <a:avLst/>
+          </a:prstGeom>
+          <a:solidFill>
+            <a:srgbClr val="FBF5F0"/>
+          </a:solidFill>
+          <a:ln w="12700">
+            <a:solidFill>
+              <a:srgbClr val="DDD0C5"/>
+            </a:solidFill>
+          </a:ln>
+        </p:spPr>
+        <p:txBody>
+          <a:bodyPr rtlCol="0" anchor="ctr"/>
+          <a:lstStyle/>
+          <a:p>
+            <a:pPr algn="ctr"/>
+          </a:p>
+        </p:txBody>
+      </p:sp>
+      <p:sp>
+        <p:nvSpPr>
+          <p:cNvPr id="103" name="TextBox 102"/>
+          <p:cNvSpPr txBox="1"/>
+          <p:nvPr/>
+        </p:nvSpPr>
+        <p:spPr>
+          <a:xfrm>
+            <a:off x="6309359" y="4443984"/>
+            <a:ext cx="914400" cy="292608"/>
+          </a:xfrm>
+          <a:prstGeom prst="rect">
+            <a:avLst/>
+          </a:prstGeom>
+          <a:noFill/>
+        </p:spPr>
+        <p:txBody>
+          <a:bodyPr wrap="square">
+            <a:spAutoFit/>
+          </a:bodyPr>
+          <a:lstStyle/>
+          <a:p>
+            <a:pPr algn="l"/>
+            <a:r>
+              <a:rPr sz="1500" b="0" lang="ja-JP">
+                <a:solidFill>
+                  <a:srgbClr val="8B6B5E"/>
+                </a:solidFill>
+                <a:latin typeface="BIZ UDPGothic"/>
+                <a:ea typeface="BIZ UDPGothic"/>
+                <a:cs typeface="BIZ UDPGothic"/>
+              </a:rPr>
+              <a:t>第8日</a:t>
+            </a:r>
+          </a:p>
+        </p:txBody>
+      </p:sp>
+      <p:sp>
+        <p:nvSpPr>
+          <p:cNvPr id="104" name="Rectangle 103"/>
+          <p:cNvSpPr/>
+          <p:nvPr/>
+        </p:nvSpPr>
+        <p:spPr>
+          <a:xfrm>
+            <a:off x="7269479" y="4407408"/>
+            <a:ext cx="1005840" cy="365760"/>
+          </a:xfrm>
+          <a:prstGeom prst="rect">
+            <a:avLst/>
+          </a:prstGeom>
+          <a:solidFill>
+            <a:srgbClr val="FBF5F0"/>
+          </a:solidFill>
+          <a:ln w="12700">
+            <a:solidFill>
+              <a:srgbClr val="DDD0C5"/>
+            </a:solidFill>
+          </a:ln>
+        </p:spPr>
+        <p:txBody>
+          <a:bodyPr rtlCol="0" anchor="ctr"/>
+          <a:lstStyle/>
+          <a:p>
+            <a:pPr algn="ctr"/>
+          </a:p>
+        </p:txBody>
+      </p:sp>
+      <p:sp>
+        <p:nvSpPr>
+          <p:cNvPr id="105" name="TextBox 104"/>
+          <p:cNvSpPr txBox="1"/>
+          <p:nvPr/>
+        </p:nvSpPr>
+        <p:spPr>
+          <a:xfrm>
+            <a:off x="7315199" y="4443984"/>
+            <a:ext cx="914400" cy="292608"/>
+          </a:xfrm>
+          <a:prstGeom prst="rect">
+            <a:avLst/>
+          </a:prstGeom>
+          <a:noFill/>
+        </p:spPr>
+        <p:txBody>
+          <a:bodyPr wrap="square">
+            <a:spAutoFit/>
+          </a:bodyPr>
+          <a:lstStyle/>
+          <a:p>
+            <a:pPr algn="l"/>
+            <a:r>
+              <a:rPr sz="1500" b="0" lang="ja-JP">
+                <a:solidFill>
+                  <a:srgbClr val="8B6B5E"/>
+                </a:solidFill>
+                <a:latin typeface="BIZ UDPGothic"/>
+                <a:ea typeface="BIZ UDPGothic"/>
+                <a:cs typeface="BIZ UDPGothic"/>
+              </a:rPr>
+              <a:t>—</a:t>
+            </a:r>
+          </a:p>
+        </p:txBody>
+      </p:sp>
+      <p:sp>
+        <p:nvSpPr>
+          <p:cNvPr id="106" name="Rectangle 105"/>
+          <p:cNvSpPr/>
+          <p:nvPr/>
+        </p:nvSpPr>
+        <p:spPr>
+          <a:xfrm>
+            <a:off x="8275319" y="4407408"/>
+            <a:ext cx="1005840" cy="365760"/>
+          </a:xfrm>
+          <a:prstGeom prst="rect">
+            <a:avLst/>
+          </a:prstGeom>
+          <a:solidFill>
+            <a:srgbClr val="FBF5F0"/>
+          </a:solidFill>
+          <a:ln w="12700">
+            <a:solidFill>
+              <a:srgbClr val="DDD0C5"/>
+            </a:solidFill>
+          </a:ln>
+        </p:spPr>
+        <p:txBody>
+          <a:bodyPr rtlCol="0" anchor="ctr"/>
+          <a:lstStyle/>
+          <a:p>
+            <a:pPr algn="ctr"/>
+          </a:p>
+        </p:txBody>
+      </p:sp>
+      <p:sp>
+        <p:nvSpPr>
+          <p:cNvPr id="107" name="TextBox 106"/>
+          <p:cNvSpPr txBox="1"/>
+          <p:nvPr/>
+        </p:nvSpPr>
+        <p:spPr>
+          <a:xfrm>
+            <a:off x="8321040" y="4443984"/>
+            <a:ext cx="914400" cy="292608"/>
+          </a:xfrm>
+          <a:prstGeom prst="rect">
+            <a:avLst/>
+          </a:prstGeom>
+          <a:noFill/>
+        </p:spPr>
+        <p:txBody>
+          <a:bodyPr wrap="square">
+            <a:spAutoFit/>
+          </a:bodyPr>
+          <a:lstStyle/>
+          <a:p>
+            <a:pPr algn="l"/>
+            <a:r>
+              <a:rPr sz="1500" b="0" lang="ja-JP">
+                <a:solidFill>
+                  <a:srgbClr val="8B6B5E"/>
+                </a:solidFill>
+                <a:latin typeface="BIZ UDPGothic"/>
+                <a:ea typeface="BIZ UDPGothic"/>
+                <a:cs typeface="BIZ UDPGothic"/>
+              </a:rPr>
+              <a:t>—</a:t>
+            </a:r>
+          </a:p>
+        </p:txBody>
+      </p:sp>
+      <p:sp>
+        <p:nvSpPr>
+          <p:cNvPr id="108" name="Rectangle 107"/>
+          <p:cNvSpPr/>
+          <p:nvPr/>
+        </p:nvSpPr>
+        <p:spPr>
+          <a:xfrm>
+            <a:off x="9281159" y="4407408"/>
+            <a:ext cx="1097280" cy="365760"/>
+          </a:xfrm>
+          <a:prstGeom prst="rect">
+            <a:avLst/>
+          </a:prstGeom>
+          <a:solidFill>
+            <a:srgbClr val="FBF5F0"/>
+          </a:solidFill>
+          <a:ln w="12700">
+            <a:solidFill>
+              <a:srgbClr val="DDD0C5"/>
+            </a:solidFill>
+          </a:ln>
+        </p:spPr>
+        <p:txBody>
+          <a:bodyPr rtlCol="0" anchor="ctr"/>
+          <a:lstStyle/>
+          <a:p>
+            <a:pPr algn="ctr"/>
+          </a:p>
+        </p:txBody>
+      </p:sp>
+      <p:sp>
+        <p:nvSpPr>
+          <p:cNvPr id="109" name="TextBox 108"/>
+          <p:cNvSpPr txBox="1"/>
+          <p:nvPr/>
+        </p:nvSpPr>
+        <p:spPr>
+          <a:xfrm>
+            <a:off x="9326880" y="4443984"/>
+            <a:ext cx="1005839" cy="292608"/>
+          </a:xfrm>
+          <a:prstGeom prst="rect">
+            <a:avLst/>
+          </a:prstGeom>
+          <a:noFill/>
+        </p:spPr>
+        <p:txBody>
+          <a:bodyPr wrap="square">
+            <a:spAutoFit/>
+          </a:bodyPr>
+          <a:lstStyle/>
+          <a:p>
+            <a:pPr algn="l"/>
+            <a:r>
+              <a:rPr sz="1500" b="0" lang="ja-JP">
+                <a:solidFill>
+                  <a:srgbClr val="8B6B5E"/>
+                </a:solidFill>
+                <a:latin typeface="BIZ UDPGothic"/>
+                <a:ea typeface="BIZ UDPGothic"/>
+                <a:cs typeface="BIZ UDPGothic"/>
+              </a:rPr>
+              <a:t>—</a:t>
+            </a:r>
+          </a:p>
+        </p:txBody>
+      </p:sp>
+      <p:sp>
+        <p:nvSpPr>
+          <p:cNvPr id="110" name="Rectangle 109"/>
+          <p:cNvSpPr/>
+          <p:nvPr/>
+        </p:nvSpPr>
+        <p:spPr>
+          <a:xfrm>
+            <a:off x="10378439" y="4407408"/>
+            <a:ext cx="1005840" cy="365760"/>
+          </a:xfrm>
+          <a:prstGeom prst="rect">
+            <a:avLst/>
+          </a:prstGeom>
+          <a:solidFill>
+            <a:srgbClr val="FBF5F0"/>
+          </a:solidFill>
+          <a:ln w="12700">
+            <a:solidFill>
+              <a:srgbClr val="DDD0C5"/>
+            </a:solidFill>
+          </a:ln>
+        </p:spPr>
+        <p:txBody>
+          <a:bodyPr rtlCol="0" anchor="ctr"/>
+          <a:lstStyle/>
+          <a:p>
+            <a:pPr algn="ctr"/>
+          </a:p>
+        </p:txBody>
+      </p:sp>
+      <p:sp>
+        <p:nvSpPr>
+          <p:cNvPr id="111" name="TextBox 110"/>
+          <p:cNvSpPr txBox="1"/>
+          <p:nvPr/>
+        </p:nvSpPr>
+        <p:spPr>
+          <a:xfrm>
+            <a:off x="10424159" y="4443984"/>
+            <a:ext cx="914400" cy="292608"/>
+          </a:xfrm>
+          <a:prstGeom prst="rect">
+            <a:avLst/>
+          </a:prstGeom>
+          <a:noFill/>
+        </p:spPr>
+        <p:txBody>
+          <a:bodyPr wrap="square">
+            <a:spAutoFit/>
+          </a:bodyPr>
+          <a:lstStyle/>
+          <a:p>
+            <a:pPr algn="l"/>
+            <a:r>
+              <a:rPr sz="1500" b="0" lang="ja-JP">
+                <a:solidFill>
+                  <a:srgbClr val="8B6B5E"/>
+                </a:solidFill>
+                <a:latin typeface="BIZ UDPGothic"/>
+                <a:ea typeface="BIZ UDPGothic"/>
+                <a:cs typeface="BIZ UDPGothic"/>
+              </a:rPr>
+              <a:t>—</a:t>
+            </a:r>
+          </a:p>
+        </p:txBody>
+      </p:sp>
+      <p:sp>
+        <p:nvSpPr>
+          <p:cNvPr id="112" name="Rectangle 111"/>
+          <p:cNvSpPr/>
+          <p:nvPr/>
+        </p:nvSpPr>
+        <p:spPr>
+          <a:xfrm>
+            <a:off x="6263640" y="4791456"/>
+            <a:ext cx="1005840" cy="365760"/>
+          </a:xfrm>
+          <a:prstGeom prst="rect">
+            <a:avLst/>
+          </a:prstGeom>
+          <a:solidFill>
+            <a:srgbClr val="FBF5F0"/>
+          </a:solidFill>
+          <a:ln w="12700">
+            <a:solidFill>
+              <a:srgbClr val="DDD0C5"/>
+            </a:solidFill>
+          </a:ln>
+        </p:spPr>
+        <p:txBody>
+          <a:bodyPr rtlCol="0" anchor="ctr"/>
+          <a:lstStyle/>
+          <a:p>
+            <a:pPr algn="ctr"/>
+          </a:p>
+        </p:txBody>
+      </p:sp>
+      <p:sp>
+        <p:nvSpPr>
+          <p:cNvPr id="113" name="TextBox 112"/>
+          <p:cNvSpPr txBox="1"/>
+          <p:nvPr/>
+        </p:nvSpPr>
+        <p:spPr>
+          <a:xfrm>
+            <a:off x="6309359" y="4828032"/>
+            <a:ext cx="914400" cy="292608"/>
+          </a:xfrm>
+          <a:prstGeom prst="rect">
+            <a:avLst/>
+          </a:prstGeom>
+          <a:noFill/>
+        </p:spPr>
+        <p:txBody>
+          <a:bodyPr wrap="square">
+            <a:spAutoFit/>
+          </a:bodyPr>
+          <a:lstStyle/>
+          <a:p>
+            <a:pPr algn="l"/>
+            <a:r>
+              <a:rPr sz="1500" b="0" lang="ja-JP">
+                <a:solidFill>
+                  <a:srgbClr val="8B6B5E"/>
+                </a:solidFill>
+                <a:latin typeface="BIZ UDPGothic"/>
+                <a:ea typeface="BIZ UDPGothic"/>
+                <a:cs typeface="BIZ UDPGothic"/>
+              </a:rPr>
+              <a:t>第9日</a:t>
+            </a:r>
+          </a:p>
+        </p:txBody>
+      </p:sp>
+      <p:sp>
+        <p:nvSpPr>
+          <p:cNvPr id="114" name="Rectangle 113"/>
+          <p:cNvSpPr/>
+          <p:nvPr/>
+        </p:nvSpPr>
+        <p:spPr>
+          <a:xfrm>
+            <a:off x="7269479" y="4791456"/>
+            <a:ext cx="1005840" cy="365760"/>
+          </a:xfrm>
+          <a:prstGeom prst="rect">
+            <a:avLst/>
+          </a:prstGeom>
+          <a:solidFill>
+            <a:srgbClr val="FBF5F0"/>
+          </a:solidFill>
+          <a:ln w="12700">
+            <a:solidFill>
+              <a:srgbClr val="DDD0C5"/>
+            </a:solidFill>
+          </a:ln>
+        </p:spPr>
+        <p:txBody>
+          <a:bodyPr rtlCol="0" anchor="ctr"/>
+          <a:lstStyle/>
+          <a:p>
+            <a:pPr algn="ctr"/>
+          </a:p>
+        </p:txBody>
+      </p:sp>
+      <p:sp>
+        <p:nvSpPr>
+          <p:cNvPr id="115" name="TextBox 114"/>
+          <p:cNvSpPr txBox="1"/>
+          <p:nvPr/>
+        </p:nvSpPr>
+        <p:spPr>
+          <a:xfrm>
+            <a:off x="7315199" y="4828032"/>
+            <a:ext cx="914400" cy="292608"/>
+          </a:xfrm>
+          <a:prstGeom prst="rect">
+            <a:avLst/>
+          </a:prstGeom>
+          <a:noFill/>
+        </p:spPr>
+        <p:txBody>
+          <a:bodyPr wrap="square">
+            <a:spAutoFit/>
+          </a:bodyPr>
+          <a:lstStyle/>
+          <a:p>
+            <a:pPr algn="l"/>
+            <a:r>
+              <a:rPr sz="1500" b="0" lang="ja-JP">
+                <a:solidFill>
+                  <a:srgbClr val="8B6B5E"/>
+                </a:solidFill>
+                <a:latin typeface="BIZ UDPGothic"/>
+                <a:ea typeface="BIZ UDPGothic"/>
+                <a:cs typeface="BIZ UDPGothic"/>
+              </a:rPr>
+              <a:t>—</a:t>
+            </a:r>
+          </a:p>
+        </p:txBody>
+      </p:sp>
+      <p:sp>
+        <p:nvSpPr>
+          <p:cNvPr id="116" name="Rectangle 115"/>
+          <p:cNvSpPr/>
+          <p:nvPr/>
+        </p:nvSpPr>
+        <p:spPr>
+          <a:xfrm>
+            <a:off x="8275319" y="4791456"/>
+            <a:ext cx="1005840" cy="365760"/>
+          </a:xfrm>
+          <a:prstGeom prst="rect">
+            <a:avLst/>
+          </a:prstGeom>
+          <a:solidFill>
+            <a:srgbClr val="FBF5F0"/>
+          </a:solidFill>
+          <a:ln w="12700">
+            <a:solidFill>
+              <a:srgbClr val="DDD0C5"/>
+            </a:solidFill>
+          </a:ln>
+        </p:spPr>
+        <p:txBody>
+          <a:bodyPr rtlCol="0" anchor="ctr"/>
+          <a:lstStyle/>
+          <a:p>
+            <a:pPr algn="ctr"/>
+          </a:p>
+        </p:txBody>
+      </p:sp>
+      <p:sp>
+        <p:nvSpPr>
+          <p:cNvPr id="117" name="TextBox 116"/>
+          <p:cNvSpPr txBox="1"/>
+          <p:nvPr/>
+        </p:nvSpPr>
+        <p:spPr>
+          <a:xfrm>
+            <a:off x="8321040" y="4828032"/>
+            <a:ext cx="914400" cy="292608"/>
+          </a:xfrm>
+          <a:prstGeom prst="rect">
+            <a:avLst/>
+          </a:prstGeom>
+          <a:noFill/>
+        </p:spPr>
+        <p:txBody>
+          <a:bodyPr wrap="square">
+            <a:spAutoFit/>
+          </a:bodyPr>
+          <a:lstStyle/>
+          <a:p>
+            <a:pPr algn="l"/>
+            <a:r>
+              <a:rPr sz="1500" b="0" lang="ja-JP">
+                <a:solidFill>
+                  <a:srgbClr val="8B6B5E"/>
+                </a:solidFill>
+                <a:latin typeface="BIZ UDPGothic"/>
+                <a:ea typeface="BIZ UDPGothic"/>
+                <a:cs typeface="BIZ UDPGothic"/>
+              </a:rPr>
+              <a:t>—</a:t>
+            </a:r>
+          </a:p>
+        </p:txBody>
+      </p:sp>
+      <p:sp>
+        <p:nvSpPr>
+          <p:cNvPr id="118" name="Rectangle 117"/>
+          <p:cNvSpPr/>
+          <p:nvPr/>
+        </p:nvSpPr>
+        <p:spPr>
+          <a:xfrm>
+            <a:off x="9281159" y="4791456"/>
+            <a:ext cx="1097280" cy="365760"/>
+          </a:xfrm>
+          <a:prstGeom prst="rect">
+            <a:avLst/>
+          </a:prstGeom>
+          <a:solidFill>
+            <a:srgbClr val="FBF5F0"/>
+          </a:solidFill>
+          <a:ln w="12700">
+            <a:solidFill>
+              <a:srgbClr val="DDD0C5"/>
+            </a:solidFill>
+          </a:ln>
+        </p:spPr>
+        <p:txBody>
+          <a:bodyPr rtlCol="0" anchor="ctr"/>
+          <a:lstStyle/>
+          <a:p>
+            <a:pPr algn="ctr"/>
+          </a:p>
+        </p:txBody>
+      </p:sp>
+      <p:sp>
+        <p:nvSpPr>
+          <p:cNvPr id="119" name="TextBox 118"/>
+          <p:cNvSpPr txBox="1"/>
+          <p:nvPr/>
+        </p:nvSpPr>
+        <p:spPr>
+          <a:xfrm>
+            <a:off x="9326880" y="4828032"/>
+            <a:ext cx="1005839" cy="292608"/>
+          </a:xfrm>
+          <a:prstGeom prst="rect">
+            <a:avLst/>
+          </a:prstGeom>
+          <a:noFill/>
+        </p:spPr>
+        <p:txBody>
+          <a:bodyPr wrap="square">
+            <a:spAutoFit/>
+          </a:bodyPr>
+          <a:lstStyle/>
+          <a:p>
+            <a:pPr algn="l"/>
+            <a:r>
+              <a:rPr sz="1500" b="0" lang="ja-JP">
+                <a:solidFill>
+                  <a:srgbClr val="8B6B5E"/>
+                </a:solidFill>
+                <a:latin typeface="BIZ UDPGothic"/>
+                <a:ea typeface="BIZ UDPGothic"/>
+                <a:cs typeface="BIZ UDPGothic"/>
+              </a:rPr>
+              <a:t>—</a:t>
+            </a:r>
+          </a:p>
+        </p:txBody>
+      </p:sp>
+      <p:sp>
+        <p:nvSpPr>
+          <p:cNvPr id="120" name="Rectangle 119"/>
+          <p:cNvSpPr/>
+          <p:nvPr/>
+        </p:nvSpPr>
+        <p:spPr>
+          <a:xfrm>
+            <a:off x="10378439" y="4791456"/>
+            <a:ext cx="1005840" cy="365760"/>
+          </a:xfrm>
+          <a:prstGeom prst="rect">
+            <a:avLst/>
+          </a:prstGeom>
+          <a:solidFill>
+            <a:srgbClr val="FBF5F0"/>
+          </a:solidFill>
+          <a:ln w="12700">
+            <a:solidFill>
+              <a:srgbClr val="DDD0C5"/>
+            </a:solidFill>
+          </a:ln>
+        </p:spPr>
+        <p:txBody>
+          <a:bodyPr rtlCol="0" anchor="ctr"/>
+          <a:lstStyle/>
+          <a:p>
+            <a:pPr algn="ctr"/>
+          </a:p>
+        </p:txBody>
+      </p:sp>
+      <p:sp>
+        <p:nvSpPr>
+          <p:cNvPr id="121" name="TextBox 120"/>
+          <p:cNvSpPr txBox="1"/>
+          <p:nvPr/>
+        </p:nvSpPr>
+        <p:spPr>
+          <a:xfrm>
+            <a:off x="10424159" y="4828032"/>
+            <a:ext cx="914400" cy="292608"/>
+          </a:xfrm>
+          <a:prstGeom prst="rect">
+            <a:avLst/>
+          </a:prstGeom>
+          <a:noFill/>
+        </p:spPr>
+        <p:txBody>
+          <a:bodyPr wrap="square">
+            <a:spAutoFit/>
+          </a:bodyPr>
+          <a:lstStyle/>
+          <a:p>
+            <a:pPr algn="l"/>
+            <a:r>
+              <a:rPr sz="1500" b="0" lang="ja-JP">
+                <a:solidFill>
+                  <a:srgbClr val="8B6B5E"/>
+                </a:solidFill>
+                <a:latin typeface="BIZ UDPGothic"/>
+                <a:ea typeface="BIZ UDPGothic"/>
+                <a:cs typeface="BIZ UDPGothic"/>
+              </a:rPr>
+              <a:t>—</a:t>
+            </a:r>
+          </a:p>
+        </p:txBody>
+      </p:sp>
+      <p:sp>
+        <p:nvSpPr>
+          <p:cNvPr id="122" name="Rectangle 121"/>
+          <p:cNvSpPr/>
+          <p:nvPr/>
+        </p:nvSpPr>
+        <p:spPr>
+          <a:xfrm>
+            <a:off x="6263640" y="5175504"/>
+            <a:ext cx="1005840" cy="365760"/>
+          </a:xfrm>
+          <a:prstGeom prst="rect">
+            <a:avLst/>
+          </a:prstGeom>
+          <a:solidFill>
+            <a:srgbClr val="FBF5F0"/>
+          </a:solidFill>
+          <a:ln w="12700">
+            <a:solidFill>
+              <a:srgbClr val="DDD0C5"/>
+            </a:solidFill>
+          </a:ln>
+        </p:spPr>
+        <p:txBody>
+          <a:bodyPr rtlCol="0" anchor="ctr"/>
+          <a:lstStyle/>
+          <a:p>
+            <a:pPr algn="ctr"/>
+          </a:p>
+        </p:txBody>
+      </p:sp>
+      <p:sp>
+        <p:nvSpPr>
+          <p:cNvPr id="123" name="TextBox 122"/>
+          <p:cNvSpPr txBox="1"/>
+          <p:nvPr/>
+        </p:nvSpPr>
+        <p:spPr>
+          <a:xfrm>
+            <a:off x="6309359" y="5212080"/>
+            <a:ext cx="914400" cy="292608"/>
+          </a:xfrm>
+          <a:prstGeom prst="rect">
+            <a:avLst/>
+          </a:prstGeom>
+          <a:noFill/>
+        </p:spPr>
+        <p:txBody>
+          <a:bodyPr wrap="square">
+            <a:spAutoFit/>
+          </a:bodyPr>
+          <a:lstStyle/>
+          <a:p>
+            <a:pPr algn="l"/>
+            <a:r>
+              <a:rPr sz="1500" b="0" lang="ja-JP">
+                <a:solidFill>
+                  <a:srgbClr val="8B6B5E"/>
+                </a:solidFill>
+                <a:latin typeface="BIZ UDPGothic"/>
+                <a:ea typeface="BIZ UDPGothic"/>
+                <a:cs typeface="BIZ UDPGothic"/>
+              </a:rPr>
+              <a:t>第10日</a:t>
+            </a:r>
+          </a:p>
+        </p:txBody>
+      </p:sp>
+      <p:sp>
+        <p:nvSpPr>
+          <p:cNvPr id="124" name="Rectangle 123"/>
+          <p:cNvSpPr/>
+          <p:nvPr/>
+        </p:nvSpPr>
+        <p:spPr>
+          <a:xfrm>
+            <a:off x="7269479" y="5175504"/>
+            <a:ext cx="1005840" cy="365760"/>
+          </a:xfrm>
+          <a:prstGeom prst="rect">
+            <a:avLst/>
+          </a:prstGeom>
+          <a:solidFill>
+            <a:srgbClr val="FBF5F0"/>
+          </a:solidFill>
+          <a:ln w="12700">
+            <a:solidFill>
+              <a:srgbClr val="DDD0C5"/>
+            </a:solidFill>
+          </a:ln>
+        </p:spPr>
+        <p:txBody>
+          <a:bodyPr rtlCol="0" anchor="ctr"/>
+          <a:lstStyle/>
+          <a:p>
+            <a:pPr algn="ctr"/>
+          </a:p>
+        </p:txBody>
+      </p:sp>
+      <p:sp>
+        <p:nvSpPr>
+          <p:cNvPr id="125" name="TextBox 124"/>
+          <p:cNvSpPr txBox="1"/>
+          <p:nvPr/>
+        </p:nvSpPr>
+        <p:spPr>
+          <a:xfrm>
+            <a:off x="7315199" y="5212080"/>
+            <a:ext cx="914400" cy="292608"/>
+          </a:xfrm>
+          <a:prstGeom prst="rect">
+            <a:avLst/>
+          </a:prstGeom>
+          <a:noFill/>
+        </p:spPr>
+        <p:txBody>
+          <a:bodyPr wrap="square">
+            <a:spAutoFit/>
+          </a:bodyPr>
+          <a:lstStyle/>
+          <a:p>
+            <a:pPr algn="l"/>
+            <a:r>
+              <a:rPr sz="1500" b="0" lang="ja-JP">
+                <a:solidFill>
+                  <a:srgbClr val="8B6B5E"/>
+                </a:solidFill>
+                <a:latin typeface="BIZ UDPGothic"/>
+                <a:ea typeface="BIZ UDPGothic"/>
+                <a:cs typeface="BIZ UDPGothic"/>
+              </a:rPr>
+              <a:t>—</a:t>
+            </a:r>
+          </a:p>
+        </p:txBody>
+      </p:sp>
+      <p:sp>
+        <p:nvSpPr>
+          <p:cNvPr id="126" name="Rectangle 125"/>
+          <p:cNvSpPr/>
+          <p:nvPr/>
+        </p:nvSpPr>
+        <p:spPr>
+          <a:xfrm>
+            <a:off x="8275319" y="5175504"/>
+            <a:ext cx="1005840" cy="365760"/>
+          </a:xfrm>
+          <a:prstGeom prst="rect">
+            <a:avLst/>
+          </a:prstGeom>
+          <a:solidFill>
+            <a:srgbClr val="FBF5F0"/>
+          </a:solidFill>
+          <a:ln w="12700">
+            <a:solidFill>
+              <a:srgbClr val="DDD0C5"/>
+            </a:solidFill>
+          </a:ln>
+        </p:spPr>
+        <p:txBody>
+          <a:bodyPr rtlCol="0" anchor="ctr"/>
+          <a:lstStyle/>
+          <a:p>
+            <a:pPr algn="ctr"/>
+          </a:p>
+        </p:txBody>
+      </p:sp>
+      <p:sp>
+        <p:nvSpPr>
+          <p:cNvPr id="127" name="TextBox 126"/>
+          <p:cNvSpPr txBox="1"/>
+          <p:nvPr/>
+        </p:nvSpPr>
+        <p:spPr>
+          <a:xfrm>
+            <a:off x="8321040" y="5212080"/>
+            <a:ext cx="914400" cy="292608"/>
+          </a:xfrm>
+          <a:prstGeom prst="rect">
+            <a:avLst/>
+          </a:prstGeom>
+          <a:noFill/>
+        </p:spPr>
+        <p:txBody>
+          <a:bodyPr wrap="square">
+            <a:spAutoFit/>
+          </a:bodyPr>
+          <a:lstStyle/>
+          <a:p>
+            <a:pPr algn="l"/>
+            <a:r>
+              <a:rPr sz="1500" b="0" lang="ja-JP">
+                <a:solidFill>
+                  <a:srgbClr val="8B6B5E"/>
+                </a:solidFill>
+                <a:latin typeface="BIZ UDPGothic"/>
+                <a:ea typeface="BIZ UDPGothic"/>
+                <a:cs typeface="BIZ UDPGothic"/>
+              </a:rPr>
+              <a:t>—</a:t>
+            </a:r>
+          </a:p>
+        </p:txBody>
+      </p:sp>
+      <p:sp>
+        <p:nvSpPr>
+          <p:cNvPr id="128" name="Rectangle 127"/>
+          <p:cNvSpPr/>
+          <p:nvPr/>
+        </p:nvSpPr>
+        <p:spPr>
+          <a:xfrm>
+            <a:off x="9281159" y="5175504"/>
+            <a:ext cx="1097280" cy="365760"/>
+          </a:xfrm>
+          <a:prstGeom prst="rect">
+            <a:avLst/>
+          </a:prstGeom>
+          <a:solidFill>
+            <a:srgbClr val="FBF5F0"/>
+          </a:solidFill>
+          <a:ln w="12700">
+            <a:solidFill>
+              <a:srgbClr val="DDD0C5"/>
+            </a:solidFill>
+          </a:ln>
+        </p:spPr>
+        <p:txBody>
+          <a:bodyPr rtlCol="0" anchor="ctr"/>
+          <a:lstStyle/>
+          <a:p>
+            <a:pPr algn="ctr"/>
+          </a:p>
+        </p:txBody>
+      </p:sp>
+      <p:sp>
+        <p:nvSpPr>
+          <p:cNvPr id="129" name="TextBox 128"/>
+          <p:cNvSpPr txBox="1"/>
+          <p:nvPr/>
+        </p:nvSpPr>
+        <p:spPr>
+          <a:xfrm>
+            <a:off x="9326880" y="5212080"/>
+            <a:ext cx="1005839" cy="292608"/>
+          </a:xfrm>
+          <a:prstGeom prst="rect">
+            <a:avLst/>
+          </a:prstGeom>
+          <a:noFill/>
+        </p:spPr>
+        <p:txBody>
+          <a:bodyPr wrap="square">
+            <a:spAutoFit/>
+          </a:bodyPr>
+          <a:lstStyle/>
+          <a:p>
+            <a:pPr algn="l"/>
+            <a:r>
+              <a:rPr sz="1500" b="0" lang="ja-JP">
+                <a:solidFill>
+                  <a:srgbClr val="8B6B5E"/>
+                </a:solidFill>
+                <a:latin typeface="BIZ UDPGothic"/>
+                <a:ea typeface="BIZ UDPGothic"/>
+                <a:cs typeface="BIZ UDPGothic"/>
+              </a:rPr>
+              <a:t>—</a:t>
+            </a:r>
+          </a:p>
+        </p:txBody>
+      </p:sp>
+      <p:sp>
+        <p:nvSpPr>
+          <p:cNvPr id="130" name="Rectangle 129"/>
+          <p:cNvSpPr/>
+          <p:nvPr/>
+        </p:nvSpPr>
+        <p:spPr>
+          <a:xfrm>
+            <a:off x="10378439" y="5175504"/>
+            <a:ext cx="1005840" cy="365760"/>
+          </a:xfrm>
+          <a:prstGeom prst="rect">
+            <a:avLst/>
+          </a:prstGeom>
+          <a:solidFill>
+            <a:srgbClr val="FBF5F0"/>
+          </a:solidFill>
+          <a:ln w="12700">
+            <a:solidFill>
+              <a:srgbClr val="DDD0C5"/>
+            </a:solidFill>
+          </a:ln>
+        </p:spPr>
+        <p:txBody>
+          <a:bodyPr rtlCol="0" anchor="ctr"/>
+          <a:lstStyle/>
+          <a:p>
+            <a:pPr algn="ctr"/>
+          </a:p>
+        </p:txBody>
+      </p:sp>
+      <p:sp>
+        <p:nvSpPr>
+          <p:cNvPr id="131" name="TextBox 130"/>
+          <p:cNvSpPr txBox="1"/>
+          <p:nvPr/>
+        </p:nvSpPr>
+        <p:spPr>
+          <a:xfrm>
+            <a:off x="10424159" y="5212080"/>
+            <a:ext cx="914400" cy="292608"/>
+          </a:xfrm>
+          <a:prstGeom prst="rect">
+            <a:avLst/>
+          </a:prstGeom>
+          <a:noFill/>
+        </p:spPr>
+        <p:txBody>
+          <a:bodyPr wrap="square">
+            <a:spAutoFit/>
+          </a:bodyPr>
+          <a:lstStyle/>
+          <a:p>
+            <a:pPr algn="l"/>
+            <a:r>
+              <a:rPr sz="1500" b="0" lang="ja-JP">
+                <a:solidFill>
+                  <a:srgbClr val="8B6B5E"/>
+                </a:solidFill>
+                <a:latin typeface="BIZ UDPGothic"/>
+                <a:ea typeface="BIZ UDPGothic"/>
+                <a:cs typeface="BIZ UDPGothic"/>
+              </a:rPr>
+              <a:t>—</a:t>
+            </a:r>
+          </a:p>
+        </p:txBody>
+      </p:sp>
+      <p:sp>
+        <p:nvSpPr>
+          <p:cNvPr id="132" name="TextBox 131"/>
+          <p:cNvSpPr txBox="1"/>
+          <p:nvPr/>
+        </p:nvSpPr>
+        <p:spPr>
+          <a:xfrm>
+            <a:off x="777240" y="5760720"/>
+            <a:ext cx="10515600" cy="384048"/>
+          </a:xfrm>
+          <a:prstGeom prst="rect">
+            <a:avLst/>
+          </a:prstGeom>
+          <a:noFill/>
+        </p:spPr>
+        <p:txBody>
+          <a:bodyPr wrap="square">
+            <a:spAutoFit/>
+          </a:bodyPr>
+          <a:lstStyle/>
+          <a:p>
+            <a:pPr algn="l"/>
+            <a:r>
+              <a:rPr sz="1400" b="0" lang="ja-JP">
+                <a:solidFill>
+                  <a:srgbClr val="8B6B5E"/>
+                </a:solidFill>
+                <a:latin typeface="BIZ UDPGothic"/>
+                <a:ea typeface="BIZ UDPGothic"/>
+                <a:cs typeface="BIZ UDPGothic"/>
+              </a:rPr>
+              <a:t>— は未収集。0件ではない。待ち時間の測り方・集計単位は開始前に統一する。</a:t>
             </a:r>
           </a:p>
         </p:txBody>
@@ -7586,9 +10882,9 @@
                 <a:solidFill>
                   <a:srgbClr val="8B6B5E"/>
                 </a:solidFill>
-                <a:latin typeface="Noto Sans JP"/>
-                <a:ea typeface="Noto Sans JP"/>
-                <a:cs typeface="Noto Sans JP"/>
+                <a:latin typeface="BIZ UDPGothic"/>
+                <a:ea typeface="BIZ UDPGothic"/>
+                <a:cs typeface="BIZ UDPGothic"/>
               </a:rPr>
               <a:t>ASANAGI CAFÉ  /  朝営業の試行計画</a:t>
             </a:r>
@@ -7623,9 +10919,9 @@
                 <a:solidFill>
                   <a:srgbClr val="3D2B1F"/>
                 </a:solidFill>
-                <a:latin typeface="Noto Serif JP"/>
-                <a:ea typeface="Noto Serif JP"/>
-                <a:cs typeface="Noto Sans JP"/>
+                <a:latin typeface="Shippori Mincho"/>
+                <a:ea typeface="Shippori Mincho"/>
+                <a:cs typeface="BIZ UDPGothic"/>
               </a:rPr>
               <a:t>2週間後に、続ける条件を確かめる</a:t>
             </a:r>
@@ -7685,13 +10981,13 @@
           <a:p>
             <a:pPr algn="l"/>
             <a:r>
-              <a:rPr sz="900" b="0" lang="ja-JP">
+              <a:rPr sz="1300" b="0" lang="ja-JP">
                 <a:solidFill>
                   <a:srgbClr val="8B6B5E"/>
                 </a:solidFill>
-                <a:latin typeface="Noto Sans JP"/>
-                <a:ea typeface="Noto Sans JP"/>
-                <a:cs typeface="Noto Sans JP"/>
+                <a:latin typeface="BIZ UDPGothic"/>
+                <a:ea typeface="BIZ UDPGothic"/>
+                <a:cs typeface="BIZ UDPGothic"/>
               </a:rPr>
               <a:t>架空の企画案  •  提案値・仮定値  •  実績未収集</a:t>
             </a:r>
@@ -7726,9 +11022,9 @@
                 <a:solidFill>
                   <a:srgbClr val="8B6B5E"/>
                 </a:solidFill>
-                <a:latin typeface="Noto Sans JP"/>
-                <a:ea typeface="Noto Sans JP"/>
-                <a:cs typeface="Noto Sans JP"/>
+                <a:latin typeface="BIZ UDPGothic"/>
+                <a:ea typeface="BIZ UDPGothic"/>
+                <a:cs typeface="BIZ UDPGothic"/>
               </a:rPr>
               <a:t>5 / 5</a:t>
             </a:r>
@@ -7743,7 +11039,81 @@
         </p:nvSpPr>
         <p:spPr>
           <a:xfrm>
-            <a:off x="777240" y="2423160"/>
+            <a:off x="777240" y="2029968"/>
+            <a:ext cx="6217920" cy="365760"/>
+          </a:xfrm>
+          <a:prstGeom prst="rect">
+            <a:avLst/>
+          </a:prstGeom>
+          <a:noFill/>
+        </p:spPr>
+        <p:txBody>
+          <a:bodyPr wrap="square">
+            <a:spAutoFit/>
+          </a:bodyPr>
+          <a:lstStyle/>
+          <a:p>
+            <a:pPr algn="l"/>
+            <a:r>
+              <a:rPr sz="1600" b="1" lang="ja-JP">
+                <a:solidFill>
+                  <a:srgbClr val="8B6B5E"/>
+                </a:solidFill>
+                <a:latin typeface="BIZ UDPGothic"/>
+                <a:ea typeface="BIZ UDPGothic"/>
+                <a:cs typeface="BIZ UDPGothic"/>
+              </a:rPr>
+              <a:t>確かめる観点</a:t>
+            </a:r>
+          </a:p>
+        </p:txBody>
+      </p:sp>
+      <p:sp>
+        <p:nvSpPr>
+          <p:cNvPr id="10" name="TextBox 9"/>
+          <p:cNvSpPr txBox="1"/>
+          <p:nvPr/>
+        </p:nvSpPr>
+        <p:spPr>
+          <a:xfrm>
+            <a:off x="7589520" y="2029968"/>
+            <a:ext cx="3749039" cy="365760"/>
+          </a:xfrm>
+          <a:prstGeom prst="rect">
+            <a:avLst/>
+          </a:prstGeom>
+          <a:noFill/>
+        </p:spPr>
+        <p:txBody>
+          <a:bodyPr wrap="square">
+            <a:spAutoFit/>
+          </a:bodyPr>
+          <a:lstStyle/>
+          <a:p>
+            <a:pPr algn="l"/>
+            <a:r>
+              <a:rPr sz="1600" b="1" lang="ja-JP">
+                <a:solidFill>
+                  <a:srgbClr val="8B6B5E"/>
+                </a:solidFill>
+                <a:latin typeface="BIZ UDPGothic"/>
+                <a:ea typeface="BIZ UDPGothic"/>
+                <a:cs typeface="BIZ UDPGothic"/>
+              </a:rPr>
+              <a:t>開始前に記入（未合意）</a:t>
+            </a:r>
+          </a:p>
+        </p:txBody>
+      </p:sp>
+      <p:sp>
+        <p:nvSpPr>
+          <p:cNvPr id="11" name="TextBox 10"/>
+          <p:cNvSpPr txBox="1"/>
+          <p:nvPr/>
+        </p:nvSpPr>
+        <p:spPr>
+          <a:xfrm>
+            <a:off x="777240" y="2560320"/>
             <a:ext cx="1463040" cy="502920"/>
           </a:xfrm>
           <a:prstGeom prst="rect">
@@ -7763,9 +11133,9 @@
                 <a:solidFill>
                   <a:srgbClr val="3D2B1F"/>
                 </a:solidFill>
-                <a:latin typeface="Noto Serif JP"/>
-                <a:ea typeface="Noto Serif JP"/>
-                <a:cs typeface="Noto Sans JP"/>
+                <a:latin typeface="Shippori Mincho"/>
+                <a:ea typeface="Shippori Mincho"/>
+                <a:cs typeface="BIZ UDPGothic"/>
               </a:rPr>
               <a:t>需要</a:t>
             </a:r>
@@ -7774,14 +11144,14 @@
       </p:sp>
       <p:sp>
         <p:nvSpPr>
-          <p:cNvPr id="10" name="TextBox 9"/>
-          <p:cNvSpPr txBox="1"/>
-          <p:nvPr/>
-        </p:nvSpPr>
-        <p:spPr>
-          <a:xfrm>
-            <a:off x="2560320" y="2423160"/>
-            <a:ext cx="8138160" cy="731520"/>
+          <p:cNvPr id="12" name="TextBox 11"/>
+          <p:cNvSpPr txBox="1"/>
+          <p:nvPr/>
+        </p:nvSpPr>
+        <p:spPr>
+          <a:xfrm>
+            <a:off x="2560320" y="2560320"/>
+            <a:ext cx="4754880" cy="731520"/>
           </a:xfrm>
           <a:prstGeom prst="rect">
             <a:avLst/>
@@ -7800,9 +11170,9 @@
                 <a:solidFill>
                   <a:srgbClr val="3D2B1F"/>
                 </a:solidFill>
-                <a:latin typeface="Noto Sans JP"/>
-                <a:ea typeface="Noto Sans JP"/>
-                <a:cs typeface="Noto Sans JP"/>
+                <a:latin typeface="BIZ UDPGothic"/>
+                <a:ea typeface="BIZ UDPGothic"/>
+                <a:cs typeface="BIZ UDPGothic"/>
               </a:rPr>
               <a:t>販売数と来店の時間帯から
 朝に開く意味があるか</a:t>
@@ -7812,13 +11182,51 @@
       </p:sp>
       <p:sp>
         <p:nvSpPr>
-          <p:cNvPr id="11" name="Rectangle 10"/>
+          <p:cNvPr id="13" name="TextBox 12"/>
+          <p:cNvSpPr txBox="1"/>
+          <p:nvPr/>
+        </p:nvSpPr>
+        <p:spPr>
+          <a:xfrm>
+            <a:off x="7589520" y="2560320"/>
+            <a:ext cx="3657600" cy="777240"/>
+          </a:xfrm>
+          <a:prstGeom prst="rect">
+            <a:avLst/>
+          </a:prstGeom>
+          <a:noFill/>
+        </p:spPr>
+        <p:txBody>
+          <a:bodyPr wrap="square">
+            <a:spAutoFit/>
+          </a:bodyPr>
+          <a:lstStyle/>
+          <a:p>
+            <a:pPr algn="l"/>
+            <a:r>
+              <a:rPr sz="1800" b="0" lang="ja-JP">
+                <a:solidFill>
+                  <a:srgbClr val="3D2B1F"/>
+                </a:solidFill>
+                <a:latin typeface="BIZ UDPGothic"/>
+                <a:ea typeface="BIZ UDPGothic"/>
+                <a:cs typeface="BIZ UDPGothic"/>
+              </a:rPr>
+              <a:t>必要な販売数
+____ セット／日</a:t>
+            </a:r>
+          </a:p>
+        </p:txBody>
+      </p:sp>
+      <p:sp>
+        <p:nvSpPr>
+          <p:cNvPr id="14" name="Rectangle 13"/>
           <p:cNvSpPr/>
           <p:nvPr/>
         </p:nvSpPr>
         <p:spPr>
           <a:xfrm>
-            <a:off x="777240" y="3136391"/>
+            <a:off x="777240" y="3310127"/>
             <a:ext cx="10607040" cy="13716"/>
           </a:xfrm>
           <a:prstGeom prst="rect">
@@ -7841,13 +11249,13 @@
       </p:sp>
       <p:sp>
         <p:nvSpPr>
-          <p:cNvPr id="12" name="TextBox 11"/>
-          <p:cNvSpPr txBox="1"/>
-          <p:nvPr/>
-        </p:nvSpPr>
-        <p:spPr>
-          <a:xfrm>
-            <a:off x="777240" y="3264408"/>
+          <p:cNvPr id="15" name="TextBox 14"/>
+          <p:cNvSpPr txBox="1"/>
+          <p:nvPr/>
+        </p:nvSpPr>
+        <p:spPr>
+          <a:xfrm>
+            <a:off x="777240" y="3456432"/>
             <a:ext cx="1463040" cy="502920"/>
           </a:xfrm>
           <a:prstGeom prst="rect">
@@ -7867,9 +11275,9 @@
                 <a:solidFill>
                   <a:srgbClr val="3D2B1F"/>
                 </a:solidFill>
-                <a:latin typeface="Noto Serif JP"/>
-                <a:ea typeface="Noto Serif JP"/>
-                <a:cs typeface="Noto Sans JP"/>
+                <a:latin typeface="Shippori Mincho"/>
+                <a:ea typeface="Shippori Mincho"/>
+                <a:cs typeface="BIZ UDPGothic"/>
               </a:rPr>
               <a:t>負担</a:t>
             </a:r>
@@ -7878,14 +11286,14 @@
       </p:sp>
       <p:sp>
         <p:nvSpPr>
-          <p:cNvPr id="13" name="TextBox 12"/>
-          <p:cNvSpPr txBox="1"/>
-          <p:nvPr/>
-        </p:nvSpPr>
-        <p:spPr>
-          <a:xfrm>
-            <a:off x="2560320" y="3264408"/>
-            <a:ext cx="8138160" cy="731520"/>
+          <p:cNvPr id="16" name="TextBox 15"/>
+          <p:cNvSpPr txBox="1"/>
+          <p:nvPr/>
+        </p:nvSpPr>
+        <p:spPr>
+          <a:xfrm>
+            <a:off x="2560320" y="3456432"/>
+            <a:ext cx="4754880" cy="731520"/>
           </a:xfrm>
           <a:prstGeom prst="rect">
             <a:avLst/>
@@ -7904,9 +11312,9 @@
                 <a:solidFill>
                   <a:srgbClr val="3D2B1F"/>
                 </a:solidFill>
-                <a:latin typeface="Noto Sans JP"/>
-                <a:ea typeface="Noto Sans JP"/>
-                <a:cs typeface="Noto Sans JP"/>
+                <a:latin typeface="BIZ UDPGothic"/>
+                <a:ea typeface="BIZ UDPGothic"/>
+                <a:cs typeface="BIZ UDPGothic"/>
               </a:rPr>
               <a:t>待ち時間・片づけ・仕込みから
 無理なく続けられるか</a:t>
@@ -7916,13 +11324,51 @@
       </p:sp>
       <p:sp>
         <p:nvSpPr>
-          <p:cNvPr id="14" name="Rectangle 13"/>
+          <p:cNvPr id="17" name="TextBox 16"/>
+          <p:cNvSpPr txBox="1"/>
+          <p:nvPr/>
+        </p:nvSpPr>
+        <p:spPr>
+          <a:xfrm>
+            <a:off x="7589520" y="3456432"/>
+            <a:ext cx="3657600" cy="777240"/>
+          </a:xfrm>
+          <a:prstGeom prst="rect">
+            <a:avLst/>
+          </a:prstGeom>
+          <a:noFill/>
+        </p:spPr>
+        <p:txBody>
+          <a:bodyPr wrap="square">
+            <a:spAutoFit/>
+          </a:bodyPr>
+          <a:lstStyle/>
+          <a:p>
+            <a:pPr algn="l"/>
+            <a:r>
+              <a:rPr sz="1800" b="0" lang="ja-JP">
+                <a:solidFill>
+                  <a:srgbClr val="3D2B1F"/>
+                </a:solidFill>
+                <a:latin typeface="BIZ UDPGothic"/>
+                <a:ea typeface="BIZ UDPGothic"/>
+                <a:cs typeface="BIZ UDPGothic"/>
+              </a:rPr>
+              <a:t>許容する待ち時間
+____ 分</a:t>
+            </a:r>
+          </a:p>
+        </p:txBody>
+      </p:sp>
+      <p:sp>
+        <p:nvSpPr>
+          <p:cNvPr id="18" name="Rectangle 17"/>
           <p:cNvSpPr/>
           <p:nvPr/>
         </p:nvSpPr>
         <p:spPr>
           <a:xfrm>
-            <a:off x="777240" y="3977639"/>
+            <a:off x="777240" y="4206240"/>
             <a:ext cx="10607040" cy="13716"/>
           </a:xfrm>
           <a:prstGeom prst="rect">
@@ -7945,13 +11391,13 @@
       </p:sp>
       <p:sp>
         <p:nvSpPr>
-          <p:cNvPr id="15" name="TextBox 14"/>
-          <p:cNvSpPr txBox="1"/>
-          <p:nvPr/>
-        </p:nvSpPr>
-        <p:spPr>
-          <a:xfrm>
-            <a:off x="777240" y="4105656"/>
+          <p:cNvPr id="19" name="TextBox 18"/>
+          <p:cNvSpPr txBox="1"/>
+          <p:nvPr/>
+        </p:nvSpPr>
+        <p:spPr>
+          <a:xfrm>
+            <a:off x="777240" y="4352544"/>
             <a:ext cx="1463040" cy="502920"/>
           </a:xfrm>
           <a:prstGeom prst="rect">
@@ -7971,9 +11417,9 @@
                 <a:solidFill>
                   <a:srgbClr val="3D2B1F"/>
                 </a:solidFill>
-                <a:latin typeface="Noto Serif JP"/>
-                <a:ea typeface="Noto Serif JP"/>
-                <a:cs typeface="Noto Sans JP"/>
+                <a:latin typeface="Shippori Mincho"/>
+                <a:ea typeface="Shippori Mincho"/>
+                <a:cs typeface="BIZ UDPGothic"/>
               </a:rPr>
               <a:t>廃棄</a:t>
             </a:r>
@@ -7982,14 +11428,14 @@
       </p:sp>
       <p:sp>
         <p:nvSpPr>
-          <p:cNvPr id="16" name="TextBox 15"/>
-          <p:cNvSpPr txBox="1"/>
-          <p:nvPr/>
-        </p:nvSpPr>
-        <p:spPr>
-          <a:xfrm>
-            <a:off x="2560320" y="4105656"/>
-            <a:ext cx="8138160" cy="731520"/>
+          <p:cNvPr id="20" name="TextBox 19"/>
+          <p:cNvSpPr txBox="1"/>
+          <p:nvPr/>
+        </p:nvSpPr>
+        <p:spPr>
+          <a:xfrm>
+            <a:off x="2560320" y="4352544"/>
+            <a:ext cx="4754880" cy="731520"/>
           </a:xfrm>
           <a:prstGeom prst="rect">
             <a:avLst/>
@@ -8008,9 +11454,9 @@
                 <a:solidFill>
                   <a:srgbClr val="3D2B1F"/>
                 </a:solidFill>
-                <a:latin typeface="Noto Sans JP"/>
-                <a:ea typeface="Noto Sans JP"/>
-                <a:cs typeface="Noto Sans JP"/>
+                <a:latin typeface="BIZ UDPGothic"/>
+                <a:ea typeface="BIZ UDPGothic"/>
+                <a:cs typeface="BIZ UDPGothic"/>
               </a:rPr>
               <a:t>余りの数と準備量から
 少量運用に調整できるか</a:t>
@@ -8020,13 +11466,51 @@
       </p:sp>
       <p:sp>
         <p:nvSpPr>
-          <p:cNvPr id="17" name="Rectangle 16"/>
+          <p:cNvPr id="21" name="TextBox 20"/>
+          <p:cNvSpPr txBox="1"/>
+          <p:nvPr/>
+        </p:nvSpPr>
+        <p:spPr>
+          <a:xfrm>
+            <a:off x="7589520" y="4352544"/>
+            <a:ext cx="3657600" cy="777240"/>
+          </a:xfrm>
+          <a:prstGeom prst="rect">
+            <a:avLst/>
+          </a:prstGeom>
+          <a:noFill/>
+        </p:spPr>
+        <p:txBody>
+          <a:bodyPr wrap="square">
+            <a:spAutoFit/>
+          </a:bodyPr>
+          <a:lstStyle/>
+          <a:p>
+            <a:pPr algn="l"/>
+            <a:r>
+              <a:rPr sz="1800" b="0" lang="ja-JP">
+                <a:solidFill>
+                  <a:srgbClr val="3D2B1F"/>
+                </a:solidFill>
+                <a:latin typeface="BIZ UDPGothic"/>
+                <a:ea typeface="BIZ UDPGothic"/>
+                <a:cs typeface="BIZ UDPGothic"/>
+              </a:rPr>
+              <a:t>準備量と廃棄上限
+____ ／ ____ セット</a:t>
+            </a:r>
+          </a:p>
+        </p:txBody>
+      </p:sp>
+      <p:sp>
+        <p:nvSpPr>
+          <p:cNvPr id="22" name="Rectangle 21"/>
           <p:cNvSpPr/>
           <p:nvPr/>
         </p:nvSpPr>
         <p:spPr>
           <a:xfrm>
-            <a:off x="777240" y="4818888"/>
+            <a:off x="777240" y="5102352"/>
             <a:ext cx="10607040" cy="13716"/>
           </a:xfrm>
           <a:prstGeom prst="rect">
@@ -8049,14 +11533,14 @@
       </p:sp>
       <p:sp>
         <p:nvSpPr>
-          <p:cNvPr id="18" name="Rounded Rectangle 17"/>
+          <p:cNvPr id="23" name="Rounded Rectangle 22"/>
           <p:cNvSpPr/>
           <p:nvPr/>
         </p:nvSpPr>
         <p:spPr>
           <a:xfrm>
-            <a:off x="777240" y="5230368"/>
-            <a:ext cx="10607040" cy="786384"/>
+            <a:off x="777240" y="5458968"/>
+            <a:ext cx="10607040" cy="640080"/>
           </a:xfrm>
           <a:prstGeom prst="roundRect">
             <a:avLst/>
@@ -8078,14 +11562,14 @@
       </p:sp>
       <p:sp>
         <p:nvSpPr>
-          <p:cNvPr id="19" name="TextBox 18"/>
-          <p:cNvSpPr txBox="1"/>
-          <p:nvPr/>
-        </p:nvSpPr>
-        <p:spPr>
-          <a:xfrm>
-            <a:off x="941832" y="5367528"/>
-            <a:ext cx="10241280" cy="548640"/>
+          <p:cNvPr id="24" name="TextBox 23"/>
+          <p:cNvSpPr txBox="1"/>
+          <p:nvPr/>
+        </p:nvSpPr>
+        <p:spPr>
+          <a:xfrm>
+            <a:off x="941832" y="5559552"/>
+            <a:ext cx="10241280" cy="411480"/>
           </a:xfrm>
           <a:prstGeom prst="rect">
             <a:avLst/>
@@ -8104,9 +11588,9 @@
                 <a:solidFill>
                   <a:srgbClr val="3D2B1F"/>
                 </a:solidFill>
-                <a:latin typeface="Noto Sans JP"/>
-                <a:ea typeface="Noto Sans JP"/>
-                <a:cs typeface="Noto Sans JP"/>
+                <a:latin typeface="BIZ UDPGothic"/>
+                <a:ea typeface="BIZ UDPGothic"/>
+                <a:cs typeface="BIZ UDPGothic"/>
               </a:rPr>
               <a:t>開始前に判断基準を合意  →  10日分を確認  →  継続・変更・終了を選ぶ</a:t>
             </a:r>
